--- a/SIH26036-PPT.pptx
+++ b/SIH26036-PPT.pptx
@@ -262,7 +262,7 @@
             <a:fld id="{C4D5ADD5-2BBC-4A94-8F86-D9013941F742}" type="datetimeFigureOut">
               <a:rPr lang="en-US"/>
               <a:pPr/>
-              <a:t>6/2/2026</a:t>
+              <a:t>8/31/2026</a:t>
             </a:fld>
             <a:endParaRPr lang="en-US"/>
           </a:p>
@@ -1713,7 +1713,7 @@
           <a:p>
             <a:fld id="{E60792E3-D524-454C-8AFD-A91972900BCB}" type="datetime1">
               <a:rPr lang="en-US" smtClean="0"/>
-              <a:t>6/2/2026</a:t>
+              <a:t>8/31/2026</a:t>
             </a:fld>
             <a:endParaRPr lang="en-US"/>
           </a:p>
@@ -1895,7 +1895,7 @@
           <a:p>
             <a:fld id="{053C3A68-6922-42D3-8905-ECC2D82A3469}" type="datetime1">
               <a:rPr lang="en-US" smtClean="0"/>
-              <a:t>6/2/2026</a:t>
+              <a:t>8/31/2026</a:t>
             </a:fld>
             <a:endParaRPr lang="en-US"/>
           </a:p>
@@ -2087,7 +2087,7 @@
           <a:p>
             <a:fld id="{CB69E9F4-7604-4950-A8B2-8ACDEDB1506E}" type="datetime1">
               <a:rPr lang="en-US" smtClean="0"/>
-              <a:t>6/2/2026</a:t>
+              <a:t>8/31/2026</a:t>
             </a:fld>
             <a:endParaRPr lang="en-US"/>
           </a:p>
@@ -2269,7 +2269,7 @@
           <a:p>
             <a:fld id="{708B7524-32A2-4C20-A58C-BC3BAA1042FC}" type="datetime1">
               <a:rPr lang="en-US" smtClean="0"/>
-              <a:t>6/2/2026</a:t>
+              <a:t>8/31/2026</a:t>
             </a:fld>
             <a:endParaRPr lang="en-US"/>
           </a:p>
@@ -2528,7 +2528,7 @@
           <a:p>
             <a:fld id="{1E994447-D6B2-43BB-A877-57F1A267B999}" type="datetime1">
               <a:rPr lang="en-US" smtClean="0"/>
-              <a:t>6/2/2026</a:t>
+              <a:t>8/31/2026</a:t>
             </a:fld>
             <a:endParaRPr lang="en-US"/>
           </a:p>
@@ -2827,7 +2827,7 @@
           <a:p>
             <a:fld id="{68920E16-BD35-483C-AA6B-346FC7E46DEA}" type="datetime1">
               <a:rPr lang="en-US" smtClean="0"/>
-              <a:t>6/2/2026</a:t>
+              <a:t>8/31/2026</a:t>
             </a:fld>
             <a:endParaRPr lang="en-US"/>
           </a:p>
@@ -3260,7 +3260,7 @@
           <a:p>
             <a:fld id="{2FEAC6F8-5103-4FC0-A69E-5C6AE6469DA8}" type="datetime1">
               <a:rPr lang="en-US" smtClean="0"/>
-              <a:t>6/2/2026</a:t>
+              <a:t>8/31/2026</a:t>
             </a:fld>
             <a:endParaRPr lang="en-US"/>
           </a:p>
@@ -3391,7 +3391,7 @@
           <a:p>
             <a:fld id="{C60C6921-0627-4C8F-83D5-0CF936D2FFDD}" type="datetime1">
               <a:rPr lang="en-US" smtClean="0"/>
-              <a:t>6/2/2026</a:t>
+              <a:t>8/31/2026</a:t>
             </a:fld>
             <a:endParaRPr lang="en-US"/>
           </a:p>
@@ -3500,7 +3500,7 @@
           <a:p>
             <a:fld id="{2FF08AD7-8103-40F8-983C-E2BA6BB9CBE0}" type="datetime1">
               <a:rPr lang="en-US" smtClean="0"/>
-              <a:t>6/2/2026</a:t>
+              <a:t>8/31/2026</a:t>
             </a:fld>
             <a:endParaRPr lang="en-US"/>
           </a:p>
@@ -3789,7 +3789,7 @@
           <a:p>
             <a:fld id="{DF8C06B4-9380-4A4D-AF49-A3596E17DAF5}" type="datetime1">
               <a:rPr lang="en-US" smtClean="0"/>
-              <a:t>6/2/2026</a:t>
+              <a:t>8/31/2026</a:t>
             </a:fld>
             <a:endParaRPr lang="en-US"/>
           </a:p>
@@ -4058,7 +4058,7 @@
           <a:p>
             <a:fld id="{EF7FDEF1-C582-4E22-9E77-D68326471F28}" type="datetime1">
               <a:rPr lang="en-US" smtClean="0"/>
-              <a:t>6/2/2026</a:t>
+              <a:t>8/31/2026</a:t>
             </a:fld>
             <a:endParaRPr lang="en-US"/>
           </a:p>
@@ -4301,7 +4301,7 @@
           <a:p>
             <a:fld id="{780A9602-A9A9-453F-AEF1-37B5837E02CD}" type="datetime1">
               <a:rPr lang="en-US" smtClean="0"/>
-              <a:t>6/2/2026</a:t>
+              <a:t>8/31/2026</a:t>
             </a:fld>
             <a:endParaRPr lang="en-US"/>
           </a:p>
@@ -4852,7 +4852,7 @@
                 <a16:creationId xmlns:a16="http://schemas.microsoft.com/office/drawing/2014/main" id="{3E443FD7-A66B-4AA0-872D-B088B9BC5F17}"/>
               </a:ext>
               <a:ext uri="{C183D7F6-B498-43B3-948B-1728B52AA6E4}">
-                <adec:decorative xmlns:adec="http://schemas.microsoft.com/office/drawing/2017/decorative" xmlns="" val="1"/>
+                <adec:decorative xmlns:adec="http://schemas.microsoft.com/office/drawing/2017/decorative" val="1"/>
               </a:ext>
             </a:extLst>
           </p:cNvPr>
@@ -4912,7 +4912,7 @@
                 <a16:creationId xmlns:a16="http://schemas.microsoft.com/office/drawing/2014/main" id="{C04BE0EF-3561-49B4-9A29-F283168A91C7}"/>
               </a:ext>
               <a:ext uri="{C183D7F6-B498-43B3-948B-1728B52AA6E4}">
-                <adec:decorative xmlns:adec="http://schemas.microsoft.com/office/drawing/2017/decorative" xmlns="" val="1"/>
+                <adec:decorative xmlns:adec="http://schemas.microsoft.com/office/drawing/2017/decorative" val="1"/>
               </a:ext>
             </a:extLst>
           </p:cNvPr>
@@ -5783,16 +5783,7 @@
                 </a:solidFill>
                 <a:latin typeface="Garamond" panose="02020404030301010803" pitchFamily="18" charset="0"/>
               </a:rPr>
-              <a:t>SMART INDIA HACKATHON </a:t>
-            </a:r>
-            <a:r>
-              <a:rPr lang="en-US" sz="4000" b="1" dirty="0" smtClean="0">
-                <a:solidFill>
-                  <a:schemeClr val="tx2"/>
-                </a:solidFill>
-                <a:latin typeface="Garamond" panose="02020404030301010803" pitchFamily="18" charset="0"/>
-              </a:rPr>
-              <a:t>2026</a:t>
+              <a:t>SMART INDIA HACKATHON 2026</a:t>
             </a:r>
             <a:endParaRPr lang="en-IN" sz="4000" b="1" dirty="0">
               <a:solidFill>
@@ -5840,8 +5831,19 @@
                 <a:latin typeface="Arial" panose="020B0604020202020204" pitchFamily="34" charset="0"/>
                 <a:cs typeface="Arial" panose="020B0604020202020204" pitchFamily="34" charset="0"/>
               </a:rPr>
-              <a:t>Problem Statement ID –</a:t>
-            </a:r>
+              <a:t>Problem Statement </a:t>
+            </a:r>
+            <a:r>
+              <a:rPr lang="en-US" sz="2400" b="1">
+                <a:latin typeface="Arial" panose="020B0604020202020204" pitchFamily="34" charset="0"/>
+                <a:cs typeface="Arial" panose="020B0604020202020204" pitchFamily="34" charset="0"/>
+              </a:rPr>
+              <a:t>ID –1234</a:t>
+            </a:r>
+            <a:endParaRPr lang="en-US" sz="2400" b="1" dirty="0">
+              <a:latin typeface="Arial" panose="020B0604020202020204" pitchFamily="34" charset="0"/>
+              <a:cs typeface="Arial" panose="020B0604020202020204" pitchFamily="34" charset="0"/>
+            </a:endParaRPr>
           </a:p>
           <a:p>
             <a:pPr marL="285750" indent="-285750" algn="just">
@@ -6063,14 +6065,6 @@
           <a:lstStyle/>
           <a:p>
             <a:pPr eaLnBrk="1" hangingPunct="1"/>
-            <a:r>
-              <a:rPr lang="en-US" sz="3600" b="1" dirty="0">
-                <a:latin typeface="Times New Roman" panose="02020603050405020304" pitchFamily="18" charset="0"/>
-                <a:ea typeface="ＭＳ Ｐゴシック" pitchFamily="1" charset="-128"/>
-                <a:cs typeface="Times New Roman" panose="02020603050405020304" pitchFamily="18" charset="0"/>
-              </a:rPr>
-              <a:t/>
-            </a:r>
             <a:br>
               <a:rPr lang="en-US" sz="3600" b="1" dirty="0">
                 <a:latin typeface="Times New Roman" panose="02020603050405020304" pitchFamily="18" charset="0"/>
@@ -6287,7 +6281,7 @@
                 <a16:creationId xmlns:a16="http://schemas.microsoft.com/office/drawing/2014/main" id="{5DBCE864-823D-4A13-9607-5DA1F0ED5FB8}"/>
               </a:ext>
               <a:ext uri="{C183D7F6-B498-43B3-948B-1728B52AA6E4}">
-                <adec:decorative xmlns:adec="http://schemas.microsoft.com/office/drawing/2017/decorative" xmlns="" val="0"/>
+                <adec:decorative xmlns:adec="http://schemas.microsoft.com/office/drawing/2017/decorative" val="0"/>
               </a:ext>
             </a:extLst>
           </p:cNvPr>
@@ -6612,7 +6606,7 @@
                 <a16:creationId xmlns:a16="http://schemas.microsoft.com/office/drawing/2014/main" id="{5DBCE864-823D-4A13-9607-5DA1F0ED5FB8}"/>
               </a:ext>
               <a:ext uri="{C183D7F6-B498-43B3-948B-1728B52AA6E4}">
-                <adec:decorative xmlns:adec="http://schemas.microsoft.com/office/drawing/2017/decorative" xmlns="" val="0"/>
+                <adec:decorative xmlns:adec="http://schemas.microsoft.com/office/drawing/2017/decorative" val="0"/>
               </a:ext>
             </a:extLst>
           </p:cNvPr>
@@ -7148,7 +7142,7 @@
                 <a16:creationId xmlns:a16="http://schemas.microsoft.com/office/drawing/2014/main" id="{5DBCE864-823D-4A13-9607-5DA1F0ED5FB8}"/>
               </a:ext>
               <a:ext uri="{C183D7F6-B498-43B3-948B-1728B52AA6E4}">
-                <adec:decorative xmlns:adec="http://schemas.microsoft.com/office/drawing/2017/decorative" xmlns="" val="0"/>
+                <adec:decorative xmlns:adec="http://schemas.microsoft.com/office/drawing/2017/decorative" val="0"/>
               </a:ext>
             </a:extLst>
           </p:cNvPr>
@@ -7615,7 +7609,7 @@
                 <a16:creationId xmlns:a16="http://schemas.microsoft.com/office/drawing/2014/main" id="{5DBCE864-823D-4A13-9607-5DA1F0ED5FB8}"/>
               </a:ext>
               <a:ext uri="{C183D7F6-B498-43B3-948B-1728B52AA6E4}">
-                <adec:decorative xmlns:adec="http://schemas.microsoft.com/office/drawing/2017/decorative" xmlns="" val="0"/>
+                <adec:decorative xmlns:adec="http://schemas.microsoft.com/office/drawing/2017/decorative" val="0"/>
               </a:ext>
             </a:extLst>
           </p:cNvPr>
@@ -8060,7 +8054,7 @@
                 <a16:creationId xmlns:a16="http://schemas.microsoft.com/office/drawing/2014/main" id="{5DBCE864-823D-4A13-9607-5DA1F0ED5FB8}"/>
               </a:ext>
               <a:ext uri="{C183D7F6-B498-43B3-948B-1728B52AA6E4}">
-                <adec:decorative xmlns:adec="http://schemas.microsoft.com/office/drawing/2017/decorative" xmlns="" val="0"/>
+                <adec:decorative xmlns:adec="http://schemas.microsoft.com/office/drawing/2017/decorative" val="0"/>
               </a:ext>
             </a:extLst>
           </p:cNvPr>

--- a/SIH26036-PPT.pptx
+++ b/SIH26036-PPT.pptx
@@ -262,7 +262,7 @@
             <a:fld id="{C4D5ADD5-2BBC-4A94-8F86-D9013941F742}" type="datetimeFigureOut">
               <a:rPr lang="en-US"/>
               <a:pPr/>
-              <a:t>6/2/2026</a:t>
+              <a:t>8/31/2026</a:t>
             </a:fld>
             <a:endParaRPr lang="en-US"/>
           </a:p>
@@ -1713,7 +1713,7 @@
           <a:p>
             <a:fld id="{E60792E3-D524-454C-8AFD-A91972900BCB}" type="datetime1">
               <a:rPr lang="en-US" smtClean="0"/>
-              <a:t>6/2/2026</a:t>
+              <a:t>8/31/2026</a:t>
             </a:fld>
             <a:endParaRPr lang="en-US"/>
           </a:p>
@@ -1895,7 +1895,7 @@
           <a:p>
             <a:fld id="{053C3A68-6922-42D3-8905-ECC2D82A3469}" type="datetime1">
               <a:rPr lang="en-US" smtClean="0"/>
-              <a:t>6/2/2026</a:t>
+              <a:t>8/31/2026</a:t>
             </a:fld>
             <a:endParaRPr lang="en-US"/>
           </a:p>
@@ -2087,7 +2087,7 @@
           <a:p>
             <a:fld id="{CB69E9F4-7604-4950-A8B2-8ACDEDB1506E}" type="datetime1">
               <a:rPr lang="en-US" smtClean="0"/>
-              <a:t>6/2/2026</a:t>
+              <a:t>8/31/2026</a:t>
             </a:fld>
             <a:endParaRPr lang="en-US"/>
           </a:p>
@@ -2269,7 +2269,7 @@
           <a:p>
             <a:fld id="{708B7524-32A2-4C20-A58C-BC3BAA1042FC}" type="datetime1">
               <a:rPr lang="en-US" smtClean="0"/>
-              <a:t>6/2/2026</a:t>
+              <a:t>8/31/2026</a:t>
             </a:fld>
             <a:endParaRPr lang="en-US"/>
           </a:p>
@@ -2528,7 +2528,7 @@
           <a:p>
             <a:fld id="{1E994447-D6B2-43BB-A877-57F1A267B999}" type="datetime1">
               <a:rPr lang="en-US" smtClean="0"/>
-              <a:t>6/2/2026</a:t>
+              <a:t>8/31/2026</a:t>
             </a:fld>
             <a:endParaRPr lang="en-US"/>
           </a:p>
@@ -2827,7 +2827,7 @@
           <a:p>
             <a:fld id="{68920E16-BD35-483C-AA6B-346FC7E46DEA}" type="datetime1">
               <a:rPr lang="en-US" smtClean="0"/>
-              <a:t>6/2/2026</a:t>
+              <a:t>8/31/2026</a:t>
             </a:fld>
             <a:endParaRPr lang="en-US"/>
           </a:p>
@@ -3260,7 +3260,7 @@
           <a:p>
             <a:fld id="{2FEAC6F8-5103-4FC0-A69E-5C6AE6469DA8}" type="datetime1">
               <a:rPr lang="en-US" smtClean="0"/>
-              <a:t>6/2/2026</a:t>
+              <a:t>8/31/2026</a:t>
             </a:fld>
             <a:endParaRPr lang="en-US"/>
           </a:p>
@@ -3391,7 +3391,7 @@
           <a:p>
             <a:fld id="{C60C6921-0627-4C8F-83D5-0CF936D2FFDD}" type="datetime1">
               <a:rPr lang="en-US" smtClean="0"/>
-              <a:t>6/2/2026</a:t>
+              <a:t>8/31/2026</a:t>
             </a:fld>
             <a:endParaRPr lang="en-US"/>
           </a:p>
@@ -3500,7 +3500,7 @@
           <a:p>
             <a:fld id="{2FF08AD7-8103-40F8-983C-E2BA6BB9CBE0}" type="datetime1">
               <a:rPr lang="en-US" smtClean="0"/>
-              <a:t>6/2/2026</a:t>
+              <a:t>8/31/2026</a:t>
             </a:fld>
             <a:endParaRPr lang="en-US"/>
           </a:p>
@@ -3789,7 +3789,7 @@
           <a:p>
             <a:fld id="{DF8C06B4-9380-4A4D-AF49-A3596E17DAF5}" type="datetime1">
               <a:rPr lang="en-US" smtClean="0"/>
-              <a:t>6/2/2026</a:t>
+              <a:t>8/31/2026</a:t>
             </a:fld>
             <a:endParaRPr lang="en-US"/>
           </a:p>
@@ -4058,7 +4058,7 @@
           <a:p>
             <a:fld id="{EF7FDEF1-C582-4E22-9E77-D68326471F28}" type="datetime1">
               <a:rPr lang="en-US" smtClean="0"/>
-              <a:t>6/2/2026</a:t>
+              <a:t>8/31/2026</a:t>
             </a:fld>
             <a:endParaRPr lang="en-US"/>
           </a:p>
@@ -4301,7 +4301,7 @@
           <a:p>
             <a:fld id="{780A9602-A9A9-453F-AEF1-37B5837E02CD}" type="datetime1">
               <a:rPr lang="en-US" smtClean="0"/>
-              <a:t>6/2/2026</a:t>
+              <a:t>8/31/2026</a:t>
             </a:fld>
             <a:endParaRPr lang="en-US"/>
           </a:p>
@@ -4852,7 +4852,7 @@
                 <a16:creationId xmlns:a16="http://schemas.microsoft.com/office/drawing/2014/main" id="{3E443FD7-A66B-4AA0-872D-B088B9BC5F17}"/>
               </a:ext>
               <a:ext uri="{C183D7F6-B498-43B3-948B-1728B52AA6E4}">
-                <adec:decorative xmlns:adec="http://schemas.microsoft.com/office/drawing/2017/decorative" xmlns="" val="1"/>
+                <adec:decorative xmlns:adec="http://schemas.microsoft.com/office/drawing/2017/decorative" val="1"/>
               </a:ext>
             </a:extLst>
           </p:cNvPr>
@@ -4912,7 +4912,7 @@
                 <a16:creationId xmlns:a16="http://schemas.microsoft.com/office/drawing/2014/main" id="{C04BE0EF-3561-49B4-9A29-F283168A91C7}"/>
               </a:ext>
               <a:ext uri="{C183D7F6-B498-43B3-948B-1728B52AA6E4}">
-                <adec:decorative xmlns:adec="http://schemas.microsoft.com/office/drawing/2017/decorative" xmlns="" val="1"/>
+                <adec:decorative xmlns:adec="http://schemas.microsoft.com/office/drawing/2017/decorative" val="1"/>
               </a:ext>
             </a:extLst>
           </p:cNvPr>
@@ -5709,55 +5709,6 @@
       </p:pic>
       <p:sp>
         <p:nvSpPr>
-          <p:cNvPr id="4" name="Subtitle 3"/>
-          <p:cNvSpPr>
-            <a:spLocks noGrp="1"/>
-          </p:cNvSpPr>
-          <p:nvPr>
-            <p:ph type="subTitle" idx="1"/>
-          </p:nvPr>
-        </p:nvSpPr>
-        <p:spPr>
-          <a:xfrm>
-            <a:off x="1245686" y="648614"/>
-            <a:ext cx="8534400" cy="1752600"/>
-          </a:xfrm>
-        </p:spPr>
-        <p:txBody>
-          <a:bodyPr/>
-          <a:lstStyle/>
-          <a:p>
-            <a:endParaRPr lang="en-US" b="1" dirty="0">
-              <a:solidFill>
-                <a:schemeClr val="tx1"/>
-              </a:solidFill>
-              <a:latin typeface="Times New Roman" panose="02020603050405020304" pitchFamily="18" charset="0"/>
-              <a:cs typeface="Times New Roman" panose="02020603050405020304" pitchFamily="18" charset="0"/>
-            </a:endParaRPr>
-          </a:p>
-          <a:p>
-            <a:r>
-              <a:rPr lang="en-US" b="1" dirty="0">
-                <a:solidFill>
-                  <a:schemeClr val="tx1"/>
-                </a:solidFill>
-                <a:latin typeface="Times New Roman" panose="02020603050405020304" pitchFamily="18" charset="0"/>
-                <a:cs typeface="Times New Roman" panose="02020603050405020304" pitchFamily="18" charset="0"/>
-              </a:rPr>
-              <a:t>TITLE PAGE</a:t>
-            </a:r>
-            <a:endParaRPr lang="en-IN" b="1" dirty="0">
-              <a:solidFill>
-                <a:schemeClr val="tx1"/>
-              </a:solidFill>
-              <a:latin typeface="Times New Roman" panose="02020603050405020304" pitchFamily="18" charset="0"/>
-              <a:cs typeface="Times New Roman" panose="02020603050405020304" pitchFamily="18" charset="0"/>
-            </a:endParaRPr>
-          </a:p>
-        </p:txBody>
-      </p:sp>
-      <p:sp>
-        <p:nvSpPr>
           <p:cNvPr id="8" name="Title 7"/>
           <p:cNvSpPr>
             <a:spLocks noGrp="1"/>
@@ -5783,16 +5734,7 @@
                 </a:solidFill>
                 <a:latin typeface="Garamond" panose="02020404030301010803" pitchFamily="18" charset="0"/>
               </a:rPr>
-              <a:t>SMART INDIA HACKATHON </a:t>
-            </a:r>
-            <a:r>
-              <a:rPr lang="en-US" sz="4000" b="1" dirty="0" smtClean="0">
-                <a:solidFill>
-                  <a:schemeClr val="tx2"/>
-                </a:solidFill>
-                <a:latin typeface="Garamond" panose="02020404030301010803" pitchFamily="18" charset="0"/>
-              </a:rPr>
-              <a:t>2026</a:t>
+              <a:t>SMART INDIA HACKATHON 2026</a:t>
             </a:r>
             <a:endParaRPr lang="en-IN" sz="4000" b="1" dirty="0">
               <a:solidFill>
@@ -5811,8 +5753,8 @@
         </p:nvSpPr>
         <p:spPr>
           <a:xfrm>
-            <a:off x="331286" y="2076450"/>
-            <a:ext cx="5924550" cy="4703019"/>
+            <a:off x="94107" y="1304185"/>
+            <a:ext cx="6854891" cy="5229060"/>
           </a:xfrm>
           <a:prstGeom prst="rect">
             <a:avLst/>
@@ -5825,7 +5767,7 @@
           </a:bodyPr>
           <a:lstStyle/>
           <a:p>
-            <a:endParaRPr lang="en-US" dirty="0"/>
+            <a:endParaRPr lang="en-US" sz="2000" dirty="0"/>
           </a:p>
           <a:p>
             <a:pPr marL="285750" indent="-285750" algn="just">
@@ -5836,11 +5778,11 @@
               <a:buChar char="•"/>
             </a:pPr>
             <a:r>
-              <a:rPr lang="en-US" sz="2400" b="1" dirty="0">
+              <a:rPr lang="en-US" sz="2000" b="1" dirty="0">
                 <a:latin typeface="Arial" panose="020B0604020202020204" pitchFamily="34" charset="0"/>
                 <a:cs typeface="Arial" panose="020B0604020202020204" pitchFamily="34" charset="0"/>
               </a:rPr>
-              <a:t>Problem Statement ID –</a:t>
+              <a:t>Problem Statement ID- SIH26036</a:t>
             </a:r>
           </a:p>
           <a:p>
@@ -5852,11 +5794,11 @@
               <a:buChar char="•"/>
             </a:pPr>
             <a:r>
-              <a:rPr lang="en-US" sz="2400" b="1" dirty="0">
+              <a:rPr lang="en-US" sz="2000" b="1" dirty="0">
                 <a:latin typeface="Arial" panose="020B0604020202020204" pitchFamily="34" charset="0"/>
                 <a:cs typeface="Arial" panose="020B0604020202020204" pitchFamily="34" charset="0"/>
               </a:rPr>
-              <a:t>Problem Statement Title-</a:t>
+              <a:t>Problem Statement Title- Development of an Online Verification System for Weighing and Measuring Instruments.</a:t>
             </a:r>
           </a:p>
           <a:p>
@@ -5868,11 +5810,11 @@
               <a:buChar char="•"/>
             </a:pPr>
             <a:r>
-              <a:rPr lang="en-US" sz="2400" b="1" dirty="0">
+              <a:rPr lang="en-US" sz="2000" b="1" dirty="0">
                 <a:latin typeface="Arial" panose="020B0604020202020204" pitchFamily="34" charset="0"/>
                 <a:cs typeface="Arial" panose="020B0604020202020204" pitchFamily="34" charset="0"/>
               </a:rPr>
-              <a:t>Theme-</a:t>
+              <a:t>Theme- Miscellaneous</a:t>
             </a:r>
           </a:p>
           <a:p>
@@ -5884,11 +5826,11 @@
               <a:buChar char="•"/>
             </a:pPr>
             <a:r>
-              <a:rPr lang="en-US" sz="2400" b="1" dirty="0">
+              <a:rPr lang="en-US" sz="2000" b="1" dirty="0">
                 <a:latin typeface="Arial" panose="020B0604020202020204" pitchFamily="34" charset="0"/>
                 <a:cs typeface="Arial" panose="020B0604020202020204" pitchFamily="34" charset="0"/>
               </a:rPr>
-              <a:t>PS Category- Software/Hardware</a:t>
+              <a:t>PS Category- Software</a:t>
             </a:r>
           </a:p>
           <a:p>
@@ -5900,11 +5842,11 @@
               <a:buChar char="•"/>
             </a:pPr>
             <a:r>
-              <a:rPr lang="en-US" sz="2400" b="1" dirty="0">
+              <a:rPr lang="en-US" sz="2000" b="1" dirty="0">
                 <a:latin typeface="Arial" panose="020B0604020202020204" pitchFamily="34" charset="0"/>
                 <a:cs typeface="Arial" panose="020B0604020202020204" pitchFamily="34" charset="0"/>
               </a:rPr>
-              <a:t>Team ID-</a:t>
+              <a:t>Team ID- VisionX_RGUKTN_SIH26036_003</a:t>
             </a:r>
           </a:p>
           <a:p>
@@ -5916,13 +5858,27 @@
               <a:buChar char="•"/>
             </a:pPr>
             <a:r>
-              <a:rPr lang="en-US" sz="2400" b="1" dirty="0">
+              <a:rPr lang="en-US" sz="2000" b="1" dirty="0">
                 <a:latin typeface="Arial" panose="020B0604020202020204" pitchFamily="34" charset="0"/>
                 <a:cs typeface="Arial" panose="020B0604020202020204" pitchFamily="34" charset="0"/>
               </a:rPr>
-              <a:t>Team Name (Registered on portal)</a:t>
-            </a:r>
-            <a:endParaRPr lang="en-IN" sz="2400" b="1" dirty="0">
+              <a:t>Team Name- </a:t>
+            </a:r>
+            <a:r>
+              <a:rPr lang="en-US" sz="2000" b="1" dirty="0" err="1">
+                <a:latin typeface="Arial" panose="020B0604020202020204" pitchFamily="34" charset="0"/>
+                <a:cs typeface="Arial" panose="020B0604020202020204" pitchFamily="34" charset="0"/>
+              </a:rPr>
+              <a:t>VisionX_RGUKTN</a:t>
+            </a:r>
+            <a:r>
+              <a:rPr lang="en-US" sz="2000" b="1" dirty="0">
+                <a:latin typeface="Arial" panose="020B0604020202020204" pitchFamily="34" charset="0"/>
+                <a:cs typeface="Arial" panose="020B0604020202020204" pitchFamily="34" charset="0"/>
+              </a:rPr>
+              <a:t> </a:t>
+            </a:r>
+            <a:endParaRPr lang="en-IN" sz="2000" b="1" dirty="0">
               <a:latin typeface="Arial" panose="020B0604020202020204" pitchFamily="34" charset="0"/>
               <a:cs typeface="Arial" panose="020B0604020202020204" pitchFamily="34" charset="0"/>
             </a:endParaRPr>
@@ -5959,6 +5915,108 @@
           </a:prstGeom>
         </p:spPr>
       </p:pic>
+      <p:sp>
+        <p:nvSpPr>
+          <p:cNvPr id="11" name="Google Shape;132;p25">
+            <a:extLst>
+              <a:ext uri="{FF2B5EF4-FFF2-40B4-BE49-F238E27FC236}">
+                <a16:creationId xmlns:a16="http://schemas.microsoft.com/office/drawing/2014/main" id="{F72E6AD6-C644-4108-8378-BB6C89A16872}"/>
+              </a:ext>
+            </a:extLst>
+          </p:cNvPr>
+          <p:cNvSpPr txBox="1">
+            <a:spLocks noGrp="1"/>
+          </p:cNvSpPr>
+          <p:nvPr>
+            <p:ph type="subTitle" idx="1"/>
+          </p:nvPr>
+        </p:nvSpPr>
+        <p:spPr>
+          <a:xfrm>
+            <a:off x="1210185" y="552836"/>
+            <a:ext cx="8534400" cy="1752600"/>
+          </a:xfrm>
+          <a:prstGeom prst="rect">
+            <a:avLst/>
+          </a:prstGeom>
+          <a:noFill/>
+          <a:ln>
+            <a:noFill/>
+          </a:ln>
+        </p:spPr>
+        <p:txBody>
+          <a:bodyPr spcFirstLastPara="1" wrap="square" lIns="68575" tIns="34275" rIns="68575" bIns="34275" anchor="t" anchorCtr="0">
+            <a:noAutofit/>
+          </a:bodyPr>
+          <a:lstStyle/>
+          <a:p>
+            <a:pPr marL="0" lvl="0" indent="0" algn="ctr" rtl="0">
+              <a:lnSpc>
+                <a:spcPct val="100000"/>
+              </a:lnSpc>
+              <a:spcBef>
+                <a:spcPts val="0"/>
+              </a:spcBef>
+              <a:spcAft>
+                <a:spcPts val="0"/>
+              </a:spcAft>
+              <a:buClr>
+                <a:srgbClr val="888888"/>
+              </a:buClr>
+              <a:buSzPts val="2400"/>
+              <a:buNone/>
+            </a:pPr>
+            <a:endParaRPr b="1" dirty="0">
+              <a:solidFill>
+                <a:schemeClr val="dk1"/>
+              </a:solidFill>
+              <a:latin typeface="Times New Roman"/>
+              <a:ea typeface="Times New Roman"/>
+              <a:cs typeface="Times New Roman"/>
+              <a:sym typeface="Times New Roman"/>
+            </a:endParaRPr>
+          </a:p>
+          <a:p>
+            <a:pPr marL="0" lvl="0" indent="0" algn="ctr" rtl="0">
+              <a:lnSpc>
+                <a:spcPct val="100000"/>
+              </a:lnSpc>
+              <a:spcBef>
+                <a:spcPts val="500"/>
+              </a:spcBef>
+              <a:spcAft>
+                <a:spcPts val="0"/>
+              </a:spcAft>
+              <a:buClr>
+                <a:schemeClr val="dk1"/>
+              </a:buClr>
+              <a:buSzPts val="2400"/>
+              <a:buNone/>
+            </a:pPr>
+            <a:r>
+              <a:rPr lang="en" b="1" dirty="0">
+                <a:solidFill>
+                  <a:schemeClr val="dk1"/>
+                </a:solidFill>
+                <a:latin typeface="Times New Roman"/>
+                <a:ea typeface="Times New Roman"/>
+                <a:cs typeface="Times New Roman"/>
+                <a:sym typeface="Times New Roman"/>
+              </a:rPr>
+              <a:t>TITLE PAGE</a:t>
+            </a:r>
+            <a:endParaRPr b="1" dirty="0">
+              <a:solidFill>
+                <a:schemeClr val="dk1"/>
+              </a:solidFill>
+              <a:latin typeface="Times New Roman"/>
+              <a:ea typeface="Times New Roman"/>
+              <a:cs typeface="Times New Roman"/>
+              <a:sym typeface="Times New Roman"/>
+            </a:endParaRPr>
+          </a:p>
+        </p:txBody>
+      </p:sp>
     </p:spTree>
   </p:cSld>
   <p:clrMapOvr>
@@ -6054,7 +6112,7 @@
         </p:nvSpPr>
         <p:spPr>
           <a:xfrm>
-            <a:off x="182998" y="0"/>
+            <a:off x="162064" y="-434978"/>
             <a:ext cx="10972800" cy="1143000"/>
           </a:xfrm>
         </p:spPr>
@@ -6063,14 +6121,6 @@
           <a:lstStyle/>
           <a:p>
             <a:pPr eaLnBrk="1" hangingPunct="1"/>
-            <a:r>
-              <a:rPr lang="en-US" sz="3600" b="1" dirty="0">
-                <a:latin typeface="Times New Roman" panose="02020603050405020304" pitchFamily="18" charset="0"/>
-                <a:ea typeface="ＭＳ Ｐゴシック" pitchFamily="1" charset="-128"/>
-                <a:cs typeface="Times New Roman" panose="02020603050405020304" pitchFamily="18" charset="0"/>
-              </a:rPr>
-              <a:t/>
-            </a:r>
             <a:br>
               <a:rPr lang="en-US" sz="3600" b="1" dirty="0">
                 <a:latin typeface="Times New Roman" panose="02020603050405020304" pitchFamily="18" charset="0"/>
@@ -6079,13 +6129,18 @@
               </a:rPr>
             </a:br>
             <a:r>
-              <a:rPr lang="en-US" sz="3600" b="1" dirty="0">
+              <a:rPr lang="en-US" sz="3600" b="1" dirty="0" err="1">
                 <a:latin typeface="Times New Roman" panose="02020603050405020304" pitchFamily="18" charset="0"/>
                 <a:ea typeface="ＭＳ Ｐゴシック" pitchFamily="1" charset="-128"/>
                 <a:cs typeface="Times New Roman" panose="02020603050405020304" pitchFamily="18" charset="0"/>
               </a:rPr>
-              <a:t>IDEA TITLE</a:t>
-            </a:r>
+              <a:t>MeasureSure</a:t>
+            </a:r>
+            <a:endParaRPr lang="en-US" sz="3600" b="1" dirty="0">
+              <a:latin typeface="Times New Roman" panose="02020603050405020304" pitchFamily="18" charset="0"/>
+              <a:ea typeface="ＭＳ Ｐゴシック" pitchFamily="1" charset="-128"/>
+              <a:cs typeface="Times New Roman" panose="02020603050405020304" pitchFamily="18" charset="0"/>
+            </a:endParaRPr>
           </a:p>
         </p:txBody>
       </p:sp>
@@ -6099,8 +6154,8 @@
         </p:nvSpPr>
         <p:spPr bwMode="auto">
           <a:xfrm>
-            <a:off x="-1" y="2064921"/>
-            <a:ext cx="12191999" cy="2492990"/>
+            <a:off x="-1" y="819652"/>
+            <a:ext cx="12191999" cy="5447645"/>
           </a:xfrm>
           <a:prstGeom prst="rect">
             <a:avLst/>
@@ -6124,7 +6179,7 @@
               <a:buChar char="v"/>
             </a:pPr>
             <a:r>
-              <a:rPr lang="en-US" sz="3200" b="1" u="sng" dirty="0">
+              <a:rPr lang="en-US" sz="2800" b="1" u="sng" dirty="0">
                 <a:solidFill>
                   <a:schemeClr val="tx2"/>
                 </a:solidFill>
@@ -6133,7 +6188,13 @@
               </a:rPr>
               <a:t>Proposed Solution (Describe your Idea/Solution/Prototype)</a:t>
             </a:r>
-            <a:endParaRPr lang="en-US" sz="3200" u="sng" dirty="0">
+          </a:p>
+          <a:p>
+            <a:pPr marL="342900" indent="-342900">
+              <a:buFont typeface="Wingdings" panose="05000000000000000000" pitchFamily="2" charset="2"/>
+              <a:buChar char="v"/>
+            </a:pPr>
+            <a:endParaRPr lang="en-US" sz="2800" b="1" u="sng" dirty="0">
               <a:solidFill>
                 <a:schemeClr val="tx2"/>
               </a:solidFill>
@@ -6142,42 +6203,28 @@
             </a:endParaRPr>
           </a:p>
           <a:p>
-            <a:pPr marL="342900" indent="-342900">
-              <a:buFont typeface="Arial" panose="020B0604020202020204" pitchFamily="34" charset="0"/>
-              <a:buChar char="•"/>
-            </a:pPr>
-            <a:endParaRPr lang="en-US" sz="2000" u="sng" dirty="0">
-              <a:solidFill>
-                <a:schemeClr val="tx2"/>
-              </a:solidFill>
-              <a:latin typeface="Arial" pitchFamily="34" charset="0"/>
-              <a:cs typeface="Arial" pitchFamily="34" charset="0"/>
-            </a:endParaRPr>
-          </a:p>
-          <a:p>
-            <a:pPr marL="342900" indent="-342900">
-              <a:buFont typeface="Arial" panose="020B0604020202020204" pitchFamily="34" charset="0"/>
-              <a:buChar char="•"/>
-            </a:pPr>
-            <a:endParaRPr lang="en-US" sz="2000" u="sng" dirty="0">
-              <a:solidFill>
-                <a:schemeClr val="tx2"/>
-              </a:solidFill>
-              <a:latin typeface="Arial" pitchFamily="34" charset="0"/>
-              <a:cs typeface="Arial" pitchFamily="34" charset="0"/>
-            </a:endParaRPr>
-          </a:p>
-          <a:p>
             <a:pPr marL="342900" indent="-342900" algn="just">
               <a:buFont typeface="Arial" panose="020B0604020202020204" pitchFamily="34" charset="0"/>
               <a:buChar char="•"/>
             </a:pPr>
             <a:r>
-              <a:rPr lang="en-US" sz="2800" dirty="0">
+              <a:rPr lang="en-US" sz="2600" b="1" dirty="0">
                 <a:latin typeface="Arial" pitchFamily="34" charset="0"/>
                 <a:cs typeface="Arial" pitchFamily="34" charset="0"/>
               </a:rPr>
-              <a:t>Detailed explanation of the proposed solution</a:t>
+              <a:t>Detailed explanation of the proposed solution: </a:t>
+            </a:r>
+            <a:r>
+              <a:rPr lang="en-US" sz="2600" dirty="0"/>
+              <a:t>To develop </a:t>
+            </a:r>
+            <a:r>
+              <a:rPr lang="en-US" sz="2600" b="1" dirty="0" err="1"/>
+              <a:t>MeasureSure</a:t>
+            </a:r>
+            <a:r>
+              <a:rPr lang="en-US" sz="2600" dirty="0"/>
+              <a:t>, a secure digital platform for online registration, verification, inspection, and certification of weighing and measuring instruments.</a:t>
             </a:r>
           </a:p>
           <a:p>
@@ -6185,13 +6232,10 @@
               <a:buFont typeface="Arial" panose="020B0604020202020204" pitchFamily="34" charset="0"/>
               <a:buChar char="•"/>
             </a:pPr>
-            <a:r>
-              <a:rPr lang="en-US" sz="2800" dirty="0">
-                <a:latin typeface="Arial" pitchFamily="34" charset="0"/>
-                <a:cs typeface="Arial" pitchFamily="34" charset="0"/>
-              </a:rPr>
-              <a:t> How it addresses the problem</a:t>
-            </a:r>
+            <a:endParaRPr lang="en-US" sz="2600" b="1" dirty="0">
+              <a:latin typeface="Arial" pitchFamily="34" charset="0"/>
+              <a:cs typeface="Arial" pitchFamily="34" charset="0"/>
+            </a:endParaRPr>
           </a:p>
           <a:p>
             <a:pPr marL="342900" indent="-342900" algn="just">
@@ -6199,12 +6243,64 @@
               <a:buChar char="•"/>
             </a:pPr>
             <a:r>
-              <a:rPr lang="en-US" sz="2800" dirty="0">
+              <a:rPr lang="en-US" sz="2600" b="1" dirty="0">
                 <a:latin typeface="Arial" pitchFamily="34" charset="0"/>
                 <a:cs typeface="Arial" pitchFamily="34" charset="0"/>
               </a:rPr>
-              <a:t>Innovation and uniqueness of the solution </a:t>
-            </a:r>
+              <a:t>How it addresses the problem: </a:t>
+            </a:r>
+            <a:r>
+              <a:rPr lang="en-US" sz="2600" dirty="0"/>
+              <a:t>Provides a centralized system for </a:t>
+            </a:r>
+            <a:r>
+              <a:rPr lang="en-US" sz="2600" b="1" dirty="0"/>
+              <a:t>online applications, scheduling, digital records, certificate tracking, and automated expiry alerts</a:t>
+            </a:r>
+            <a:r>
+              <a:rPr lang="en-US" sz="2600" dirty="0"/>
+              <a:t>, reducing paperwork and improving transparency and efficiency.</a:t>
+            </a:r>
+            <a:endParaRPr lang="en-US" sz="2600" b="1" dirty="0">
+              <a:latin typeface="Arial" pitchFamily="34" charset="0"/>
+              <a:cs typeface="Arial" pitchFamily="34" charset="0"/>
+            </a:endParaRPr>
+          </a:p>
+          <a:p>
+            <a:pPr algn="just"/>
+            <a:endParaRPr lang="en-US" sz="2600" b="1" dirty="0">
+              <a:latin typeface="Arial" pitchFamily="34" charset="0"/>
+              <a:cs typeface="Arial" pitchFamily="34" charset="0"/>
+            </a:endParaRPr>
+          </a:p>
+          <a:p>
+            <a:pPr marL="342900" indent="-342900" algn="just">
+              <a:buFont typeface="Arial" panose="020B0604020202020204" pitchFamily="34" charset="0"/>
+              <a:buChar char="•"/>
+            </a:pPr>
+            <a:r>
+              <a:rPr lang="en-US" sz="2600" b="1" dirty="0">
+                <a:latin typeface="Arial" pitchFamily="34" charset="0"/>
+                <a:cs typeface="Arial" pitchFamily="34" charset="0"/>
+              </a:rPr>
+              <a:t>Innovation and uniqueness of the solution :</a:t>
+            </a:r>
+            <a:r>
+              <a:rPr lang="en-US" sz="2800" dirty="0"/>
+              <a:t>Integrates </a:t>
+            </a:r>
+            <a:r>
+              <a:rPr lang="en-US" sz="2800" b="1" dirty="0"/>
+              <a:t>QR-based certificate verification, digital instrument identity, secure records, and real-time compliance monitoring</a:t>
+            </a:r>
+            <a:r>
+              <a:rPr lang="en-US" sz="2800" dirty="0"/>
+              <a:t> into a single end-to-end Legal Metrology platform.</a:t>
+            </a:r>
+            <a:endParaRPr lang="en-US" sz="2600" b="1" dirty="0">
+              <a:latin typeface="Arial" pitchFamily="34" charset="0"/>
+              <a:cs typeface="Arial" pitchFamily="34" charset="0"/>
+            </a:endParaRPr>
           </a:p>
         </p:txBody>
       </p:sp>
@@ -6287,7 +6383,7 @@
                 <a16:creationId xmlns:a16="http://schemas.microsoft.com/office/drawing/2014/main" id="{5DBCE864-823D-4A13-9607-5DA1F0ED5FB8}"/>
               </a:ext>
               <a:ext uri="{C183D7F6-B498-43B3-948B-1728B52AA6E4}">
-                <adec:decorative xmlns:adec="http://schemas.microsoft.com/office/drawing/2017/decorative" xmlns="" val="0"/>
+                <adec:decorative xmlns:adec="http://schemas.microsoft.com/office/drawing/2017/decorative" val="0"/>
               </a:ext>
             </a:extLst>
           </p:cNvPr>
@@ -6296,8 +6392,8 @@
         </p:nvSpPr>
         <p:spPr>
           <a:xfrm>
-            <a:off x="329773" y="252246"/>
-            <a:ext cx="1251857" cy="807334"/>
+            <a:off x="329773" y="5287"/>
+            <a:ext cx="1251857" cy="847892"/>
           </a:xfrm>
           <a:prstGeom prst="ellipse">
             <a:avLst/>
@@ -6323,8 +6419,8 @@
           <a:p>
             <a:pPr algn="ctr"/>
             <a:r>
-              <a:rPr lang="en-US" dirty="0"/>
-              <a:t>Your Team Name</a:t>
+              <a:rPr lang="en-US" dirty="0" err="1"/>
+              <a:t>VisionX</a:t>
             </a:r>
             <a:endParaRPr lang="en-IN" dirty="0"/>
           </a:p>
@@ -6478,63 +6574,6 @@
       </p:sp>
       <p:sp>
         <p:nvSpPr>
-          <p:cNvPr id="17410" name="TextBox 8"/>
-          <p:cNvSpPr txBox="1">
-            <a:spLocks noChangeArrowheads="1"/>
-          </p:cNvSpPr>
-          <p:nvPr/>
-        </p:nvSpPr>
-        <p:spPr bwMode="auto">
-          <a:xfrm>
-            <a:off x="609600" y="2533653"/>
-            <a:ext cx="9385300" cy="1815882"/>
-          </a:xfrm>
-          <a:prstGeom prst="rect">
-            <a:avLst/>
-          </a:prstGeom>
-          <a:noFill/>
-          <a:ln w="9525">
-            <a:noFill/>
-            <a:miter lim="800000"/>
-            <a:headEnd/>
-            <a:tailEnd/>
-          </a:ln>
-        </p:spPr>
-        <p:txBody>
-          <a:bodyPr wrap="square">
-            <a:spAutoFit/>
-          </a:bodyPr>
-          <a:lstStyle/>
-          <a:p>
-            <a:pPr marL="342900" indent="-342900" algn="just">
-              <a:buFont typeface="Arial" panose="020B0604020202020204" pitchFamily="34" charset="0"/>
-              <a:buChar char="•"/>
-            </a:pPr>
-            <a:r>
-              <a:rPr lang="en-US" sz="2800" dirty="0">
-                <a:latin typeface="Arial" pitchFamily="34" charset="0"/>
-                <a:cs typeface="Arial" pitchFamily="34" charset="0"/>
-              </a:rPr>
-              <a:t>Technologies to be used (e.g. programming languages, frameworks, hardware)</a:t>
-            </a:r>
-          </a:p>
-          <a:p>
-            <a:pPr marL="342900" indent="-342900" algn="just">
-              <a:buFont typeface="Arial" panose="020B0604020202020204" pitchFamily="34" charset="0"/>
-              <a:buChar char="•"/>
-            </a:pPr>
-            <a:r>
-              <a:rPr lang="en-US" sz="2800" dirty="0">
-                <a:latin typeface="Arial" pitchFamily="34" charset="0"/>
-                <a:cs typeface="Arial" pitchFamily="34" charset="0"/>
-              </a:rPr>
-              <a:t>Methodology and process for implementation (Flow Charts/Images/ working prototype)</a:t>
-            </a:r>
-          </a:p>
-        </p:txBody>
-      </p:sp>
-      <p:sp>
-        <p:nvSpPr>
           <p:cNvPr id="6" name="Slide Number Placeholder 5"/>
           <p:cNvSpPr>
             <a:spLocks noGrp="1"/>
@@ -6601,57 +6640,6 @@
                 <a:schemeClr val="bg1"/>
               </a:solidFill>
             </a:endParaRPr>
-          </a:p>
-        </p:txBody>
-      </p:sp>
-      <p:sp>
-        <p:nvSpPr>
-          <p:cNvPr id="11" name="Oval 10" descr="Your startup LOGO">
-            <a:extLst>
-              <a:ext uri="{FF2B5EF4-FFF2-40B4-BE49-F238E27FC236}">
-                <a16:creationId xmlns:a16="http://schemas.microsoft.com/office/drawing/2014/main" id="{5DBCE864-823D-4A13-9607-5DA1F0ED5FB8}"/>
-              </a:ext>
-              <a:ext uri="{C183D7F6-B498-43B3-948B-1728B52AA6E4}">
-                <adec:decorative xmlns:adec="http://schemas.microsoft.com/office/drawing/2017/decorative" xmlns="" val="0"/>
-              </a:ext>
-            </a:extLst>
-          </p:cNvPr>
-          <p:cNvSpPr/>
-          <p:nvPr/>
-        </p:nvSpPr>
-        <p:spPr>
-          <a:xfrm>
-            <a:off x="329773" y="252246"/>
-            <a:ext cx="1251857" cy="807334"/>
-          </a:xfrm>
-          <a:prstGeom prst="ellipse">
-            <a:avLst/>
-          </a:prstGeom>
-        </p:spPr>
-        <p:style>
-          <a:lnRef idx="2">
-            <a:schemeClr val="accent4"/>
-          </a:lnRef>
-          <a:fillRef idx="1">
-            <a:schemeClr val="lt1"/>
-          </a:fillRef>
-          <a:effectRef idx="0">
-            <a:schemeClr val="accent4"/>
-          </a:effectRef>
-          <a:fontRef idx="minor">
-            <a:schemeClr val="dk1"/>
-          </a:fontRef>
-        </p:style>
-        <p:txBody>
-          <a:bodyPr rtlCol="0" anchor="ctr"/>
-          <a:lstStyle/>
-          <a:p>
-            <a:pPr algn="ctr"/>
-            <a:r>
-              <a:rPr lang="en-US" dirty="0"/>
-              <a:t>Your Team Name</a:t>
-            </a:r>
-            <a:endParaRPr lang="en-IN" dirty="0"/>
           </a:p>
         </p:txBody>
       </p:sp>
@@ -6685,6 +6673,4613 @@
           </a:prstGeom>
         </p:spPr>
       </p:pic>
+      <p:sp>
+        <p:nvSpPr>
+          <p:cNvPr id="26" name="TextBox 25">
+            <a:extLst>
+              <a:ext uri="{FF2B5EF4-FFF2-40B4-BE49-F238E27FC236}">
+                <a16:creationId xmlns:a16="http://schemas.microsoft.com/office/drawing/2014/main" id="{15096875-E6AB-47C5-BF9F-BD05415ECF22}"/>
+              </a:ext>
+            </a:extLst>
+          </p:cNvPr>
+          <p:cNvSpPr txBox="1"/>
+          <p:nvPr/>
+        </p:nvSpPr>
+        <p:spPr>
+          <a:xfrm>
+            <a:off x="382908" y="1028143"/>
+            <a:ext cx="11058144" cy="338554"/>
+          </a:xfrm>
+          <a:prstGeom prst="rect">
+            <a:avLst/>
+          </a:prstGeom>
+        </p:spPr>
+        <p:style>
+          <a:lnRef idx="2">
+            <a:schemeClr val="accent1">
+              <a:shade val="50000"/>
+            </a:schemeClr>
+          </a:lnRef>
+          <a:fillRef idx="1">
+            <a:schemeClr val="accent1"/>
+          </a:fillRef>
+          <a:effectRef idx="0">
+            <a:schemeClr val="accent1"/>
+          </a:effectRef>
+          <a:fontRef idx="minor">
+            <a:schemeClr val="lt1"/>
+          </a:fontRef>
+        </p:style>
+        <p:txBody>
+          <a:bodyPr wrap="square" anchor="ctr">
+            <a:spAutoFit/>
+          </a:bodyPr>
+          <a:lstStyle/>
+          <a:p>
+            <a:pPr algn="l"/>
+            <a:r>
+              <a:rPr sz="1600" b="1" dirty="0">
+                <a:solidFill>
+                  <a:srgbClr val="FFFFFF"/>
+                </a:solidFill>
+                <a:latin typeface="Aptos"/>
+              </a:rPr>
+              <a:t>01</a:t>
+            </a:r>
+            <a:r>
+              <a:rPr sz="810" b="1" dirty="0">
+                <a:solidFill>
+                  <a:srgbClr val="FFFFFF"/>
+                </a:solidFill>
+                <a:latin typeface="Aptos"/>
+              </a:rPr>
+              <a:t>  </a:t>
+            </a:r>
+            <a:r>
+              <a:rPr sz="1600" b="1" dirty="0">
+                <a:solidFill>
+                  <a:srgbClr val="FFFFFF"/>
+                </a:solidFill>
+                <a:latin typeface="Aptos"/>
+              </a:rPr>
+              <a:t>SYSTEM</a:t>
+            </a:r>
+            <a:r>
+              <a:rPr sz="810" b="1" dirty="0">
+                <a:solidFill>
+                  <a:srgbClr val="FFFFFF"/>
+                </a:solidFill>
+                <a:latin typeface="Aptos"/>
+              </a:rPr>
+              <a:t> </a:t>
+            </a:r>
+            <a:r>
+              <a:rPr sz="1600" b="1" dirty="0">
+                <a:solidFill>
+                  <a:srgbClr val="FFFFFF"/>
+                </a:solidFill>
+                <a:latin typeface="Aptos"/>
+              </a:rPr>
+              <a:t>ARCHITECTURE</a:t>
+            </a:r>
+            <a:r>
+              <a:rPr sz="810" b="1" dirty="0">
+                <a:solidFill>
+                  <a:srgbClr val="FFFFFF"/>
+                </a:solidFill>
+                <a:latin typeface="Aptos"/>
+              </a:rPr>
+              <a:t>  |  </a:t>
+            </a:r>
+            <a:r>
+              <a:rPr sz="1600" b="1" dirty="0">
+                <a:solidFill>
+                  <a:srgbClr val="FFFFFF"/>
+                </a:solidFill>
+                <a:latin typeface="Aptos"/>
+              </a:rPr>
+              <a:t>MODULAR</a:t>
+            </a:r>
+            <a:r>
+              <a:rPr sz="810" b="1" dirty="0">
+                <a:solidFill>
+                  <a:srgbClr val="FFFFFF"/>
+                </a:solidFill>
+                <a:latin typeface="Aptos"/>
+              </a:rPr>
+              <a:t>, </a:t>
+            </a:r>
+            <a:r>
+              <a:rPr sz="1600" b="1" dirty="0">
+                <a:solidFill>
+                  <a:srgbClr val="FFFFFF"/>
+                </a:solidFill>
+                <a:latin typeface="Aptos"/>
+              </a:rPr>
+              <a:t>SECURE</a:t>
+            </a:r>
+            <a:r>
+              <a:rPr sz="810" b="1" dirty="0">
+                <a:solidFill>
+                  <a:srgbClr val="FFFFFF"/>
+                </a:solidFill>
+                <a:latin typeface="Aptos"/>
+              </a:rPr>
+              <a:t> </a:t>
+            </a:r>
+            <a:r>
+              <a:rPr sz="1600" b="1" dirty="0">
+                <a:solidFill>
+                  <a:srgbClr val="FFFFFF"/>
+                </a:solidFill>
+                <a:latin typeface="Aptos"/>
+              </a:rPr>
+              <a:t>WORKFLOW</a:t>
+            </a:r>
+            <a:r>
+              <a:rPr sz="810" b="1" dirty="0">
+                <a:solidFill>
+                  <a:srgbClr val="FFFFFF"/>
+                </a:solidFill>
+                <a:latin typeface="Aptos"/>
+              </a:rPr>
+              <a:t> </a:t>
+            </a:r>
+            <a:r>
+              <a:rPr sz="1600" b="1" dirty="0">
+                <a:solidFill>
+                  <a:srgbClr val="FFFFFF"/>
+                </a:solidFill>
+                <a:latin typeface="Aptos"/>
+              </a:rPr>
+              <a:t>PLATFORM</a:t>
+            </a:r>
+          </a:p>
+        </p:txBody>
+      </p:sp>
+      <p:sp>
+        <p:nvSpPr>
+          <p:cNvPr id="27" name="TextBox 26">
+            <a:extLst>
+              <a:ext uri="{FF2B5EF4-FFF2-40B4-BE49-F238E27FC236}">
+                <a16:creationId xmlns:a16="http://schemas.microsoft.com/office/drawing/2014/main" id="{EE956EA7-E9D5-45D3-9171-48401C66EBE2}"/>
+              </a:ext>
+            </a:extLst>
+          </p:cNvPr>
+          <p:cNvSpPr txBox="1"/>
+          <p:nvPr/>
+        </p:nvSpPr>
+        <p:spPr>
+          <a:xfrm>
+            <a:off x="512063" y="1444248"/>
+            <a:ext cx="1426464" cy="461665"/>
+          </a:xfrm>
+          <a:prstGeom prst="rect">
+            <a:avLst/>
+          </a:prstGeom>
+          <a:noFill/>
+        </p:spPr>
+        <p:txBody>
+          <a:bodyPr wrap="square" anchor="ctr">
+            <a:spAutoFit/>
+          </a:bodyPr>
+          <a:lstStyle/>
+          <a:p>
+            <a:pPr algn="ctr"/>
+            <a:r>
+              <a:rPr sz="1200" b="1" dirty="0">
+                <a:solidFill>
+                  <a:srgbClr val="11375C"/>
+                </a:solidFill>
+                <a:latin typeface="Aptos"/>
+              </a:rPr>
+              <a:t>USERS / STAKEHOLDERS</a:t>
+            </a:r>
+          </a:p>
+        </p:txBody>
+      </p:sp>
+      <p:sp>
+        <p:nvSpPr>
+          <p:cNvPr id="28" name="TextBox 27">
+            <a:extLst>
+              <a:ext uri="{FF2B5EF4-FFF2-40B4-BE49-F238E27FC236}">
+                <a16:creationId xmlns:a16="http://schemas.microsoft.com/office/drawing/2014/main" id="{FC4993EA-5EF1-4ECE-AB4F-7E738D8D7AC4}"/>
+              </a:ext>
+            </a:extLst>
+          </p:cNvPr>
+          <p:cNvSpPr txBox="1"/>
+          <p:nvPr/>
+        </p:nvSpPr>
+        <p:spPr>
+          <a:xfrm>
+            <a:off x="530352" y="1767965"/>
+            <a:ext cx="1389888" cy="646331"/>
+          </a:xfrm>
+          <a:prstGeom prst="rect">
+            <a:avLst/>
+          </a:prstGeom>
+          <a:noFill/>
+        </p:spPr>
+        <p:txBody>
+          <a:bodyPr wrap="square" anchor="ctr">
+            <a:spAutoFit/>
+          </a:bodyPr>
+          <a:lstStyle/>
+          <a:p>
+            <a:pPr algn="ctr"/>
+            <a:r>
+              <a:rPr sz="1200" b="0" dirty="0">
+                <a:solidFill>
+                  <a:srgbClr val="26303A"/>
+                </a:solidFill>
+                <a:latin typeface="Aptos"/>
+              </a:rPr>
+              <a:t>Owner • LMO • GATC • Admin • Public Verifier</a:t>
+            </a:r>
+          </a:p>
+        </p:txBody>
+      </p:sp>
+      <p:sp>
+        <p:nvSpPr>
+          <p:cNvPr id="29" name="TextBox 28">
+            <a:extLst>
+              <a:ext uri="{FF2B5EF4-FFF2-40B4-BE49-F238E27FC236}">
+                <a16:creationId xmlns:a16="http://schemas.microsoft.com/office/drawing/2014/main" id="{7A3BA500-9395-438B-9871-6CA5FAB5B350}"/>
+              </a:ext>
+            </a:extLst>
+          </p:cNvPr>
+          <p:cNvSpPr txBox="1"/>
+          <p:nvPr/>
+        </p:nvSpPr>
+        <p:spPr>
+          <a:xfrm>
+            <a:off x="2283968" y="1547717"/>
+            <a:ext cx="1911095" cy="276999"/>
+          </a:xfrm>
+          <a:prstGeom prst="rect">
+            <a:avLst/>
+          </a:prstGeom>
+          <a:noFill/>
+        </p:spPr>
+        <p:txBody>
+          <a:bodyPr wrap="square" anchor="ctr">
+            <a:spAutoFit/>
+          </a:bodyPr>
+          <a:lstStyle/>
+          <a:p>
+            <a:pPr algn="ctr"/>
+            <a:r>
+              <a:rPr sz="1200" b="1" dirty="0">
+                <a:solidFill>
+                  <a:srgbClr val="11375C"/>
+                </a:solidFill>
+                <a:latin typeface="Aptos"/>
+              </a:rPr>
+              <a:t>CLIENT LAYER</a:t>
+            </a:r>
+          </a:p>
+        </p:txBody>
+      </p:sp>
+      <p:sp>
+        <p:nvSpPr>
+          <p:cNvPr id="30" name="TextBox 29">
+            <a:extLst>
+              <a:ext uri="{FF2B5EF4-FFF2-40B4-BE49-F238E27FC236}">
+                <a16:creationId xmlns:a16="http://schemas.microsoft.com/office/drawing/2014/main" id="{1D20A615-D892-4BE5-868F-C81E65BEC575}"/>
+              </a:ext>
+            </a:extLst>
+          </p:cNvPr>
+          <p:cNvSpPr txBox="1"/>
+          <p:nvPr/>
+        </p:nvSpPr>
+        <p:spPr>
+          <a:xfrm>
+            <a:off x="2286000" y="1860298"/>
+            <a:ext cx="1874519" cy="461665"/>
+          </a:xfrm>
+          <a:prstGeom prst="rect">
+            <a:avLst/>
+          </a:prstGeom>
+          <a:noFill/>
+        </p:spPr>
+        <p:txBody>
+          <a:bodyPr wrap="square" anchor="ctr">
+            <a:spAutoFit/>
+          </a:bodyPr>
+          <a:lstStyle/>
+          <a:p>
+            <a:pPr algn="ctr"/>
+            <a:r>
+              <a:rPr sz="1200" b="0" dirty="0">
+                <a:solidFill>
+                  <a:srgbClr val="26303A"/>
+                </a:solidFill>
+                <a:latin typeface="Aptos"/>
+              </a:rPr>
+              <a:t>React / Next.js Web
+Flutter Mobile • Field</a:t>
+            </a:r>
+          </a:p>
+        </p:txBody>
+      </p:sp>
+      <p:sp>
+        <p:nvSpPr>
+          <p:cNvPr id="31" name="TextBox 30">
+            <a:extLst>
+              <a:ext uri="{FF2B5EF4-FFF2-40B4-BE49-F238E27FC236}">
+                <a16:creationId xmlns:a16="http://schemas.microsoft.com/office/drawing/2014/main" id="{5BA063E9-730C-4518-BD98-F883DAC8C9C1}"/>
+              </a:ext>
+            </a:extLst>
+          </p:cNvPr>
+          <p:cNvSpPr txBox="1"/>
+          <p:nvPr/>
+        </p:nvSpPr>
+        <p:spPr>
+          <a:xfrm>
+            <a:off x="4572000" y="1536580"/>
+            <a:ext cx="2642615" cy="276999"/>
+          </a:xfrm>
+          <a:prstGeom prst="rect">
+            <a:avLst/>
+          </a:prstGeom>
+          <a:noFill/>
+        </p:spPr>
+        <p:txBody>
+          <a:bodyPr wrap="square" anchor="ctr">
+            <a:spAutoFit/>
+          </a:bodyPr>
+          <a:lstStyle/>
+          <a:p>
+            <a:pPr algn="ctr"/>
+            <a:r>
+              <a:rPr sz="1200" b="1" dirty="0">
+                <a:solidFill>
+                  <a:srgbClr val="11375C"/>
+                </a:solidFill>
+                <a:latin typeface="Aptos"/>
+              </a:rPr>
+              <a:t>BACKEND API  •  Node.js + </a:t>
+            </a:r>
+            <a:r>
+              <a:rPr sz="1200" b="1" dirty="0" err="1">
+                <a:solidFill>
+                  <a:srgbClr val="11375C"/>
+                </a:solidFill>
+                <a:latin typeface="Aptos"/>
+              </a:rPr>
+              <a:t>NestJS</a:t>
+            </a:r>
+            <a:endParaRPr sz="1200" b="1" dirty="0">
+              <a:solidFill>
+                <a:srgbClr val="11375C"/>
+              </a:solidFill>
+              <a:latin typeface="Aptos"/>
+            </a:endParaRPr>
+          </a:p>
+        </p:txBody>
+      </p:sp>
+      <p:sp>
+        <p:nvSpPr>
+          <p:cNvPr id="32" name="TextBox 31">
+            <a:extLst>
+              <a:ext uri="{FF2B5EF4-FFF2-40B4-BE49-F238E27FC236}">
+                <a16:creationId xmlns:a16="http://schemas.microsoft.com/office/drawing/2014/main" id="{0A84FD53-B36C-4887-BC3E-965243434199}"/>
+              </a:ext>
+            </a:extLst>
+          </p:cNvPr>
+          <p:cNvSpPr txBox="1"/>
+          <p:nvPr/>
+        </p:nvSpPr>
+        <p:spPr>
+          <a:xfrm>
+            <a:off x="4590288" y="1767965"/>
+            <a:ext cx="2606039" cy="646331"/>
+          </a:xfrm>
+          <a:prstGeom prst="rect">
+            <a:avLst/>
+          </a:prstGeom>
+          <a:noFill/>
+        </p:spPr>
+        <p:txBody>
+          <a:bodyPr wrap="square" anchor="ctr">
+            <a:spAutoFit/>
+          </a:bodyPr>
+          <a:lstStyle/>
+          <a:p>
+            <a:pPr algn="ctr"/>
+            <a:r>
+              <a:rPr sz="1200" b="0">
+                <a:solidFill>
+                  <a:srgbClr val="26303A"/>
+                </a:solidFill>
+                <a:latin typeface="Aptos"/>
+              </a:rPr>
+              <a:t>Auth • RBAC • Workflow • Scheduling
+Inspection • Certificate • Notify • Audit</a:t>
+            </a:r>
+          </a:p>
+        </p:txBody>
+      </p:sp>
+      <p:sp>
+        <p:nvSpPr>
+          <p:cNvPr id="33" name="TextBox 32">
+            <a:extLst>
+              <a:ext uri="{FF2B5EF4-FFF2-40B4-BE49-F238E27FC236}">
+                <a16:creationId xmlns:a16="http://schemas.microsoft.com/office/drawing/2014/main" id="{078284C8-2214-44B6-AB36-4BFE1F6976B3}"/>
+              </a:ext>
+            </a:extLst>
+          </p:cNvPr>
+          <p:cNvSpPr txBox="1"/>
+          <p:nvPr/>
+        </p:nvSpPr>
+        <p:spPr>
+          <a:xfrm>
+            <a:off x="7571231" y="1536580"/>
+            <a:ext cx="4114800" cy="276999"/>
+          </a:xfrm>
+          <a:prstGeom prst="rect">
+            <a:avLst/>
+          </a:prstGeom>
+          <a:noFill/>
+        </p:spPr>
+        <p:txBody>
+          <a:bodyPr wrap="square" anchor="ctr">
+            <a:spAutoFit/>
+          </a:bodyPr>
+          <a:lstStyle/>
+          <a:p>
+            <a:pPr algn="ctr"/>
+            <a:r>
+              <a:rPr sz="1200" b="1" dirty="0">
+                <a:solidFill>
+                  <a:srgbClr val="11375C"/>
+                </a:solidFill>
+                <a:latin typeface="Aptos"/>
+              </a:rPr>
+              <a:t>DATA + INFRASTRUCTURE</a:t>
+            </a:r>
+          </a:p>
+        </p:txBody>
+      </p:sp>
+      <p:sp>
+        <p:nvSpPr>
+          <p:cNvPr id="34" name="TextBox 33">
+            <a:extLst>
+              <a:ext uri="{FF2B5EF4-FFF2-40B4-BE49-F238E27FC236}">
+                <a16:creationId xmlns:a16="http://schemas.microsoft.com/office/drawing/2014/main" id="{DC86D2E9-06F4-43DC-B659-37DDE079B3A3}"/>
+              </a:ext>
+            </a:extLst>
+          </p:cNvPr>
+          <p:cNvSpPr txBox="1"/>
+          <p:nvPr/>
+        </p:nvSpPr>
+        <p:spPr>
+          <a:xfrm>
+            <a:off x="7589519" y="1860298"/>
+            <a:ext cx="4078224" cy="461665"/>
+          </a:xfrm>
+          <a:prstGeom prst="rect">
+            <a:avLst/>
+          </a:prstGeom>
+          <a:noFill/>
+        </p:spPr>
+        <p:txBody>
+          <a:bodyPr wrap="square" anchor="ctr">
+            <a:spAutoFit/>
+          </a:bodyPr>
+          <a:lstStyle/>
+          <a:p>
+            <a:pPr algn="ctr"/>
+            <a:r>
+              <a:rPr sz="1200" b="0" dirty="0">
+                <a:solidFill>
+                  <a:srgbClr val="26303A"/>
+                </a:solidFill>
+                <a:latin typeface="Aptos"/>
+              </a:rPr>
+              <a:t>PostgreSQL • Secure Object Storage • PDF Certificates
+Docker + Cloud • Notifications</a:t>
+            </a:r>
+          </a:p>
+        </p:txBody>
+      </p:sp>
+      <p:cxnSp>
+        <p:nvCxnSpPr>
+          <p:cNvPr id="35" name="Connector 18">
+            <a:extLst>
+              <a:ext uri="{FF2B5EF4-FFF2-40B4-BE49-F238E27FC236}">
+                <a16:creationId xmlns:a16="http://schemas.microsoft.com/office/drawing/2014/main" id="{50D7798F-C1B0-4E58-82E7-5C071187B19D}"/>
+              </a:ext>
+            </a:extLst>
+          </p:cNvPr>
+          <p:cNvCxnSpPr/>
+          <p:nvPr/>
+        </p:nvCxnSpPr>
+        <p:spPr>
+          <a:xfrm>
+            <a:off x="2011680" y="2004263"/>
+            <a:ext cx="182880" cy="0"/>
+          </a:xfrm>
+          <a:prstGeom prst="line">
+            <a:avLst/>
+          </a:prstGeom>
+          <a:ln w="16510">
+            <a:solidFill>
+              <a:srgbClr val="008B8B"/>
+            </a:solidFill>
+          </a:ln>
+        </p:spPr>
+        <p:style>
+          <a:lnRef idx="2">
+            <a:schemeClr val="accent1"/>
+          </a:lnRef>
+          <a:fillRef idx="0">
+            <a:schemeClr val="accent1"/>
+          </a:fillRef>
+          <a:effectRef idx="1">
+            <a:schemeClr val="accent1"/>
+          </a:effectRef>
+          <a:fontRef idx="minor">
+            <a:schemeClr val="tx1"/>
+          </a:fontRef>
+        </p:style>
+      </p:cxnSp>
+      <p:cxnSp>
+        <p:nvCxnSpPr>
+          <p:cNvPr id="36" name="Connector 19">
+            <a:extLst>
+              <a:ext uri="{FF2B5EF4-FFF2-40B4-BE49-F238E27FC236}">
+                <a16:creationId xmlns:a16="http://schemas.microsoft.com/office/drawing/2014/main" id="{8FBB733A-C716-46EC-8150-8D7F8EF6CF30}"/>
+              </a:ext>
+            </a:extLst>
+          </p:cNvPr>
+          <p:cNvCxnSpPr/>
+          <p:nvPr/>
+        </p:nvCxnSpPr>
+        <p:spPr>
+          <a:xfrm>
+            <a:off x="4251960" y="2004263"/>
+            <a:ext cx="246888" cy="0"/>
+          </a:xfrm>
+          <a:prstGeom prst="line">
+            <a:avLst/>
+          </a:prstGeom>
+          <a:ln w="16510">
+            <a:solidFill>
+              <a:srgbClr val="008B8B"/>
+            </a:solidFill>
+          </a:ln>
+        </p:spPr>
+        <p:style>
+          <a:lnRef idx="2">
+            <a:schemeClr val="accent1"/>
+          </a:lnRef>
+          <a:fillRef idx="0">
+            <a:schemeClr val="accent1"/>
+          </a:fillRef>
+          <a:effectRef idx="1">
+            <a:schemeClr val="accent1"/>
+          </a:effectRef>
+          <a:fontRef idx="minor">
+            <a:schemeClr val="tx1"/>
+          </a:fontRef>
+        </p:style>
+      </p:cxnSp>
+      <p:cxnSp>
+        <p:nvCxnSpPr>
+          <p:cNvPr id="37" name="Connector 20">
+            <a:extLst>
+              <a:ext uri="{FF2B5EF4-FFF2-40B4-BE49-F238E27FC236}">
+                <a16:creationId xmlns:a16="http://schemas.microsoft.com/office/drawing/2014/main" id="{D03D6559-A400-4FA1-B9BB-47453648B7DD}"/>
+              </a:ext>
+            </a:extLst>
+          </p:cNvPr>
+          <p:cNvCxnSpPr/>
+          <p:nvPr/>
+        </p:nvCxnSpPr>
+        <p:spPr>
+          <a:xfrm>
+            <a:off x="7287768" y="2004263"/>
+            <a:ext cx="210311" cy="0"/>
+          </a:xfrm>
+          <a:prstGeom prst="line">
+            <a:avLst/>
+          </a:prstGeom>
+          <a:ln w="16510">
+            <a:solidFill>
+              <a:srgbClr val="008B8B"/>
+            </a:solidFill>
+          </a:ln>
+        </p:spPr>
+        <p:style>
+          <a:lnRef idx="2">
+            <a:schemeClr val="accent1"/>
+          </a:lnRef>
+          <a:fillRef idx="0">
+            <a:schemeClr val="accent1"/>
+          </a:fillRef>
+          <a:effectRef idx="1">
+            <a:schemeClr val="accent1"/>
+          </a:effectRef>
+          <a:fontRef idx="minor">
+            <a:schemeClr val="tx1"/>
+          </a:fontRef>
+        </p:style>
+      </p:cxnSp>
+      <p:sp>
+        <p:nvSpPr>
+          <p:cNvPr id="38" name="Shape 35">
+            <a:extLst>
+              <a:ext uri="{FF2B5EF4-FFF2-40B4-BE49-F238E27FC236}">
+                <a16:creationId xmlns:a16="http://schemas.microsoft.com/office/drawing/2014/main" id="{4FBCCFF9-DEA1-4293-AA4D-8FF3BEE6D665}"/>
+              </a:ext>
+            </a:extLst>
+          </p:cNvPr>
+          <p:cNvSpPr/>
+          <p:nvPr/>
+        </p:nvSpPr>
+        <p:spPr>
+          <a:xfrm>
+            <a:off x="374336" y="2660336"/>
+            <a:ext cx="2514600" cy="201168"/>
+          </a:xfrm>
+          <a:prstGeom prst="roundRect">
+            <a:avLst>
+              <a:gd name="adj" fmla="val 22727"/>
+            </a:avLst>
+          </a:prstGeom>
+          <a:solidFill>
+            <a:srgbClr val="0B3D62"/>
+          </a:solidFill>
+          <a:ln/>
+        </p:spPr>
+      </p:sp>
+      <p:sp>
+        <p:nvSpPr>
+          <p:cNvPr id="39" name="Text 36">
+            <a:extLst>
+              <a:ext uri="{FF2B5EF4-FFF2-40B4-BE49-F238E27FC236}">
+                <a16:creationId xmlns:a16="http://schemas.microsoft.com/office/drawing/2014/main" id="{66B2D706-9575-4AE1-B6DC-4040F0958397}"/>
+              </a:ext>
+            </a:extLst>
+          </p:cNvPr>
+          <p:cNvSpPr/>
+          <p:nvPr/>
+        </p:nvSpPr>
+        <p:spPr>
+          <a:xfrm>
+            <a:off x="274325" y="2660336"/>
+            <a:ext cx="2514600" cy="201168"/>
+          </a:xfrm>
+          <a:prstGeom prst="rect">
+            <a:avLst/>
+          </a:prstGeom>
+          <a:noFill/>
+          <a:ln/>
+        </p:spPr>
+        <p:txBody>
+          <a:bodyPr wrap="square" lIns="0" tIns="0" rIns="0" bIns="0" rtlCol="0" anchor="ctr"/>
+          <a:lstStyle/>
+          <a:p>
+            <a:pPr marL="0" indent="0" algn="ctr">
+              <a:buNone/>
+            </a:pPr>
+            <a:r>
+              <a:rPr lang="en-US" sz="1600" b="1" dirty="0">
+                <a:solidFill>
+                  <a:srgbClr val="FFFFFF"/>
+                </a:solidFill>
+                <a:latin typeface="Calibri" pitchFamily="34" charset="0"/>
+                <a:ea typeface="Calibri" pitchFamily="34" charset="-122"/>
+                <a:cs typeface="Calibri" pitchFamily="34" charset="-120"/>
+              </a:rPr>
+              <a:t>END-TO-END WORKFLOW</a:t>
+            </a:r>
+            <a:endParaRPr lang="en-US" sz="1600" dirty="0"/>
+          </a:p>
+        </p:txBody>
+      </p:sp>
+      <p:sp>
+        <p:nvSpPr>
+          <p:cNvPr id="40" name="Shape 38">
+            <a:extLst>
+              <a:ext uri="{FF2B5EF4-FFF2-40B4-BE49-F238E27FC236}">
+                <a16:creationId xmlns:a16="http://schemas.microsoft.com/office/drawing/2014/main" id="{EC63564B-7149-4739-B323-99103900B62E}"/>
+              </a:ext>
+            </a:extLst>
+          </p:cNvPr>
+          <p:cNvSpPr/>
+          <p:nvPr/>
+        </p:nvSpPr>
+        <p:spPr>
+          <a:xfrm>
+            <a:off x="411480" y="2989520"/>
+            <a:ext cx="1024128" cy="402336"/>
+          </a:xfrm>
+          <a:prstGeom prst="roundRect">
+            <a:avLst>
+              <a:gd name="adj" fmla="val 7955"/>
+            </a:avLst>
+          </a:prstGeom>
+          <a:solidFill>
+            <a:srgbClr val="FFFFFF"/>
+          </a:solidFill>
+          <a:ln w="9525">
+            <a:solidFill>
+              <a:srgbClr val="0B3D62"/>
+            </a:solidFill>
+            <a:prstDash val="solid"/>
+          </a:ln>
+        </p:spPr>
+      </p:sp>
+      <p:sp>
+        <p:nvSpPr>
+          <p:cNvPr id="41" name="Text 39">
+            <a:extLst>
+              <a:ext uri="{FF2B5EF4-FFF2-40B4-BE49-F238E27FC236}">
+                <a16:creationId xmlns:a16="http://schemas.microsoft.com/office/drawing/2014/main" id="{EEF9F729-3F8C-4F16-8AB7-D7482DA15FFE}"/>
+              </a:ext>
+            </a:extLst>
+          </p:cNvPr>
+          <p:cNvSpPr/>
+          <p:nvPr/>
+        </p:nvSpPr>
+        <p:spPr>
+          <a:xfrm>
+            <a:off x="429768" y="2989520"/>
+            <a:ext cx="987552" cy="402336"/>
+          </a:xfrm>
+          <a:prstGeom prst="rect">
+            <a:avLst/>
+          </a:prstGeom>
+          <a:noFill/>
+          <a:ln/>
+        </p:spPr>
+        <p:txBody>
+          <a:bodyPr wrap="square" lIns="0" tIns="0" rIns="0" bIns="0" rtlCol="0" anchor="ctr"/>
+          <a:lstStyle/>
+          <a:p>
+            <a:pPr marL="0" indent="0" algn="ctr">
+              <a:lnSpc>
+                <a:spcPct val="92000"/>
+              </a:lnSpc>
+              <a:buNone/>
+            </a:pPr>
+            <a:r>
+              <a:rPr lang="en-US" sz="1000" b="1" dirty="0">
+                <a:solidFill>
+                  <a:srgbClr val="1F2937"/>
+                </a:solidFill>
+                <a:latin typeface="Calibri" pitchFamily="34" charset="0"/>
+                <a:ea typeface="Calibri" pitchFamily="34" charset="-122"/>
+                <a:cs typeface="Calibri" pitchFamily="34" charset="-120"/>
+              </a:rPr>
+              <a:t>Instrument</a:t>
+            </a:r>
+            <a:endParaRPr lang="en-US" sz="1000" dirty="0"/>
+          </a:p>
+          <a:p>
+            <a:pPr marL="0" indent="0" algn="ctr">
+              <a:lnSpc>
+                <a:spcPct val="92000"/>
+              </a:lnSpc>
+              <a:buNone/>
+            </a:pPr>
+            <a:r>
+              <a:rPr lang="en-US" sz="1000" b="1" dirty="0">
+                <a:solidFill>
+                  <a:srgbClr val="1F2937"/>
+                </a:solidFill>
+                <a:latin typeface="Calibri" pitchFamily="34" charset="0"/>
+                <a:ea typeface="Calibri" pitchFamily="34" charset="-122"/>
+                <a:cs typeface="Calibri" pitchFamily="34" charset="-120"/>
+              </a:rPr>
+              <a:t>Registration</a:t>
+            </a:r>
+            <a:endParaRPr lang="en-US" sz="1000" dirty="0"/>
+          </a:p>
+        </p:txBody>
+      </p:sp>
+      <p:sp>
+        <p:nvSpPr>
+          <p:cNvPr id="42" name="Text 40">
+            <a:extLst>
+              <a:ext uri="{FF2B5EF4-FFF2-40B4-BE49-F238E27FC236}">
+                <a16:creationId xmlns:a16="http://schemas.microsoft.com/office/drawing/2014/main" id="{450E5805-DA81-4F69-83E1-7FB53FB22274}"/>
+              </a:ext>
+            </a:extLst>
+          </p:cNvPr>
+          <p:cNvSpPr/>
+          <p:nvPr/>
+        </p:nvSpPr>
+        <p:spPr>
+          <a:xfrm>
+            <a:off x="1435608" y="2989520"/>
+            <a:ext cx="73152" cy="402336"/>
+          </a:xfrm>
+          <a:prstGeom prst="rect">
+            <a:avLst/>
+          </a:prstGeom>
+          <a:noFill/>
+          <a:ln/>
+        </p:spPr>
+        <p:txBody>
+          <a:bodyPr wrap="square" lIns="0" tIns="0" rIns="0" bIns="0" rtlCol="0" anchor="ctr"/>
+          <a:lstStyle/>
+          <a:p>
+            <a:pPr marL="0" indent="0" algn="ctr">
+              <a:buNone/>
+            </a:pPr>
+            <a:r>
+              <a:rPr lang="en-US" sz="1100" b="1" dirty="0">
+                <a:solidFill>
+                  <a:srgbClr val="0E7C86"/>
+                </a:solidFill>
+                <a:latin typeface="Calibri" pitchFamily="34" charset="0"/>
+                <a:ea typeface="Calibri" pitchFamily="34" charset="-122"/>
+                <a:cs typeface="Calibri" pitchFamily="34" charset="-120"/>
+              </a:rPr>
+              <a:t>›</a:t>
+            </a:r>
+            <a:endParaRPr lang="en-US" sz="1100" dirty="0"/>
+          </a:p>
+        </p:txBody>
+      </p:sp>
+      <p:sp>
+        <p:nvSpPr>
+          <p:cNvPr id="43" name="Shape 41">
+            <a:extLst>
+              <a:ext uri="{FF2B5EF4-FFF2-40B4-BE49-F238E27FC236}">
+                <a16:creationId xmlns:a16="http://schemas.microsoft.com/office/drawing/2014/main" id="{00186025-AD73-4DB2-B633-FF47B5E360DB}"/>
+              </a:ext>
+            </a:extLst>
+          </p:cNvPr>
+          <p:cNvSpPr/>
+          <p:nvPr/>
+        </p:nvSpPr>
+        <p:spPr>
+          <a:xfrm>
+            <a:off x="1508760" y="2989520"/>
+            <a:ext cx="1024128" cy="402336"/>
+          </a:xfrm>
+          <a:prstGeom prst="roundRect">
+            <a:avLst>
+              <a:gd name="adj" fmla="val 7955"/>
+            </a:avLst>
+          </a:prstGeom>
+          <a:solidFill>
+            <a:srgbClr val="FFFFFF"/>
+          </a:solidFill>
+          <a:ln w="9525">
+            <a:solidFill>
+              <a:srgbClr val="0B3D62"/>
+            </a:solidFill>
+            <a:prstDash val="solid"/>
+          </a:ln>
+        </p:spPr>
+      </p:sp>
+      <p:sp>
+        <p:nvSpPr>
+          <p:cNvPr id="44" name="Text 42">
+            <a:extLst>
+              <a:ext uri="{FF2B5EF4-FFF2-40B4-BE49-F238E27FC236}">
+                <a16:creationId xmlns:a16="http://schemas.microsoft.com/office/drawing/2014/main" id="{7DC8C1B7-640B-4906-BE33-23FC37C97D3D}"/>
+              </a:ext>
+            </a:extLst>
+          </p:cNvPr>
+          <p:cNvSpPr/>
+          <p:nvPr/>
+        </p:nvSpPr>
+        <p:spPr>
+          <a:xfrm>
+            <a:off x="1527048" y="2989520"/>
+            <a:ext cx="987552" cy="402336"/>
+          </a:xfrm>
+          <a:prstGeom prst="rect">
+            <a:avLst/>
+          </a:prstGeom>
+          <a:noFill/>
+          <a:ln/>
+        </p:spPr>
+        <p:txBody>
+          <a:bodyPr wrap="square" lIns="0" tIns="0" rIns="0" bIns="0" rtlCol="0" anchor="ctr"/>
+          <a:lstStyle/>
+          <a:p>
+            <a:pPr marL="0" indent="0" algn="ctr">
+              <a:lnSpc>
+                <a:spcPct val="92000"/>
+              </a:lnSpc>
+              <a:buNone/>
+            </a:pPr>
+            <a:r>
+              <a:rPr lang="en-US" sz="1000" b="1" dirty="0">
+                <a:solidFill>
+                  <a:srgbClr val="1F2937"/>
+                </a:solidFill>
+                <a:latin typeface="Calibri" pitchFamily="34" charset="0"/>
+                <a:ea typeface="Calibri" pitchFamily="34" charset="-122"/>
+                <a:cs typeface="Calibri" pitchFamily="34" charset="-120"/>
+              </a:rPr>
+              <a:t>Verification</a:t>
+            </a:r>
+            <a:endParaRPr lang="en-US" sz="1000" dirty="0"/>
+          </a:p>
+          <a:p>
+            <a:pPr marL="0" indent="0" algn="ctr">
+              <a:lnSpc>
+                <a:spcPct val="92000"/>
+              </a:lnSpc>
+              <a:buNone/>
+            </a:pPr>
+            <a:r>
+              <a:rPr lang="en-US" sz="1000" b="1" dirty="0">
+                <a:solidFill>
+                  <a:srgbClr val="1F2937"/>
+                </a:solidFill>
+                <a:latin typeface="Calibri" pitchFamily="34" charset="0"/>
+                <a:ea typeface="Calibri" pitchFamily="34" charset="-122"/>
+                <a:cs typeface="Calibri" pitchFamily="34" charset="-120"/>
+              </a:rPr>
+              <a:t>Application</a:t>
+            </a:r>
+            <a:endParaRPr lang="en-US" sz="1000" dirty="0"/>
+          </a:p>
+        </p:txBody>
+      </p:sp>
+      <p:sp>
+        <p:nvSpPr>
+          <p:cNvPr id="45" name="Text 43">
+            <a:extLst>
+              <a:ext uri="{FF2B5EF4-FFF2-40B4-BE49-F238E27FC236}">
+                <a16:creationId xmlns:a16="http://schemas.microsoft.com/office/drawing/2014/main" id="{4CE8AD3E-99BB-48DF-9C35-94856C32289F}"/>
+              </a:ext>
+            </a:extLst>
+          </p:cNvPr>
+          <p:cNvSpPr/>
+          <p:nvPr/>
+        </p:nvSpPr>
+        <p:spPr>
+          <a:xfrm>
+            <a:off x="2532888" y="2989520"/>
+            <a:ext cx="73152" cy="402336"/>
+          </a:xfrm>
+          <a:prstGeom prst="rect">
+            <a:avLst/>
+          </a:prstGeom>
+          <a:noFill/>
+          <a:ln/>
+        </p:spPr>
+        <p:txBody>
+          <a:bodyPr wrap="square" lIns="0" tIns="0" rIns="0" bIns="0" rtlCol="0" anchor="ctr"/>
+          <a:lstStyle/>
+          <a:p>
+            <a:pPr marL="0" indent="0" algn="ctr">
+              <a:buNone/>
+            </a:pPr>
+            <a:r>
+              <a:rPr lang="en-US" sz="1100" b="1" dirty="0">
+                <a:solidFill>
+                  <a:srgbClr val="0E7C86"/>
+                </a:solidFill>
+                <a:latin typeface="Calibri" pitchFamily="34" charset="0"/>
+                <a:ea typeface="Calibri" pitchFamily="34" charset="-122"/>
+                <a:cs typeface="Calibri" pitchFamily="34" charset="-120"/>
+              </a:rPr>
+              <a:t>›</a:t>
+            </a:r>
+            <a:endParaRPr lang="en-US" sz="1100" dirty="0"/>
+          </a:p>
+        </p:txBody>
+      </p:sp>
+      <p:sp>
+        <p:nvSpPr>
+          <p:cNvPr id="46" name="Shape 44">
+            <a:extLst>
+              <a:ext uri="{FF2B5EF4-FFF2-40B4-BE49-F238E27FC236}">
+                <a16:creationId xmlns:a16="http://schemas.microsoft.com/office/drawing/2014/main" id="{621B54CB-94CD-480D-9ADB-2D301A34B319}"/>
+              </a:ext>
+            </a:extLst>
+          </p:cNvPr>
+          <p:cNvSpPr/>
+          <p:nvPr/>
+        </p:nvSpPr>
+        <p:spPr>
+          <a:xfrm>
+            <a:off x="2606040" y="2989520"/>
+            <a:ext cx="1024128" cy="402336"/>
+          </a:xfrm>
+          <a:prstGeom prst="roundRect">
+            <a:avLst>
+              <a:gd name="adj" fmla="val 7955"/>
+            </a:avLst>
+          </a:prstGeom>
+          <a:solidFill>
+            <a:srgbClr val="FFFFFF"/>
+          </a:solidFill>
+          <a:ln w="9525">
+            <a:solidFill>
+              <a:srgbClr val="0B3D62"/>
+            </a:solidFill>
+            <a:prstDash val="solid"/>
+          </a:ln>
+        </p:spPr>
+      </p:sp>
+      <p:sp>
+        <p:nvSpPr>
+          <p:cNvPr id="47" name="Text 45">
+            <a:extLst>
+              <a:ext uri="{FF2B5EF4-FFF2-40B4-BE49-F238E27FC236}">
+                <a16:creationId xmlns:a16="http://schemas.microsoft.com/office/drawing/2014/main" id="{DAE694D6-C318-49BA-A38E-F9CA9E20CA57}"/>
+              </a:ext>
+            </a:extLst>
+          </p:cNvPr>
+          <p:cNvSpPr/>
+          <p:nvPr/>
+        </p:nvSpPr>
+        <p:spPr>
+          <a:xfrm>
+            <a:off x="2624328" y="2989520"/>
+            <a:ext cx="987552" cy="402336"/>
+          </a:xfrm>
+          <a:prstGeom prst="rect">
+            <a:avLst/>
+          </a:prstGeom>
+          <a:noFill/>
+          <a:ln/>
+        </p:spPr>
+        <p:txBody>
+          <a:bodyPr wrap="square" lIns="0" tIns="0" rIns="0" bIns="0" rtlCol="0" anchor="ctr"/>
+          <a:lstStyle/>
+          <a:p>
+            <a:pPr marL="0" indent="0" algn="ctr">
+              <a:lnSpc>
+                <a:spcPct val="92000"/>
+              </a:lnSpc>
+              <a:buNone/>
+            </a:pPr>
+            <a:r>
+              <a:rPr lang="en-US" sz="1000" b="1" dirty="0">
+                <a:solidFill>
+                  <a:srgbClr val="1F2937"/>
+                </a:solidFill>
+                <a:latin typeface="Calibri" pitchFamily="34" charset="0"/>
+                <a:ea typeface="Calibri" pitchFamily="34" charset="-122"/>
+                <a:cs typeface="Calibri" pitchFamily="34" charset="-120"/>
+              </a:rPr>
+              <a:t>Validation</a:t>
+            </a:r>
+            <a:endParaRPr lang="en-US" sz="1000" dirty="0"/>
+          </a:p>
+        </p:txBody>
+      </p:sp>
+      <p:sp>
+        <p:nvSpPr>
+          <p:cNvPr id="48" name="Text 46">
+            <a:extLst>
+              <a:ext uri="{FF2B5EF4-FFF2-40B4-BE49-F238E27FC236}">
+                <a16:creationId xmlns:a16="http://schemas.microsoft.com/office/drawing/2014/main" id="{67C42E92-B620-48FC-92C8-245891FE3182}"/>
+              </a:ext>
+            </a:extLst>
+          </p:cNvPr>
+          <p:cNvSpPr/>
+          <p:nvPr/>
+        </p:nvSpPr>
+        <p:spPr>
+          <a:xfrm>
+            <a:off x="3630168" y="2989520"/>
+            <a:ext cx="73152" cy="402336"/>
+          </a:xfrm>
+          <a:prstGeom prst="rect">
+            <a:avLst/>
+          </a:prstGeom>
+          <a:noFill/>
+          <a:ln/>
+        </p:spPr>
+        <p:txBody>
+          <a:bodyPr wrap="square" lIns="0" tIns="0" rIns="0" bIns="0" rtlCol="0" anchor="ctr"/>
+          <a:lstStyle/>
+          <a:p>
+            <a:pPr marL="0" indent="0" algn="ctr">
+              <a:buNone/>
+            </a:pPr>
+            <a:r>
+              <a:rPr lang="en-US" sz="1100" b="1" dirty="0">
+                <a:solidFill>
+                  <a:srgbClr val="0E7C86"/>
+                </a:solidFill>
+                <a:latin typeface="Calibri" pitchFamily="34" charset="0"/>
+                <a:ea typeface="Calibri" pitchFamily="34" charset="-122"/>
+                <a:cs typeface="Calibri" pitchFamily="34" charset="-120"/>
+              </a:rPr>
+              <a:t>›</a:t>
+            </a:r>
+            <a:endParaRPr lang="en-US" sz="1100" dirty="0"/>
+          </a:p>
+        </p:txBody>
+      </p:sp>
+      <p:sp>
+        <p:nvSpPr>
+          <p:cNvPr id="49" name="Shape 47">
+            <a:extLst>
+              <a:ext uri="{FF2B5EF4-FFF2-40B4-BE49-F238E27FC236}">
+                <a16:creationId xmlns:a16="http://schemas.microsoft.com/office/drawing/2014/main" id="{FA653996-3B50-4FCE-B00C-C9079057C55D}"/>
+              </a:ext>
+            </a:extLst>
+          </p:cNvPr>
+          <p:cNvSpPr/>
+          <p:nvPr/>
+        </p:nvSpPr>
+        <p:spPr>
+          <a:xfrm>
+            <a:off x="3703320" y="2989520"/>
+            <a:ext cx="1024128" cy="402336"/>
+          </a:xfrm>
+          <a:prstGeom prst="roundRect">
+            <a:avLst>
+              <a:gd name="adj" fmla="val 7955"/>
+            </a:avLst>
+          </a:prstGeom>
+          <a:solidFill>
+            <a:srgbClr val="FFFFFF"/>
+          </a:solidFill>
+          <a:ln w="9525">
+            <a:solidFill>
+              <a:srgbClr val="0B3D62"/>
+            </a:solidFill>
+            <a:prstDash val="solid"/>
+          </a:ln>
+        </p:spPr>
+      </p:sp>
+      <p:sp>
+        <p:nvSpPr>
+          <p:cNvPr id="50" name="Text 48">
+            <a:extLst>
+              <a:ext uri="{FF2B5EF4-FFF2-40B4-BE49-F238E27FC236}">
+                <a16:creationId xmlns:a16="http://schemas.microsoft.com/office/drawing/2014/main" id="{34E75B1B-5240-4623-8E47-D401B70827BC}"/>
+              </a:ext>
+            </a:extLst>
+          </p:cNvPr>
+          <p:cNvSpPr/>
+          <p:nvPr/>
+        </p:nvSpPr>
+        <p:spPr>
+          <a:xfrm>
+            <a:off x="3721608" y="2989520"/>
+            <a:ext cx="987552" cy="402336"/>
+          </a:xfrm>
+          <a:prstGeom prst="rect">
+            <a:avLst/>
+          </a:prstGeom>
+          <a:noFill/>
+          <a:ln/>
+        </p:spPr>
+        <p:txBody>
+          <a:bodyPr wrap="square" lIns="0" tIns="0" rIns="0" bIns="0" rtlCol="0" anchor="ctr"/>
+          <a:lstStyle/>
+          <a:p>
+            <a:pPr marL="0" indent="0" algn="ctr">
+              <a:lnSpc>
+                <a:spcPct val="92000"/>
+              </a:lnSpc>
+              <a:buNone/>
+            </a:pPr>
+            <a:r>
+              <a:rPr lang="en-US" sz="1000" b="1" dirty="0">
+                <a:solidFill>
+                  <a:srgbClr val="1F2937"/>
+                </a:solidFill>
+                <a:latin typeface="Calibri" pitchFamily="34" charset="0"/>
+                <a:ea typeface="Calibri" pitchFamily="34" charset="-122"/>
+                <a:cs typeface="Calibri" pitchFamily="34" charset="-120"/>
+              </a:rPr>
+              <a:t>Smart Scheduling</a:t>
+            </a:r>
+            <a:endParaRPr lang="en-US" sz="1000" dirty="0"/>
+          </a:p>
+          <a:p>
+            <a:pPr marL="0" indent="0" algn="ctr">
+              <a:lnSpc>
+                <a:spcPct val="92000"/>
+              </a:lnSpc>
+              <a:buNone/>
+            </a:pPr>
+            <a:r>
+              <a:rPr lang="en-US" sz="1000" b="1" dirty="0">
+                <a:solidFill>
+                  <a:srgbClr val="1F2937"/>
+                </a:solidFill>
+                <a:latin typeface="Calibri" pitchFamily="34" charset="0"/>
+                <a:ea typeface="Calibri" pitchFamily="34" charset="-122"/>
+                <a:cs typeface="Calibri" pitchFamily="34" charset="-120"/>
+              </a:rPr>
+              <a:t>&amp; Assignment</a:t>
+            </a:r>
+            <a:endParaRPr lang="en-US" sz="1000" dirty="0"/>
+          </a:p>
+        </p:txBody>
+      </p:sp>
+      <p:sp>
+        <p:nvSpPr>
+          <p:cNvPr id="51" name="Text 49">
+            <a:extLst>
+              <a:ext uri="{FF2B5EF4-FFF2-40B4-BE49-F238E27FC236}">
+                <a16:creationId xmlns:a16="http://schemas.microsoft.com/office/drawing/2014/main" id="{9AAE2FEF-1E9D-41A3-B334-C16D19D8F66B}"/>
+              </a:ext>
+            </a:extLst>
+          </p:cNvPr>
+          <p:cNvSpPr/>
+          <p:nvPr/>
+        </p:nvSpPr>
+        <p:spPr>
+          <a:xfrm>
+            <a:off x="4727448" y="2989520"/>
+            <a:ext cx="73152" cy="402336"/>
+          </a:xfrm>
+          <a:prstGeom prst="rect">
+            <a:avLst/>
+          </a:prstGeom>
+          <a:noFill/>
+          <a:ln/>
+        </p:spPr>
+        <p:txBody>
+          <a:bodyPr wrap="square" lIns="0" tIns="0" rIns="0" bIns="0" rtlCol="0" anchor="ctr"/>
+          <a:lstStyle/>
+          <a:p>
+            <a:pPr marL="0" indent="0" algn="ctr">
+              <a:buNone/>
+            </a:pPr>
+            <a:r>
+              <a:rPr lang="en-US" sz="1100" b="1" dirty="0">
+                <a:solidFill>
+                  <a:srgbClr val="0E7C86"/>
+                </a:solidFill>
+                <a:latin typeface="Calibri" pitchFamily="34" charset="0"/>
+                <a:ea typeface="Calibri" pitchFamily="34" charset="-122"/>
+                <a:cs typeface="Calibri" pitchFamily="34" charset="-120"/>
+              </a:rPr>
+              <a:t>›</a:t>
+            </a:r>
+            <a:endParaRPr lang="en-US" sz="1100" dirty="0"/>
+          </a:p>
+        </p:txBody>
+      </p:sp>
+      <p:sp>
+        <p:nvSpPr>
+          <p:cNvPr id="52" name="Shape 50">
+            <a:extLst>
+              <a:ext uri="{FF2B5EF4-FFF2-40B4-BE49-F238E27FC236}">
+                <a16:creationId xmlns:a16="http://schemas.microsoft.com/office/drawing/2014/main" id="{CB106990-42F2-426A-867A-5366759DB918}"/>
+              </a:ext>
+            </a:extLst>
+          </p:cNvPr>
+          <p:cNvSpPr/>
+          <p:nvPr/>
+        </p:nvSpPr>
+        <p:spPr>
+          <a:xfrm>
+            <a:off x="4800600" y="2989520"/>
+            <a:ext cx="1024128" cy="402336"/>
+          </a:xfrm>
+          <a:prstGeom prst="roundRect">
+            <a:avLst>
+              <a:gd name="adj" fmla="val 7955"/>
+            </a:avLst>
+          </a:prstGeom>
+          <a:solidFill>
+            <a:srgbClr val="FFFFFF"/>
+          </a:solidFill>
+          <a:ln w="9525">
+            <a:solidFill>
+              <a:srgbClr val="0B3D62"/>
+            </a:solidFill>
+            <a:prstDash val="solid"/>
+          </a:ln>
+        </p:spPr>
+      </p:sp>
+      <p:sp>
+        <p:nvSpPr>
+          <p:cNvPr id="53" name="Text 51">
+            <a:extLst>
+              <a:ext uri="{FF2B5EF4-FFF2-40B4-BE49-F238E27FC236}">
+                <a16:creationId xmlns:a16="http://schemas.microsoft.com/office/drawing/2014/main" id="{0A6B355A-A5B1-4B13-9E7A-EBC6129265BA}"/>
+              </a:ext>
+            </a:extLst>
+          </p:cNvPr>
+          <p:cNvSpPr/>
+          <p:nvPr/>
+        </p:nvSpPr>
+        <p:spPr>
+          <a:xfrm>
+            <a:off x="4818888" y="2989520"/>
+            <a:ext cx="987552" cy="402336"/>
+          </a:xfrm>
+          <a:prstGeom prst="rect">
+            <a:avLst/>
+          </a:prstGeom>
+          <a:noFill/>
+          <a:ln/>
+        </p:spPr>
+        <p:txBody>
+          <a:bodyPr wrap="square" lIns="0" tIns="0" rIns="0" bIns="0" rtlCol="0" anchor="ctr"/>
+          <a:lstStyle/>
+          <a:p>
+            <a:pPr marL="0" indent="0" algn="ctr">
+              <a:lnSpc>
+                <a:spcPct val="92000"/>
+              </a:lnSpc>
+              <a:buNone/>
+            </a:pPr>
+            <a:r>
+              <a:rPr lang="en-US" sz="1000" b="1" dirty="0">
+                <a:solidFill>
+                  <a:srgbClr val="1F2937"/>
+                </a:solidFill>
+                <a:latin typeface="Calibri" pitchFamily="34" charset="0"/>
+                <a:ea typeface="Calibri" pitchFamily="34" charset="-122"/>
+                <a:cs typeface="Calibri" pitchFamily="34" charset="-120"/>
+              </a:rPr>
+              <a:t>LMO / GATC Field</a:t>
+            </a:r>
+            <a:endParaRPr lang="en-US" sz="1000" dirty="0"/>
+          </a:p>
+          <a:p>
+            <a:pPr marL="0" indent="0" algn="ctr">
+              <a:lnSpc>
+                <a:spcPct val="92000"/>
+              </a:lnSpc>
+              <a:buNone/>
+            </a:pPr>
+            <a:r>
+              <a:rPr lang="en-US" sz="1000" b="1" dirty="0">
+                <a:solidFill>
+                  <a:srgbClr val="1F2937"/>
+                </a:solidFill>
+                <a:latin typeface="Calibri" pitchFamily="34" charset="0"/>
+                <a:ea typeface="Calibri" pitchFamily="34" charset="-122"/>
+                <a:cs typeface="Calibri" pitchFamily="34" charset="-120"/>
+              </a:rPr>
+              <a:t>Inspection</a:t>
+            </a:r>
+            <a:endParaRPr lang="en-US" sz="1000" dirty="0"/>
+          </a:p>
+        </p:txBody>
+      </p:sp>
+      <p:sp>
+        <p:nvSpPr>
+          <p:cNvPr id="54" name="Shape 52">
+            <a:extLst>
+              <a:ext uri="{FF2B5EF4-FFF2-40B4-BE49-F238E27FC236}">
+                <a16:creationId xmlns:a16="http://schemas.microsoft.com/office/drawing/2014/main" id="{2CF9D692-1646-419F-B8B1-2AF40538B673}"/>
+              </a:ext>
+            </a:extLst>
+          </p:cNvPr>
+          <p:cNvSpPr/>
+          <p:nvPr/>
+        </p:nvSpPr>
+        <p:spPr>
+          <a:xfrm>
+            <a:off x="5312664" y="3391856"/>
+            <a:ext cx="0" cy="146304"/>
+          </a:xfrm>
+          <a:prstGeom prst="line">
+            <a:avLst/>
+          </a:prstGeom>
+          <a:noFill/>
+          <a:ln w="15875">
+            <a:solidFill>
+              <a:srgbClr val="0B3D62"/>
+            </a:solidFill>
+            <a:prstDash val="solid"/>
+            <a:tailEnd type="triangle"/>
+          </a:ln>
+        </p:spPr>
+      </p:sp>
+      <p:sp>
+        <p:nvSpPr>
+          <p:cNvPr id="55" name="Shape 53">
+            <a:extLst>
+              <a:ext uri="{FF2B5EF4-FFF2-40B4-BE49-F238E27FC236}">
+                <a16:creationId xmlns:a16="http://schemas.microsoft.com/office/drawing/2014/main" id="{2A89DB49-B59F-4730-9DE9-DD84A2B1A6D5}"/>
+              </a:ext>
+            </a:extLst>
+          </p:cNvPr>
+          <p:cNvSpPr/>
+          <p:nvPr/>
+        </p:nvSpPr>
+        <p:spPr>
+          <a:xfrm>
+            <a:off x="4781740" y="3666749"/>
+            <a:ext cx="1024128" cy="457200"/>
+          </a:xfrm>
+          <a:prstGeom prst="diamond">
+            <a:avLst/>
+          </a:prstGeom>
+          <a:solidFill>
+            <a:srgbClr val="FFFFFF"/>
+          </a:solidFill>
+          <a:ln w="11430">
+            <a:solidFill>
+              <a:srgbClr val="0B3D62"/>
+            </a:solidFill>
+            <a:prstDash val="solid"/>
+          </a:ln>
+        </p:spPr>
+      </p:sp>
+      <p:sp>
+        <p:nvSpPr>
+          <p:cNvPr id="56" name="Text 54">
+            <a:extLst>
+              <a:ext uri="{FF2B5EF4-FFF2-40B4-BE49-F238E27FC236}">
+                <a16:creationId xmlns:a16="http://schemas.microsoft.com/office/drawing/2014/main" id="{568553EA-8614-4E04-BC9A-8C38A5E2B2ED}"/>
+              </a:ext>
+            </a:extLst>
+          </p:cNvPr>
+          <p:cNvSpPr/>
+          <p:nvPr/>
+        </p:nvSpPr>
+        <p:spPr>
+          <a:xfrm>
+            <a:off x="4800600" y="3666749"/>
+            <a:ext cx="1024128" cy="457200"/>
+          </a:xfrm>
+          <a:prstGeom prst="rect">
+            <a:avLst/>
+          </a:prstGeom>
+          <a:noFill/>
+          <a:ln/>
+        </p:spPr>
+        <p:txBody>
+          <a:bodyPr wrap="square" lIns="0" tIns="0" rIns="0" bIns="0" rtlCol="0" anchor="ctr"/>
+          <a:lstStyle/>
+          <a:p>
+            <a:pPr marL="0" indent="0" algn="ctr">
+              <a:lnSpc>
+                <a:spcPct val="90000"/>
+              </a:lnSpc>
+              <a:buNone/>
+            </a:pPr>
+            <a:r>
+              <a:rPr lang="en-US" sz="1000" b="1" dirty="0">
+                <a:solidFill>
+                  <a:srgbClr val="082B47"/>
+                </a:solidFill>
+                <a:latin typeface="Calibri" pitchFamily="34" charset="0"/>
+                <a:ea typeface="Calibri" pitchFamily="34" charset="-122"/>
+                <a:cs typeface="Calibri" pitchFamily="34" charset="-120"/>
+              </a:rPr>
+              <a:t>PASS /</a:t>
+            </a:r>
+            <a:endParaRPr lang="en-US" sz="1000" dirty="0"/>
+          </a:p>
+          <a:p>
+            <a:pPr marL="0" indent="0" algn="ctr">
+              <a:lnSpc>
+                <a:spcPct val="90000"/>
+              </a:lnSpc>
+              <a:buNone/>
+            </a:pPr>
+            <a:r>
+              <a:rPr lang="en-US" sz="1000" b="1" dirty="0">
+                <a:solidFill>
+                  <a:srgbClr val="082B47"/>
+                </a:solidFill>
+                <a:latin typeface="Calibri" pitchFamily="34" charset="0"/>
+                <a:ea typeface="Calibri" pitchFamily="34" charset="-122"/>
+                <a:cs typeface="Calibri" pitchFamily="34" charset="-120"/>
+              </a:rPr>
+              <a:t>FAIL</a:t>
+            </a:r>
+            <a:endParaRPr lang="en-US" sz="1000" dirty="0"/>
+          </a:p>
+        </p:txBody>
+      </p:sp>
+      <p:sp>
+        <p:nvSpPr>
+          <p:cNvPr id="57" name="Shape 55">
+            <a:extLst>
+              <a:ext uri="{FF2B5EF4-FFF2-40B4-BE49-F238E27FC236}">
+                <a16:creationId xmlns:a16="http://schemas.microsoft.com/office/drawing/2014/main" id="{266351EF-EEC2-4D17-BAB7-BEE0C503D2F9}"/>
+              </a:ext>
+            </a:extLst>
+          </p:cNvPr>
+          <p:cNvSpPr/>
+          <p:nvPr/>
+        </p:nvSpPr>
+        <p:spPr>
+          <a:xfrm>
+            <a:off x="3703320" y="3703325"/>
+            <a:ext cx="1024128" cy="384048"/>
+          </a:xfrm>
+          <a:prstGeom prst="roundRect">
+            <a:avLst>
+              <a:gd name="adj" fmla="val 8333"/>
+            </a:avLst>
+          </a:prstGeom>
+          <a:solidFill>
+            <a:srgbClr val="FFFFFF"/>
+          </a:solidFill>
+          <a:ln w="9525">
+            <a:solidFill>
+              <a:srgbClr val="0B3D62"/>
+            </a:solidFill>
+            <a:prstDash val="solid"/>
+          </a:ln>
+        </p:spPr>
+      </p:sp>
+      <p:sp>
+        <p:nvSpPr>
+          <p:cNvPr id="58" name="Text 56">
+            <a:extLst>
+              <a:ext uri="{FF2B5EF4-FFF2-40B4-BE49-F238E27FC236}">
+                <a16:creationId xmlns:a16="http://schemas.microsoft.com/office/drawing/2014/main" id="{40DCC97B-9AB2-4E68-B51D-821DB17006E4}"/>
+              </a:ext>
+            </a:extLst>
+          </p:cNvPr>
+          <p:cNvSpPr/>
+          <p:nvPr/>
+        </p:nvSpPr>
+        <p:spPr>
+          <a:xfrm>
+            <a:off x="3721608" y="3703325"/>
+            <a:ext cx="987552" cy="384048"/>
+          </a:xfrm>
+          <a:prstGeom prst="rect">
+            <a:avLst/>
+          </a:prstGeom>
+          <a:noFill/>
+          <a:ln/>
+        </p:spPr>
+        <p:txBody>
+          <a:bodyPr wrap="square" lIns="0" tIns="0" rIns="0" bIns="0" rtlCol="0" anchor="ctr"/>
+          <a:lstStyle/>
+          <a:p>
+            <a:pPr marL="0" indent="0" algn="ctr">
+              <a:lnSpc>
+                <a:spcPct val="92000"/>
+              </a:lnSpc>
+              <a:buNone/>
+            </a:pPr>
+            <a:r>
+              <a:rPr lang="en-US" sz="1000" b="1" dirty="0">
+                <a:solidFill>
+                  <a:srgbClr val="1F2937"/>
+                </a:solidFill>
+                <a:latin typeface="Calibri" pitchFamily="34" charset="0"/>
+                <a:ea typeface="Calibri" pitchFamily="34" charset="-122"/>
+                <a:cs typeface="Calibri" pitchFamily="34" charset="-120"/>
+              </a:rPr>
+              <a:t>Digital Certificate</a:t>
+            </a:r>
+            <a:endParaRPr lang="en-US" sz="1000" dirty="0"/>
+          </a:p>
+          <a:p>
+            <a:pPr marL="0" indent="0" algn="ctr">
+              <a:lnSpc>
+                <a:spcPct val="92000"/>
+              </a:lnSpc>
+              <a:buNone/>
+            </a:pPr>
+            <a:r>
+              <a:rPr lang="en-US" sz="1000" b="1" dirty="0">
+                <a:solidFill>
+                  <a:srgbClr val="1F2937"/>
+                </a:solidFill>
+                <a:latin typeface="Calibri" pitchFamily="34" charset="0"/>
+                <a:ea typeface="Calibri" pitchFamily="34" charset="-122"/>
+                <a:cs typeface="Calibri" pitchFamily="34" charset="-120"/>
+              </a:rPr>
+              <a:t>Generation</a:t>
+            </a:r>
+            <a:endParaRPr lang="en-US" sz="1000" dirty="0"/>
+          </a:p>
+        </p:txBody>
+      </p:sp>
+      <p:sp>
+        <p:nvSpPr>
+          <p:cNvPr id="59" name="Shape 57">
+            <a:extLst>
+              <a:ext uri="{FF2B5EF4-FFF2-40B4-BE49-F238E27FC236}">
+                <a16:creationId xmlns:a16="http://schemas.microsoft.com/office/drawing/2014/main" id="{7482C166-B407-418B-9BCA-8D19CF039DF7}"/>
+              </a:ext>
+            </a:extLst>
+          </p:cNvPr>
+          <p:cNvSpPr/>
+          <p:nvPr/>
+        </p:nvSpPr>
+        <p:spPr>
+          <a:xfrm>
+            <a:off x="2606040" y="3703325"/>
+            <a:ext cx="1024128" cy="384048"/>
+          </a:xfrm>
+          <a:prstGeom prst="roundRect">
+            <a:avLst>
+              <a:gd name="adj" fmla="val 8333"/>
+            </a:avLst>
+          </a:prstGeom>
+          <a:solidFill>
+            <a:srgbClr val="FFFFFF"/>
+          </a:solidFill>
+          <a:ln w="9525">
+            <a:solidFill>
+              <a:srgbClr val="0B3D62"/>
+            </a:solidFill>
+            <a:prstDash val="solid"/>
+          </a:ln>
+        </p:spPr>
+      </p:sp>
+      <p:sp>
+        <p:nvSpPr>
+          <p:cNvPr id="60" name="Text 58">
+            <a:extLst>
+              <a:ext uri="{FF2B5EF4-FFF2-40B4-BE49-F238E27FC236}">
+                <a16:creationId xmlns:a16="http://schemas.microsoft.com/office/drawing/2014/main" id="{3F327F72-1058-406A-B2FE-39DBDF2D0297}"/>
+              </a:ext>
+            </a:extLst>
+          </p:cNvPr>
+          <p:cNvSpPr/>
+          <p:nvPr/>
+        </p:nvSpPr>
+        <p:spPr>
+          <a:xfrm>
+            <a:off x="2624328" y="3703325"/>
+            <a:ext cx="987552" cy="384048"/>
+          </a:xfrm>
+          <a:prstGeom prst="rect">
+            <a:avLst/>
+          </a:prstGeom>
+          <a:noFill/>
+          <a:ln/>
+        </p:spPr>
+        <p:txBody>
+          <a:bodyPr wrap="square" lIns="0" tIns="0" rIns="0" bIns="0" rtlCol="0" anchor="ctr"/>
+          <a:lstStyle/>
+          <a:p>
+            <a:pPr marL="0" indent="0" algn="ctr">
+              <a:lnSpc>
+                <a:spcPct val="92000"/>
+              </a:lnSpc>
+              <a:buNone/>
+            </a:pPr>
+            <a:r>
+              <a:rPr lang="en-US" sz="1000" b="1" dirty="0">
+                <a:solidFill>
+                  <a:srgbClr val="1F2937"/>
+                </a:solidFill>
+                <a:latin typeface="Calibri" pitchFamily="34" charset="0"/>
+                <a:ea typeface="Calibri" pitchFamily="34" charset="-122"/>
+                <a:cs typeface="Calibri" pitchFamily="34" charset="-120"/>
+              </a:rPr>
+              <a:t>Digital Signature</a:t>
+            </a:r>
+            <a:endParaRPr lang="en-US" sz="1000" dirty="0"/>
+          </a:p>
+          <a:p>
+            <a:pPr marL="0" indent="0" algn="ctr">
+              <a:lnSpc>
+                <a:spcPct val="92000"/>
+              </a:lnSpc>
+              <a:buNone/>
+            </a:pPr>
+            <a:r>
+              <a:rPr lang="en-US" sz="1000" b="1" dirty="0">
+                <a:solidFill>
+                  <a:srgbClr val="1F2937"/>
+                </a:solidFill>
+                <a:latin typeface="Calibri" pitchFamily="34" charset="0"/>
+                <a:ea typeface="Calibri" pitchFamily="34" charset="-122"/>
+                <a:cs typeface="Calibri" pitchFamily="34" charset="-120"/>
+              </a:rPr>
+              <a:t>+ QR Generation</a:t>
+            </a:r>
+            <a:endParaRPr lang="en-US" sz="1000" dirty="0"/>
+          </a:p>
+        </p:txBody>
+      </p:sp>
+      <p:sp>
+        <p:nvSpPr>
+          <p:cNvPr id="61" name="Shape 59">
+            <a:extLst>
+              <a:ext uri="{FF2B5EF4-FFF2-40B4-BE49-F238E27FC236}">
+                <a16:creationId xmlns:a16="http://schemas.microsoft.com/office/drawing/2014/main" id="{15E181ED-5E84-46D5-9835-4C43C82C0420}"/>
+              </a:ext>
+            </a:extLst>
+          </p:cNvPr>
+          <p:cNvSpPr/>
+          <p:nvPr/>
+        </p:nvSpPr>
+        <p:spPr>
+          <a:xfrm>
+            <a:off x="1508760" y="3703325"/>
+            <a:ext cx="1024128" cy="384048"/>
+          </a:xfrm>
+          <a:prstGeom prst="roundRect">
+            <a:avLst>
+              <a:gd name="adj" fmla="val 8333"/>
+            </a:avLst>
+          </a:prstGeom>
+          <a:solidFill>
+            <a:srgbClr val="FFFFFF"/>
+          </a:solidFill>
+          <a:ln w="9525">
+            <a:solidFill>
+              <a:srgbClr val="0B3D62"/>
+            </a:solidFill>
+            <a:prstDash val="solid"/>
+          </a:ln>
+        </p:spPr>
+      </p:sp>
+      <p:sp>
+        <p:nvSpPr>
+          <p:cNvPr id="62" name="Text 60">
+            <a:extLst>
+              <a:ext uri="{FF2B5EF4-FFF2-40B4-BE49-F238E27FC236}">
+                <a16:creationId xmlns:a16="http://schemas.microsoft.com/office/drawing/2014/main" id="{D7DB706B-C0D4-4242-B4EC-C8C03D72F8F9}"/>
+              </a:ext>
+            </a:extLst>
+          </p:cNvPr>
+          <p:cNvSpPr/>
+          <p:nvPr/>
+        </p:nvSpPr>
+        <p:spPr>
+          <a:xfrm>
+            <a:off x="1527048" y="3703325"/>
+            <a:ext cx="987552" cy="384048"/>
+          </a:xfrm>
+          <a:prstGeom prst="rect">
+            <a:avLst/>
+          </a:prstGeom>
+          <a:noFill/>
+          <a:ln/>
+        </p:spPr>
+        <p:txBody>
+          <a:bodyPr wrap="square" lIns="0" tIns="0" rIns="0" bIns="0" rtlCol="0" anchor="ctr"/>
+          <a:lstStyle/>
+          <a:p>
+            <a:pPr marL="0" indent="0" algn="ctr">
+              <a:lnSpc>
+                <a:spcPct val="92000"/>
+              </a:lnSpc>
+              <a:buNone/>
+            </a:pPr>
+            <a:r>
+              <a:rPr lang="en-US" sz="1000" b="1" dirty="0">
+                <a:solidFill>
+                  <a:srgbClr val="1F2937"/>
+                </a:solidFill>
+                <a:latin typeface="Calibri" pitchFamily="34" charset="0"/>
+                <a:ea typeface="Calibri" pitchFamily="34" charset="-122"/>
+                <a:cs typeface="Calibri" pitchFamily="34" charset="-120"/>
+              </a:rPr>
+              <a:t>Public QR</a:t>
+            </a:r>
+            <a:endParaRPr lang="en-US" sz="1000" dirty="0"/>
+          </a:p>
+          <a:p>
+            <a:pPr marL="0" indent="0" algn="ctr">
+              <a:lnSpc>
+                <a:spcPct val="92000"/>
+              </a:lnSpc>
+              <a:buNone/>
+            </a:pPr>
+            <a:r>
+              <a:rPr lang="en-US" sz="1000" b="1" dirty="0">
+                <a:solidFill>
+                  <a:srgbClr val="1F2937"/>
+                </a:solidFill>
+                <a:latin typeface="Calibri" pitchFamily="34" charset="0"/>
+                <a:ea typeface="Calibri" pitchFamily="34" charset="-122"/>
+                <a:cs typeface="Calibri" pitchFamily="34" charset="-120"/>
+              </a:rPr>
+              <a:t>Verification</a:t>
+            </a:r>
+            <a:endParaRPr lang="en-US" sz="1000" dirty="0"/>
+          </a:p>
+        </p:txBody>
+      </p:sp>
+      <p:sp>
+        <p:nvSpPr>
+          <p:cNvPr id="63" name="Shape 61">
+            <a:extLst>
+              <a:ext uri="{FF2B5EF4-FFF2-40B4-BE49-F238E27FC236}">
+                <a16:creationId xmlns:a16="http://schemas.microsoft.com/office/drawing/2014/main" id="{1C9D71E1-192A-4C84-B634-1A5E8747BF50}"/>
+              </a:ext>
+            </a:extLst>
+          </p:cNvPr>
+          <p:cNvSpPr/>
+          <p:nvPr/>
+        </p:nvSpPr>
+        <p:spPr>
+          <a:xfrm>
+            <a:off x="374336" y="3687826"/>
+            <a:ext cx="1024128" cy="384048"/>
+          </a:xfrm>
+          <a:prstGeom prst="roundRect">
+            <a:avLst>
+              <a:gd name="adj" fmla="val 8333"/>
+            </a:avLst>
+          </a:prstGeom>
+          <a:solidFill>
+            <a:srgbClr val="FFFFFF"/>
+          </a:solidFill>
+          <a:ln w="9525">
+            <a:solidFill>
+              <a:srgbClr val="0B3D62"/>
+            </a:solidFill>
+            <a:prstDash val="solid"/>
+          </a:ln>
+        </p:spPr>
+      </p:sp>
+      <p:sp>
+        <p:nvSpPr>
+          <p:cNvPr id="64" name="Text 62">
+            <a:extLst>
+              <a:ext uri="{FF2B5EF4-FFF2-40B4-BE49-F238E27FC236}">
+                <a16:creationId xmlns:a16="http://schemas.microsoft.com/office/drawing/2014/main" id="{255BE0A0-C856-4DF7-8C78-078A86A9D715}"/>
+              </a:ext>
+            </a:extLst>
+          </p:cNvPr>
+          <p:cNvSpPr/>
+          <p:nvPr/>
+        </p:nvSpPr>
+        <p:spPr>
+          <a:xfrm>
+            <a:off x="429768" y="3703325"/>
+            <a:ext cx="987552" cy="384048"/>
+          </a:xfrm>
+          <a:prstGeom prst="rect">
+            <a:avLst/>
+          </a:prstGeom>
+          <a:noFill/>
+          <a:ln/>
+        </p:spPr>
+        <p:txBody>
+          <a:bodyPr wrap="square" lIns="0" tIns="0" rIns="0" bIns="0" rtlCol="0" anchor="ctr"/>
+          <a:lstStyle/>
+          <a:p>
+            <a:pPr marL="0" indent="0" algn="ctr">
+              <a:lnSpc>
+                <a:spcPct val="92000"/>
+              </a:lnSpc>
+              <a:buNone/>
+            </a:pPr>
+            <a:r>
+              <a:rPr lang="en-US" sz="1000" b="1" dirty="0">
+                <a:solidFill>
+                  <a:srgbClr val="1F2937"/>
+                </a:solidFill>
+                <a:latin typeface="Calibri" pitchFamily="34" charset="0"/>
+                <a:ea typeface="Calibri" pitchFamily="34" charset="-122"/>
+                <a:cs typeface="Calibri" pitchFamily="34" charset="-120"/>
+              </a:rPr>
+              <a:t>Validity Monitoring</a:t>
+            </a:r>
+            <a:endParaRPr lang="en-US" sz="1000" dirty="0"/>
+          </a:p>
+        </p:txBody>
+      </p:sp>
+      <p:sp>
+        <p:nvSpPr>
+          <p:cNvPr id="65" name="Text 63">
+            <a:extLst>
+              <a:ext uri="{FF2B5EF4-FFF2-40B4-BE49-F238E27FC236}">
+                <a16:creationId xmlns:a16="http://schemas.microsoft.com/office/drawing/2014/main" id="{AD1EDD97-B019-4762-AC4D-8F56E3F69842}"/>
+              </a:ext>
+            </a:extLst>
+          </p:cNvPr>
+          <p:cNvSpPr/>
+          <p:nvPr/>
+        </p:nvSpPr>
+        <p:spPr>
+          <a:xfrm>
+            <a:off x="1435608" y="3703325"/>
+            <a:ext cx="73152" cy="384048"/>
+          </a:xfrm>
+          <a:prstGeom prst="rect">
+            <a:avLst/>
+          </a:prstGeom>
+          <a:noFill/>
+          <a:ln/>
+        </p:spPr>
+        <p:txBody>
+          <a:bodyPr wrap="square" lIns="0" tIns="0" rIns="0" bIns="0" rtlCol="0" anchor="ctr"/>
+          <a:lstStyle/>
+          <a:p>
+            <a:pPr marL="0" indent="0" algn="ctr">
+              <a:buNone/>
+            </a:pPr>
+            <a:r>
+              <a:rPr lang="en-US" sz="1000" b="1" dirty="0">
+                <a:solidFill>
+                  <a:srgbClr val="0E7C86"/>
+                </a:solidFill>
+                <a:latin typeface="Calibri" pitchFamily="34" charset="0"/>
+                <a:ea typeface="Calibri" pitchFamily="34" charset="-122"/>
+                <a:cs typeface="Calibri" pitchFamily="34" charset="-120"/>
+              </a:rPr>
+              <a:t>‹</a:t>
+            </a:r>
+            <a:endParaRPr lang="en-US" sz="1000" dirty="0"/>
+          </a:p>
+        </p:txBody>
+      </p:sp>
+      <p:sp>
+        <p:nvSpPr>
+          <p:cNvPr id="66" name="Text 64">
+            <a:extLst>
+              <a:ext uri="{FF2B5EF4-FFF2-40B4-BE49-F238E27FC236}">
+                <a16:creationId xmlns:a16="http://schemas.microsoft.com/office/drawing/2014/main" id="{314708A4-FA71-436A-996B-B043A7CD6E2E}"/>
+              </a:ext>
+            </a:extLst>
+          </p:cNvPr>
+          <p:cNvSpPr/>
+          <p:nvPr/>
+        </p:nvSpPr>
+        <p:spPr>
+          <a:xfrm>
+            <a:off x="2532888" y="3703325"/>
+            <a:ext cx="73152" cy="384048"/>
+          </a:xfrm>
+          <a:prstGeom prst="rect">
+            <a:avLst/>
+          </a:prstGeom>
+          <a:noFill/>
+          <a:ln/>
+        </p:spPr>
+        <p:txBody>
+          <a:bodyPr wrap="square" lIns="0" tIns="0" rIns="0" bIns="0" rtlCol="0" anchor="ctr"/>
+          <a:lstStyle/>
+          <a:p>
+            <a:pPr marL="0" indent="0" algn="ctr">
+              <a:buNone/>
+            </a:pPr>
+            <a:r>
+              <a:rPr lang="en-US" sz="1000" b="1" dirty="0">
+                <a:solidFill>
+                  <a:srgbClr val="0E7C86"/>
+                </a:solidFill>
+                <a:latin typeface="Calibri" pitchFamily="34" charset="0"/>
+                <a:ea typeface="Calibri" pitchFamily="34" charset="-122"/>
+                <a:cs typeface="Calibri" pitchFamily="34" charset="-120"/>
+              </a:rPr>
+              <a:t>‹</a:t>
+            </a:r>
+            <a:endParaRPr lang="en-US" sz="1000" dirty="0"/>
+          </a:p>
+        </p:txBody>
+      </p:sp>
+      <p:sp>
+        <p:nvSpPr>
+          <p:cNvPr id="67" name="Text 65">
+            <a:extLst>
+              <a:ext uri="{FF2B5EF4-FFF2-40B4-BE49-F238E27FC236}">
+                <a16:creationId xmlns:a16="http://schemas.microsoft.com/office/drawing/2014/main" id="{CBCD299D-591F-459C-9CEE-DB0C1A143296}"/>
+              </a:ext>
+            </a:extLst>
+          </p:cNvPr>
+          <p:cNvSpPr/>
+          <p:nvPr/>
+        </p:nvSpPr>
+        <p:spPr>
+          <a:xfrm>
+            <a:off x="3630168" y="3703325"/>
+            <a:ext cx="73152" cy="384048"/>
+          </a:xfrm>
+          <a:prstGeom prst="rect">
+            <a:avLst/>
+          </a:prstGeom>
+          <a:noFill/>
+          <a:ln/>
+        </p:spPr>
+        <p:txBody>
+          <a:bodyPr wrap="square" lIns="0" tIns="0" rIns="0" bIns="0" rtlCol="0" anchor="ctr"/>
+          <a:lstStyle/>
+          <a:p>
+            <a:pPr marL="0" indent="0" algn="ctr">
+              <a:buNone/>
+            </a:pPr>
+            <a:r>
+              <a:rPr lang="en-US" sz="1000" b="1" dirty="0">
+                <a:solidFill>
+                  <a:srgbClr val="0E7C86"/>
+                </a:solidFill>
+                <a:latin typeface="Calibri" pitchFamily="34" charset="0"/>
+                <a:ea typeface="Calibri" pitchFamily="34" charset="-122"/>
+                <a:cs typeface="Calibri" pitchFamily="34" charset="-120"/>
+              </a:rPr>
+              <a:t>‹</a:t>
+            </a:r>
+            <a:endParaRPr lang="en-US" sz="1000" dirty="0"/>
+          </a:p>
+        </p:txBody>
+      </p:sp>
+      <p:sp>
+        <p:nvSpPr>
+          <p:cNvPr id="68" name="Text 66">
+            <a:extLst>
+              <a:ext uri="{FF2B5EF4-FFF2-40B4-BE49-F238E27FC236}">
+                <a16:creationId xmlns:a16="http://schemas.microsoft.com/office/drawing/2014/main" id="{39495860-B96D-49C9-83E9-4206261CD94C}"/>
+              </a:ext>
+            </a:extLst>
+          </p:cNvPr>
+          <p:cNvSpPr/>
+          <p:nvPr/>
+        </p:nvSpPr>
+        <p:spPr>
+          <a:xfrm>
+            <a:off x="4727448" y="3703325"/>
+            <a:ext cx="73152" cy="384048"/>
+          </a:xfrm>
+          <a:prstGeom prst="rect">
+            <a:avLst/>
+          </a:prstGeom>
+          <a:noFill/>
+          <a:ln/>
+        </p:spPr>
+        <p:txBody>
+          <a:bodyPr wrap="square" lIns="0" tIns="0" rIns="0" bIns="0" rtlCol="0" anchor="ctr"/>
+          <a:lstStyle/>
+          <a:p>
+            <a:pPr marL="0" indent="0" algn="ctr">
+              <a:buNone/>
+            </a:pPr>
+            <a:r>
+              <a:rPr lang="en-US" sz="1000" b="1" dirty="0">
+                <a:solidFill>
+                  <a:srgbClr val="1E7B34"/>
+                </a:solidFill>
+                <a:latin typeface="Calibri" pitchFamily="34" charset="0"/>
+                <a:ea typeface="Calibri" pitchFamily="34" charset="-122"/>
+                <a:cs typeface="Calibri" pitchFamily="34" charset="-120"/>
+              </a:rPr>
+              <a:t>‹</a:t>
+            </a:r>
+            <a:endParaRPr lang="en-US" sz="1000" dirty="0"/>
+          </a:p>
+        </p:txBody>
+      </p:sp>
+      <p:sp>
+        <p:nvSpPr>
+          <p:cNvPr id="69" name="Text 67">
+            <a:extLst>
+              <a:ext uri="{FF2B5EF4-FFF2-40B4-BE49-F238E27FC236}">
+                <a16:creationId xmlns:a16="http://schemas.microsoft.com/office/drawing/2014/main" id="{DF331E62-4127-4A66-A870-3B3182A4FED3}"/>
+              </a:ext>
+            </a:extLst>
+          </p:cNvPr>
+          <p:cNvSpPr/>
+          <p:nvPr/>
+        </p:nvSpPr>
+        <p:spPr>
+          <a:xfrm>
+            <a:off x="4727448" y="3455864"/>
+            <a:ext cx="347472" cy="109728"/>
+          </a:xfrm>
+          <a:prstGeom prst="rect">
+            <a:avLst/>
+          </a:prstGeom>
+          <a:noFill/>
+          <a:ln/>
+        </p:spPr>
+        <p:txBody>
+          <a:bodyPr wrap="square" lIns="0" tIns="0" rIns="0" bIns="0" rtlCol="0" anchor="ctr"/>
+          <a:lstStyle/>
+          <a:p>
+            <a:pPr marL="0" indent="0" algn="ctr">
+              <a:buNone/>
+            </a:pPr>
+            <a:r>
+              <a:rPr lang="en-US" sz="1000" b="1" dirty="0">
+                <a:solidFill>
+                  <a:srgbClr val="1E7B34"/>
+                </a:solidFill>
+                <a:latin typeface="Calibri" pitchFamily="34" charset="0"/>
+                <a:ea typeface="Calibri" pitchFamily="34" charset="-122"/>
+                <a:cs typeface="Calibri" pitchFamily="34" charset="-120"/>
+              </a:rPr>
+              <a:t>PASS</a:t>
+            </a:r>
+            <a:endParaRPr lang="en-US" sz="1000" dirty="0"/>
+          </a:p>
+        </p:txBody>
+      </p:sp>
+      <p:sp>
+        <p:nvSpPr>
+          <p:cNvPr id="70" name="Shape 68">
+            <a:extLst>
+              <a:ext uri="{FF2B5EF4-FFF2-40B4-BE49-F238E27FC236}">
+                <a16:creationId xmlns:a16="http://schemas.microsoft.com/office/drawing/2014/main" id="{EC05EC26-DA68-4683-9A3E-CEAEBB61681B}"/>
+              </a:ext>
+            </a:extLst>
+          </p:cNvPr>
+          <p:cNvSpPr/>
+          <p:nvPr/>
+        </p:nvSpPr>
+        <p:spPr>
+          <a:xfrm>
+            <a:off x="4549139" y="4178813"/>
+            <a:ext cx="1344168" cy="237744"/>
+          </a:xfrm>
+          <a:prstGeom prst="roundRect">
+            <a:avLst>
+              <a:gd name="adj" fmla="val 13462"/>
+            </a:avLst>
+          </a:prstGeom>
+          <a:solidFill>
+            <a:srgbClr val="FBE9E7"/>
+          </a:solidFill>
+          <a:ln w="9525">
+            <a:solidFill>
+              <a:srgbClr val="B3261E"/>
+            </a:solidFill>
+            <a:prstDash val="solid"/>
+          </a:ln>
+        </p:spPr>
+      </p:sp>
+      <p:sp>
+        <p:nvSpPr>
+          <p:cNvPr id="71" name="Text 69">
+            <a:extLst>
+              <a:ext uri="{FF2B5EF4-FFF2-40B4-BE49-F238E27FC236}">
+                <a16:creationId xmlns:a16="http://schemas.microsoft.com/office/drawing/2014/main" id="{D02B7974-3FE4-4DCA-81A3-AD8180683225}"/>
+              </a:ext>
+            </a:extLst>
+          </p:cNvPr>
+          <p:cNvSpPr/>
+          <p:nvPr/>
+        </p:nvSpPr>
+        <p:spPr>
+          <a:xfrm>
+            <a:off x="4498848" y="4178813"/>
+            <a:ext cx="1307592" cy="237744"/>
+          </a:xfrm>
+          <a:prstGeom prst="rect">
+            <a:avLst/>
+          </a:prstGeom>
+          <a:noFill/>
+          <a:ln/>
+        </p:spPr>
+        <p:txBody>
+          <a:bodyPr wrap="square" lIns="0" tIns="0" rIns="0" bIns="0" rtlCol="0" anchor="ctr"/>
+          <a:lstStyle/>
+          <a:p>
+            <a:pPr marL="0" indent="0" algn="ctr">
+              <a:lnSpc>
+                <a:spcPct val="92000"/>
+              </a:lnSpc>
+              <a:buNone/>
+            </a:pPr>
+            <a:r>
+              <a:rPr lang="en-US" sz="800" b="1" dirty="0">
+                <a:solidFill>
+                  <a:srgbClr val="B3261E"/>
+                </a:solidFill>
+                <a:latin typeface="Calibri" pitchFamily="34" charset="0"/>
+                <a:ea typeface="Calibri" pitchFamily="34" charset="-122"/>
+                <a:cs typeface="Calibri" pitchFamily="34" charset="-120"/>
+              </a:rPr>
+              <a:t>FAIL → Re-inspection ↺</a:t>
+            </a:r>
+            <a:endParaRPr lang="en-US" sz="800" dirty="0"/>
+          </a:p>
+        </p:txBody>
+      </p:sp>
+      <p:sp>
+        <p:nvSpPr>
+          <p:cNvPr id="72" name="Shape 70">
+            <a:extLst>
+              <a:ext uri="{FF2B5EF4-FFF2-40B4-BE49-F238E27FC236}">
+                <a16:creationId xmlns:a16="http://schemas.microsoft.com/office/drawing/2014/main" id="{58D735FD-EC4F-45AC-9D8C-CA375AE6DE51}"/>
+              </a:ext>
+            </a:extLst>
+          </p:cNvPr>
+          <p:cNvSpPr/>
+          <p:nvPr/>
+        </p:nvSpPr>
+        <p:spPr>
+          <a:xfrm>
+            <a:off x="5312664" y="4123949"/>
+            <a:ext cx="0" cy="54864"/>
+          </a:xfrm>
+          <a:prstGeom prst="line">
+            <a:avLst/>
+          </a:prstGeom>
+          <a:noFill/>
+          <a:ln w="13970">
+            <a:solidFill>
+              <a:srgbClr val="B3261E"/>
+            </a:solidFill>
+            <a:prstDash val="solid"/>
+            <a:tailEnd type="triangle"/>
+          </a:ln>
+        </p:spPr>
+      </p:sp>
+      <p:sp>
+        <p:nvSpPr>
+          <p:cNvPr id="232" name="Shape 71">
+            <a:extLst>
+              <a:ext uri="{FF2B5EF4-FFF2-40B4-BE49-F238E27FC236}">
+                <a16:creationId xmlns:a16="http://schemas.microsoft.com/office/drawing/2014/main" id="{983AFC31-F6D5-43FD-A6E9-D6DB78FE5DED}"/>
+              </a:ext>
+            </a:extLst>
+          </p:cNvPr>
+          <p:cNvSpPr/>
+          <p:nvPr/>
+        </p:nvSpPr>
+        <p:spPr>
+          <a:xfrm>
+            <a:off x="6144768" y="2662995"/>
+            <a:ext cx="3063240" cy="198507"/>
+          </a:xfrm>
+          <a:prstGeom prst="roundRect">
+            <a:avLst>
+              <a:gd name="adj" fmla="val 22727"/>
+            </a:avLst>
+          </a:prstGeom>
+          <a:solidFill>
+            <a:srgbClr val="0B3D62"/>
+          </a:solidFill>
+          <a:ln/>
+        </p:spPr>
+      </p:sp>
+      <p:sp>
+        <p:nvSpPr>
+          <p:cNvPr id="233" name="Text 72">
+            <a:extLst>
+              <a:ext uri="{FF2B5EF4-FFF2-40B4-BE49-F238E27FC236}">
+                <a16:creationId xmlns:a16="http://schemas.microsoft.com/office/drawing/2014/main" id="{120CEEC7-AE53-4912-B351-60035A72B781}"/>
+              </a:ext>
+            </a:extLst>
+          </p:cNvPr>
+          <p:cNvSpPr/>
+          <p:nvPr/>
+        </p:nvSpPr>
+        <p:spPr>
+          <a:xfrm>
+            <a:off x="6144768" y="2618123"/>
+            <a:ext cx="3063240" cy="261668"/>
+          </a:xfrm>
+          <a:prstGeom prst="rect">
+            <a:avLst/>
+          </a:prstGeom>
+          <a:noFill/>
+          <a:ln/>
+        </p:spPr>
+        <p:txBody>
+          <a:bodyPr wrap="square" lIns="0" tIns="0" rIns="0" bIns="0" rtlCol="0" anchor="ctr"/>
+          <a:lstStyle/>
+          <a:p>
+            <a:pPr marL="0" indent="0" algn="ctr">
+              <a:buNone/>
+            </a:pPr>
+            <a:r>
+              <a:rPr lang="en-US" sz="1400" b="1" dirty="0">
+                <a:solidFill>
+                  <a:srgbClr val="FFFFFF"/>
+                </a:solidFill>
+                <a:latin typeface="Calibri" pitchFamily="34" charset="0"/>
+                <a:ea typeface="Calibri" pitchFamily="34" charset="-122"/>
+                <a:cs typeface="Calibri" pitchFamily="34" charset="-120"/>
+              </a:rPr>
+              <a:t>CERTIFICATE TRUST &amp; SECURITY FLOW</a:t>
+            </a:r>
+            <a:endParaRPr lang="en-US" sz="1400" dirty="0"/>
+          </a:p>
+        </p:txBody>
+      </p:sp>
+      <p:sp>
+        <p:nvSpPr>
+          <p:cNvPr id="234" name="Shape 74">
+            <a:extLst>
+              <a:ext uri="{FF2B5EF4-FFF2-40B4-BE49-F238E27FC236}">
+                <a16:creationId xmlns:a16="http://schemas.microsoft.com/office/drawing/2014/main" id="{98AD97E3-2D99-416A-A759-68AC80461839}"/>
+              </a:ext>
+            </a:extLst>
+          </p:cNvPr>
+          <p:cNvSpPr/>
+          <p:nvPr/>
+        </p:nvSpPr>
+        <p:spPr>
+          <a:xfrm>
+            <a:off x="6281928" y="2994841"/>
+            <a:ext cx="1024128" cy="397014"/>
+          </a:xfrm>
+          <a:prstGeom prst="roundRect">
+            <a:avLst>
+              <a:gd name="adj" fmla="val 7955"/>
+            </a:avLst>
+          </a:prstGeom>
+          <a:solidFill>
+            <a:srgbClr val="FFFFFF"/>
+          </a:solidFill>
+          <a:ln w="9525">
+            <a:solidFill>
+              <a:srgbClr val="0B3D62"/>
+            </a:solidFill>
+            <a:prstDash val="solid"/>
+          </a:ln>
+        </p:spPr>
+      </p:sp>
+      <p:sp>
+        <p:nvSpPr>
+          <p:cNvPr id="235" name="Text 75">
+            <a:extLst>
+              <a:ext uri="{FF2B5EF4-FFF2-40B4-BE49-F238E27FC236}">
+                <a16:creationId xmlns:a16="http://schemas.microsoft.com/office/drawing/2014/main" id="{A081CF49-C0AF-43AA-99E1-2608293AD512}"/>
+              </a:ext>
+            </a:extLst>
+          </p:cNvPr>
+          <p:cNvSpPr/>
+          <p:nvPr/>
+        </p:nvSpPr>
+        <p:spPr>
+          <a:xfrm>
+            <a:off x="6300216" y="2994841"/>
+            <a:ext cx="987552" cy="397014"/>
+          </a:xfrm>
+          <a:prstGeom prst="rect">
+            <a:avLst/>
+          </a:prstGeom>
+          <a:noFill/>
+          <a:ln/>
+        </p:spPr>
+        <p:txBody>
+          <a:bodyPr wrap="square" lIns="0" tIns="0" rIns="0" bIns="0" rtlCol="0" anchor="ctr"/>
+          <a:lstStyle/>
+          <a:p>
+            <a:pPr marL="0" indent="0" algn="ctr">
+              <a:lnSpc>
+                <a:spcPct val="92000"/>
+              </a:lnSpc>
+              <a:buNone/>
+            </a:pPr>
+            <a:r>
+              <a:rPr lang="en-US" sz="900" b="1" dirty="0">
+                <a:solidFill>
+                  <a:srgbClr val="1F2937"/>
+                </a:solidFill>
+                <a:latin typeface="Calibri" pitchFamily="34" charset="0"/>
+                <a:ea typeface="Calibri" pitchFamily="34" charset="-122"/>
+                <a:cs typeface="Calibri" pitchFamily="34" charset="-120"/>
+              </a:rPr>
+              <a:t>Inspection</a:t>
+            </a:r>
+            <a:endParaRPr lang="en-US" sz="900" dirty="0"/>
+          </a:p>
+          <a:p>
+            <a:pPr marL="0" indent="0" algn="ctr">
+              <a:lnSpc>
+                <a:spcPct val="92000"/>
+              </a:lnSpc>
+              <a:buNone/>
+            </a:pPr>
+            <a:r>
+              <a:rPr lang="en-US" sz="900" b="1" dirty="0">
+                <a:solidFill>
+                  <a:srgbClr val="1F2937"/>
+                </a:solidFill>
+                <a:latin typeface="Calibri" pitchFamily="34" charset="0"/>
+                <a:ea typeface="Calibri" pitchFamily="34" charset="-122"/>
+                <a:cs typeface="Calibri" pitchFamily="34" charset="-120"/>
+              </a:rPr>
+              <a:t>Approved</a:t>
+            </a:r>
+            <a:endParaRPr lang="en-US" sz="900" dirty="0"/>
+          </a:p>
+        </p:txBody>
+      </p:sp>
+      <p:sp>
+        <p:nvSpPr>
+          <p:cNvPr id="236" name="Text 76">
+            <a:extLst>
+              <a:ext uri="{FF2B5EF4-FFF2-40B4-BE49-F238E27FC236}">
+                <a16:creationId xmlns:a16="http://schemas.microsoft.com/office/drawing/2014/main" id="{2F53DBF1-13AA-4A80-BC43-462CC8F0E3D9}"/>
+              </a:ext>
+            </a:extLst>
+          </p:cNvPr>
+          <p:cNvSpPr/>
+          <p:nvPr/>
+        </p:nvSpPr>
+        <p:spPr>
+          <a:xfrm>
+            <a:off x="7306056" y="2994841"/>
+            <a:ext cx="73152" cy="397014"/>
+          </a:xfrm>
+          <a:prstGeom prst="rect">
+            <a:avLst/>
+          </a:prstGeom>
+          <a:noFill/>
+          <a:ln/>
+        </p:spPr>
+        <p:txBody>
+          <a:bodyPr wrap="square" lIns="0" tIns="0" rIns="0" bIns="0" rtlCol="0" anchor="ctr"/>
+          <a:lstStyle/>
+          <a:p>
+            <a:pPr marL="0" indent="0" algn="ctr">
+              <a:buNone/>
+            </a:pPr>
+            <a:r>
+              <a:rPr lang="en-US" sz="1100" b="1" dirty="0">
+                <a:solidFill>
+                  <a:srgbClr val="0E7C86"/>
+                </a:solidFill>
+                <a:latin typeface="Calibri" pitchFamily="34" charset="0"/>
+                <a:ea typeface="Calibri" pitchFamily="34" charset="-122"/>
+                <a:cs typeface="Calibri" pitchFamily="34" charset="-120"/>
+              </a:rPr>
+              <a:t>›</a:t>
+            </a:r>
+            <a:endParaRPr lang="en-US" sz="1100" dirty="0"/>
+          </a:p>
+        </p:txBody>
+      </p:sp>
+      <p:sp>
+        <p:nvSpPr>
+          <p:cNvPr id="237" name="Shape 77">
+            <a:extLst>
+              <a:ext uri="{FF2B5EF4-FFF2-40B4-BE49-F238E27FC236}">
+                <a16:creationId xmlns:a16="http://schemas.microsoft.com/office/drawing/2014/main" id="{B340EA58-25B3-4810-9894-2FE2A72347F9}"/>
+              </a:ext>
+            </a:extLst>
+          </p:cNvPr>
+          <p:cNvSpPr/>
+          <p:nvPr/>
+        </p:nvSpPr>
+        <p:spPr>
+          <a:xfrm>
+            <a:off x="7379208" y="2994841"/>
+            <a:ext cx="1024128" cy="397014"/>
+          </a:xfrm>
+          <a:prstGeom prst="roundRect">
+            <a:avLst>
+              <a:gd name="adj" fmla="val 7955"/>
+            </a:avLst>
+          </a:prstGeom>
+          <a:solidFill>
+            <a:srgbClr val="FFFFFF"/>
+          </a:solidFill>
+          <a:ln w="9525">
+            <a:solidFill>
+              <a:srgbClr val="0B3D62"/>
+            </a:solidFill>
+            <a:prstDash val="solid"/>
+          </a:ln>
+        </p:spPr>
+      </p:sp>
+      <p:sp>
+        <p:nvSpPr>
+          <p:cNvPr id="238" name="Text 78">
+            <a:extLst>
+              <a:ext uri="{FF2B5EF4-FFF2-40B4-BE49-F238E27FC236}">
+                <a16:creationId xmlns:a16="http://schemas.microsoft.com/office/drawing/2014/main" id="{AC580CE5-E3C9-4E37-A2FD-CA881FA0E10F}"/>
+              </a:ext>
+            </a:extLst>
+          </p:cNvPr>
+          <p:cNvSpPr/>
+          <p:nvPr/>
+        </p:nvSpPr>
+        <p:spPr>
+          <a:xfrm>
+            <a:off x="7397496" y="2994841"/>
+            <a:ext cx="987552" cy="397014"/>
+          </a:xfrm>
+          <a:prstGeom prst="rect">
+            <a:avLst/>
+          </a:prstGeom>
+          <a:noFill/>
+          <a:ln/>
+        </p:spPr>
+        <p:txBody>
+          <a:bodyPr wrap="square" lIns="0" tIns="0" rIns="0" bIns="0" rtlCol="0" anchor="ctr"/>
+          <a:lstStyle/>
+          <a:p>
+            <a:pPr marL="0" indent="0" algn="ctr">
+              <a:lnSpc>
+                <a:spcPct val="92000"/>
+              </a:lnSpc>
+              <a:buNone/>
+            </a:pPr>
+            <a:r>
+              <a:rPr lang="en-US" sz="900" b="1" dirty="0">
+                <a:solidFill>
+                  <a:srgbClr val="1F2937"/>
+                </a:solidFill>
+                <a:latin typeface="Calibri" pitchFamily="34" charset="0"/>
+                <a:ea typeface="Calibri" pitchFamily="34" charset="-122"/>
+                <a:cs typeface="Calibri" pitchFamily="34" charset="-120"/>
+              </a:rPr>
+              <a:t>Certificate</a:t>
+            </a:r>
+            <a:endParaRPr lang="en-US" sz="900" dirty="0"/>
+          </a:p>
+          <a:p>
+            <a:pPr marL="0" indent="0" algn="ctr">
+              <a:lnSpc>
+                <a:spcPct val="92000"/>
+              </a:lnSpc>
+              <a:buNone/>
+            </a:pPr>
+            <a:r>
+              <a:rPr lang="en-US" sz="900" b="1" dirty="0">
+                <a:solidFill>
+                  <a:srgbClr val="1F2937"/>
+                </a:solidFill>
+                <a:latin typeface="Calibri" pitchFamily="34" charset="0"/>
+                <a:ea typeface="Calibri" pitchFamily="34" charset="-122"/>
+                <a:cs typeface="Calibri" pitchFamily="34" charset="-120"/>
+              </a:rPr>
+              <a:t>Data</a:t>
+            </a:r>
+            <a:endParaRPr lang="en-US" sz="900" dirty="0"/>
+          </a:p>
+        </p:txBody>
+      </p:sp>
+      <p:sp>
+        <p:nvSpPr>
+          <p:cNvPr id="239" name="Text 79">
+            <a:extLst>
+              <a:ext uri="{FF2B5EF4-FFF2-40B4-BE49-F238E27FC236}">
+                <a16:creationId xmlns:a16="http://schemas.microsoft.com/office/drawing/2014/main" id="{8AE536FF-5625-4FEC-93D6-CC8BE583BDD9}"/>
+              </a:ext>
+            </a:extLst>
+          </p:cNvPr>
+          <p:cNvSpPr/>
+          <p:nvPr/>
+        </p:nvSpPr>
+        <p:spPr>
+          <a:xfrm>
+            <a:off x="8403336" y="2994841"/>
+            <a:ext cx="73152" cy="397014"/>
+          </a:xfrm>
+          <a:prstGeom prst="rect">
+            <a:avLst/>
+          </a:prstGeom>
+          <a:noFill/>
+          <a:ln/>
+        </p:spPr>
+        <p:txBody>
+          <a:bodyPr wrap="square" lIns="0" tIns="0" rIns="0" bIns="0" rtlCol="0" anchor="ctr"/>
+          <a:lstStyle/>
+          <a:p>
+            <a:pPr marL="0" indent="0" algn="ctr">
+              <a:buNone/>
+            </a:pPr>
+            <a:r>
+              <a:rPr lang="en-US" sz="1100" b="1" dirty="0">
+                <a:solidFill>
+                  <a:srgbClr val="0E7C86"/>
+                </a:solidFill>
+                <a:latin typeface="Calibri" pitchFamily="34" charset="0"/>
+                <a:ea typeface="Calibri" pitchFamily="34" charset="-122"/>
+                <a:cs typeface="Calibri" pitchFamily="34" charset="-120"/>
+              </a:rPr>
+              <a:t>›</a:t>
+            </a:r>
+            <a:endParaRPr lang="en-US" sz="1100" dirty="0"/>
+          </a:p>
+        </p:txBody>
+      </p:sp>
+      <p:sp>
+        <p:nvSpPr>
+          <p:cNvPr id="240" name="Shape 80">
+            <a:extLst>
+              <a:ext uri="{FF2B5EF4-FFF2-40B4-BE49-F238E27FC236}">
+                <a16:creationId xmlns:a16="http://schemas.microsoft.com/office/drawing/2014/main" id="{A85F42EC-2A4D-42BC-A5D8-8B2C5E3B895B}"/>
+              </a:ext>
+            </a:extLst>
+          </p:cNvPr>
+          <p:cNvSpPr/>
+          <p:nvPr/>
+        </p:nvSpPr>
+        <p:spPr>
+          <a:xfrm>
+            <a:off x="8476488" y="2994841"/>
+            <a:ext cx="1024128" cy="397014"/>
+          </a:xfrm>
+          <a:prstGeom prst="roundRect">
+            <a:avLst>
+              <a:gd name="adj" fmla="val 7955"/>
+            </a:avLst>
+          </a:prstGeom>
+          <a:solidFill>
+            <a:srgbClr val="FFFFFF"/>
+          </a:solidFill>
+          <a:ln w="9525">
+            <a:solidFill>
+              <a:srgbClr val="0B3D62"/>
+            </a:solidFill>
+            <a:prstDash val="solid"/>
+          </a:ln>
+        </p:spPr>
+      </p:sp>
+      <p:sp>
+        <p:nvSpPr>
+          <p:cNvPr id="241" name="Text 81">
+            <a:extLst>
+              <a:ext uri="{FF2B5EF4-FFF2-40B4-BE49-F238E27FC236}">
+                <a16:creationId xmlns:a16="http://schemas.microsoft.com/office/drawing/2014/main" id="{5AAB0EA4-1D87-4470-A625-CB57FB0CE033}"/>
+              </a:ext>
+            </a:extLst>
+          </p:cNvPr>
+          <p:cNvSpPr/>
+          <p:nvPr/>
+        </p:nvSpPr>
+        <p:spPr>
+          <a:xfrm>
+            <a:off x="8494776" y="2994841"/>
+            <a:ext cx="987552" cy="397014"/>
+          </a:xfrm>
+          <a:prstGeom prst="rect">
+            <a:avLst/>
+          </a:prstGeom>
+          <a:noFill/>
+          <a:ln/>
+        </p:spPr>
+        <p:txBody>
+          <a:bodyPr wrap="square" lIns="0" tIns="0" rIns="0" bIns="0" rtlCol="0" anchor="ctr"/>
+          <a:lstStyle/>
+          <a:p>
+            <a:pPr marL="0" indent="0" algn="ctr">
+              <a:lnSpc>
+                <a:spcPct val="92000"/>
+              </a:lnSpc>
+              <a:buNone/>
+            </a:pPr>
+            <a:r>
+              <a:rPr lang="en-US" sz="900" b="1" dirty="0">
+                <a:solidFill>
+                  <a:srgbClr val="1F2937"/>
+                </a:solidFill>
+                <a:latin typeface="Calibri" pitchFamily="34" charset="0"/>
+                <a:ea typeface="Calibri" pitchFamily="34" charset="-122"/>
+                <a:cs typeface="Calibri" pitchFamily="34" charset="-120"/>
+              </a:rPr>
+              <a:t>SHA-256</a:t>
+            </a:r>
+            <a:endParaRPr lang="en-US" sz="900" dirty="0"/>
+          </a:p>
+          <a:p>
+            <a:pPr marL="0" indent="0" algn="ctr">
+              <a:lnSpc>
+                <a:spcPct val="92000"/>
+              </a:lnSpc>
+              <a:buNone/>
+            </a:pPr>
+            <a:r>
+              <a:rPr lang="en-US" sz="900" b="1" dirty="0">
+                <a:solidFill>
+                  <a:srgbClr val="1F2937"/>
+                </a:solidFill>
+                <a:latin typeface="Calibri" pitchFamily="34" charset="0"/>
+                <a:ea typeface="Calibri" pitchFamily="34" charset="-122"/>
+                <a:cs typeface="Calibri" pitchFamily="34" charset="-120"/>
+              </a:rPr>
+              <a:t>Hash</a:t>
+            </a:r>
+            <a:endParaRPr lang="en-US" sz="900" dirty="0"/>
+          </a:p>
+        </p:txBody>
+      </p:sp>
+      <p:sp>
+        <p:nvSpPr>
+          <p:cNvPr id="242" name="Text 82">
+            <a:extLst>
+              <a:ext uri="{FF2B5EF4-FFF2-40B4-BE49-F238E27FC236}">
+                <a16:creationId xmlns:a16="http://schemas.microsoft.com/office/drawing/2014/main" id="{95760104-771A-4770-8B13-D82E8E4610B7}"/>
+              </a:ext>
+            </a:extLst>
+          </p:cNvPr>
+          <p:cNvSpPr/>
+          <p:nvPr/>
+        </p:nvSpPr>
+        <p:spPr>
+          <a:xfrm>
+            <a:off x="9500616" y="2994841"/>
+            <a:ext cx="73152" cy="397014"/>
+          </a:xfrm>
+          <a:prstGeom prst="rect">
+            <a:avLst/>
+          </a:prstGeom>
+          <a:noFill/>
+          <a:ln/>
+        </p:spPr>
+        <p:txBody>
+          <a:bodyPr wrap="square" lIns="0" tIns="0" rIns="0" bIns="0" rtlCol="0" anchor="ctr"/>
+          <a:lstStyle/>
+          <a:p>
+            <a:pPr marL="0" indent="0" algn="ctr">
+              <a:buNone/>
+            </a:pPr>
+            <a:r>
+              <a:rPr lang="en-US" sz="1100" b="1" dirty="0">
+                <a:solidFill>
+                  <a:srgbClr val="0E7C86"/>
+                </a:solidFill>
+                <a:latin typeface="Calibri" pitchFamily="34" charset="0"/>
+                <a:ea typeface="Calibri" pitchFamily="34" charset="-122"/>
+                <a:cs typeface="Calibri" pitchFamily="34" charset="-120"/>
+              </a:rPr>
+              <a:t>›</a:t>
+            </a:r>
+            <a:endParaRPr lang="en-US" sz="1100" dirty="0"/>
+          </a:p>
+        </p:txBody>
+      </p:sp>
+      <p:sp>
+        <p:nvSpPr>
+          <p:cNvPr id="243" name="Shape 83">
+            <a:extLst>
+              <a:ext uri="{FF2B5EF4-FFF2-40B4-BE49-F238E27FC236}">
+                <a16:creationId xmlns:a16="http://schemas.microsoft.com/office/drawing/2014/main" id="{0A64C1BD-E846-47F7-9D05-07AAB73E552E}"/>
+              </a:ext>
+            </a:extLst>
+          </p:cNvPr>
+          <p:cNvSpPr/>
+          <p:nvPr/>
+        </p:nvSpPr>
+        <p:spPr>
+          <a:xfrm>
+            <a:off x="9573768" y="2994841"/>
+            <a:ext cx="1024128" cy="397014"/>
+          </a:xfrm>
+          <a:prstGeom prst="roundRect">
+            <a:avLst>
+              <a:gd name="adj" fmla="val 7955"/>
+            </a:avLst>
+          </a:prstGeom>
+          <a:solidFill>
+            <a:srgbClr val="FFFFFF"/>
+          </a:solidFill>
+          <a:ln w="9525">
+            <a:solidFill>
+              <a:srgbClr val="0B3D62"/>
+            </a:solidFill>
+            <a:prstDash val="solid"/>
+          </a:ln>
+        </p:spPr>
+      </p:sp>
+      <p:sp>
+        <p:nvSpPr>
+          <p:cNvPr id="244" name="Text 84">
+            <a:extLst>
+              <a:ext uri="{FF2B5EF4-FFF2-40B4-BE49-F238E27FC236}">
+                <a16:creationId xmlns:a16="http://schemas.microsoft.com/office/drawing/2014/main" id="{4754726B-A0C8-4325-B68A-BD36BC5429B2}"/>
+              </a:ext>
+            </a:extLst>
+          </p:cNvPr>
+          <p:cNvSpPr/>
+          <p:nvPr/>
+        </p:nvSpPr>
+        <p:spPr>
+          <a:xfrm>
+            <a:off x="9592056" y="2994841"/>
+            <a:ext cx="987552" cy="397014"/>
+          </a:xfrm>
+          <a:prstGeom prst="rect">
+            <a:avLst/>
+          </a:prstGeom>
+          <a:noFill/>
+          <a:ln/>
+        </p:spPr>
+        <p:txBody>
+          <a:bodyPr wrap="square" lIns="0" tIns="0" rIns="0" bIns="0" rtlCol="0" anchor="ctr"/>
+          <a:lstStyle/>
+          <a:p>
+            <a:pPr marL="0" indent="0" algn="ctr">
+              <a:lnSpc>
+                <a:spcPct val="92000"/>
+              </a:lnSpc>
+              <a:buNone/>
+            </a:pPr>
+            <a:r>
+              <a:rPr lang="en-US" sz="900" b="1" dirty="0">
+                <a:solidFill>
+                  <a:srgbClr val="1F2937"/>
+                </a:solidFill>
+                <a:latin typeface="Calibri" pitchFamily="34" charset="0"/>
+                <a:ea typeface="Calibri" pitchFamily="34" charset="-122"/>
+                <a:cs typeface="Calibri" pitchFamily="34" charset="-120"/>
+              </a:rPr>
+              <a:t>Digital</a:t>
+            </a:r>
+            <a:endParaRPr lang="en-US" sz="900" dirty="0"/>
+          </a:p>
+          <a:p>
+            <a:pPr marL="0" indent="0" algn="ctr">
+              <a:lnSpc>
+                <a:spcPct val="92000"/>
+              </a:lnSpc>
+              <a:buNone/>
+            </a:pPr>
+            <a:r>
+              <a:rPr lang="en-US" sz="900" b="1" dirty="0">
+                <a:solidFill>
+                  <a:srgbClr val="1F2937"/>
+                </a:solidFill>
+                <a:latin typeface="Calibri" pitchFamily="34" charset="0"/>
+                <a:ea typeface="Calibri" pitchFamily="34" charset="-122"/>
+                <a:cs typeface="Calibri" pitchFamily="34" charset="-120"/>
+              </a:rPr>
+              <a:t>Signature</a:t>
+            </a:r>
+            <a:endParaRPr lang="en-US" sz="900" dirty="0"/>
+          </a:p>
+        </p:txBody>
+      </p:sp>
+      <p:sp>
+        <p:nvSpPr>
+          <p:cNvPr id="245" name="Text 85">
+            <a:extLst>
+              <a:ext uri="{FF2B5EF4-FFF2-40B4-BE49-F238E27FC236}">
+                <a16:creationId xmlns:a16="http://schemas.microsoft.com/office/drawing/2014/main" id="{2DD1BE10-5C77-4332-8895-499DE15D7828}"/>
+              </a:ext>
+            </a:extLst>
+          </p:cNvPr>
+          <p:cNvSpPr/>
+          <p:nvPr/>
+        </p:nvSpPr>
+        <p:spPr>
+          <a:xfrm>
+            <a:off x="10597896" y="2994841"/>
+            <a:ext cx="73152" cy="397014"/>
+          </a:xfrm>
+          <a:prstGeom prst="rect">
+            <a:avLst/>
+          </a:prstGeom>
+          <a:noFill/>
+          <a:ln/>
+        </p:spPr>
+        <p:txBody>
+          <a:bodyPr wrap="square" lIns="0" tIns="0" rIns="0" bIns="0" rtlCol="0" anchor="ctr"/>
+          <a:lstStyle/>
+          <a:p>
+            <a:pPr marL="0" indent="0" algn="ctr">
+              <a:buNone/>
+            </a:pPr>
+            <a:r>
+              <a:rPr lang="en-US" sz="1100" b="1" dirty="0">
+                <a:solidFill>
+                  <a:srgbClr val="0E7C86"/>
+                </a:solidFill>
+                <a:latin typeface="Calibri" pitchFamily="34" charset="0"/>
+                <a:ea typeface="Calibri" pitchFamily="34" charset="-122"/>
+                <a:cs typeface="Calibri" pitchFamily="34" charset="-120"/>
+              </a:rPr>
+              <a:t>›</a:t>
+            </a:r>
+            <a:endParaRPr lang="en-US" sz="1100" dirty="0"/>
+          </a:p>
+        </p:txBody>
+      </p:sp>
+      <p:sp>
+        <p:nvSpPr>
+          <p:cNvPr id="246" name="Shape 86">
+            <a:extLst>
+              <a:ext uri="{FF2B5EF4-FFF2-40B4-BE49-F238E27FC236}">
+                <a16:creationId xmlns:a16="http://schemas.microsoft.com/office/drawing/2014/main" id="{9B60B1A3-6E83-4720-A17C-B7000B8D1F7F}"/>
+              </a:ext>
+            </a:extLst>
+          </p:cNvPr>
+          <p:cNvSpPr/>
+          <p:nvPr/>
+        </p:nvSpPr>
+        <p:spPr>
+          <a:xfrm>
+            <a:off x="10671048" y="2980554"/>
+            <a:ext cx="1024128" cy="397014"/>
+          </a:xfrm>
+          <a:prstGeom prst="roundRect">
+            <a:avLst>
+              <a:gd name="adj" fmla="val 7955"/>
+            </a:avLst>
+          </a:prstGeom>
+          <a:solidFill>
+            <a:srgbClr val="FFFFFF"/>
+          </a:solidFill>
+          <a:ln w="9525">
+            <a:solidFill>
+              <a:srgbClr val="0B3D62"/>
+            </a:solidFill>
+            <a:prstDash val="solid"/>
+          </a:ln>
+        </p:spPr>
+      </p:sp>
+      <p:sp>
+        <p:nvSpPr>
+          <p:cNvPr id="247" name="Text 87">
+            <a:extLst>
+              <a:ext uri="{FF2B5EF4-FFF2-40B4-BE49-F238E27FC236}">
+                <a16:creationId xmlns:a16="http://schemas.microsoft.com/office/drawing/2014/main" id="{467A8CA4-DAEB-4781-B0A8-22D1E452F757}"/>
+              </a:ext>
+            </a:extLst>
+          </p:cNvPr>
+          <p:cNvSpPr/>
+          <p:nvPr/>
+        </p:nvSpPr>
+        <p:spPr>
+          <a:xfrm>
+            <a:off x="10706100" y="2994842"/>
+            <a:ext cx="970788" cy="343674"/>
+          </a:xfrm>
+          <a:prstGeom prst="rect">
+            <a:avLst/>
+          </a:prstGeom>
+          <a:noFill/>
+          <a:ln/>
+        </p:spPr>
+        <p:txBody>
+          <a:bodyPr wrap="square" lIns="0" tIns="0" rIns="0" bIns="0" rtlCol="0" anchor="ctr"/>
+          <a:lstStyle/>
+          <a:p>
+            <a:pPr marL="0" indent="0" algn="ctr">
+              <a:lnSpc>
+                <a:spcPct val="92000"/>
+              </a:lnSpc>
+              <a:buNone/>
+            </a:pPr>
+            <a:r>
+              <a:rPr lang="en-US" sz="900" b="1" dirty="0">
+                <a:solidFill>
+                  <a:srgbClr val="1F2937"/>
+                </a:solidFill>
+                <a:latin typeface="Calibri" pitchFamily="34" charset="0"/>
+                <a:ea typeface="Calibri" pitchFamily="34" charset="-122"/>
+                <a:cs typeface="Calibri" pitchFamily="34" charset="-120"/>
+              </a:rPr>
+              <a:t>Signed</a:t>
+            </a:r>
+            <a:endParaRPr lang="en-US" sz="900" dirty="0"/>
+          </a:p>
+          <a:p>
+            <a:pPr marL="0" indent="0" algn="ctr">
+              <a:lnSpc>
+                <a:spcPct val="92000"/>
+              </a:lnSpc>
+              <a:buNone/>
+            </a:pPr>
+            <a:r>
+              <a:rPr lang="en-US" sz="900" b="1" dirty="0">
+                <a:solidFill>
+                  <a:srgbClr val="1F2937"/>
+                </a:solidFill>
+                <a:latin typeface="Calibri" pitchFamily="34" charset="0"/>
+                <a:ea typeface="Calibri" pitchFamily="34" charset="-122"/>
+                <a:cs typeface="Calibri" pitchFamily="34" charset="-120"/>
+              </a:rPr>
+              <a:t>Certificate</a:t>
+            </a:r>
+            <a:endParaRPr lang="en-US" sz="900" dirty="0"/>
+          </a:p>
+        </p:txBody>
+      </p:sp>
+      <p:sp>
+        <p:nvSpPr>
+          <p:cNvPr id="248" name="Shape 88">
+            <a:extLst>
+              <a:ext uri="{FF2B5EF4-FFF2-40B4-BE49-F238E27FC236}">
+                <a16:creationId xmlns:a16="http://schemas.microsoft.com/office/drawing/2014/main" id="{1F2CAD84-4590-4691-8FC6-CDF6F4D92BDC}"/>
+              </a:ext>
+            </a:extLst>
+          </p:cNvPr>
+          <p:cNvSpPr/>
+          <p:nvPr/>
+        </p:nvSpPr>
+        <p:spPr>
+          <a:xfrm>
+            <a:off x="11183112" y="3394273"/>
+            <a:ext cx="0" cy="180461"/>
+          </a:xfrm>
+          <a:prstGeom prst="line">
+            <a:avLst/>
+          </a:prstGeom>
+          <a:noFill/>
+          <a:ln w="15875">
+            <a:solidFill>
+              <a:srgbClr val="0B3D62"/>
+            </a:solidFill>
+            <a:prstDash val="solid"/>
+            <a:tailEnd type="triangle"/>
+          </a:ln>
+        </p:spPr>
+      </p:sp>
+      <p:sp>
+        <p:nvSpPr>
+          <p:cNvPr id="249" name="Shape 89">
+            <a:extLst>
+              <a:ext uri="{FF2B5EF4-FFF2-40B4-BE49-F238E27FC236}">
+                <a16:creationId xmlns:a16="http://schemas.microsoft.com/office/drawing/2014/main" id="{9ECA5423-197D-4E7F-90E4-20184FCDE0DB}"/>
+              </a:ext>
+            </a:extLst>
+          </p:cNvPr>
+          <p:cNvSpPr/>
+          <p:nvPr/>
+        </p:nvSpPr>
+        <p:spPr>
+          <a:xfrm>
+            <a:off x="10671048" y="3594104"/>
+            <a:ext cx="1024128" cy="378968"/>
+          </a:xfrm>
+          <a:prstGeom prst="roundRect">
+            <a:avLst>
+              <a:gd name="adj" fmla="val 8333"/>
+            </a:avLst>
+          </a:prstGeom>
+          <a:solidFill>
+            <a:srgbClr val="FFFFFF"/>
+          </a:solidFill>
+          <a:ln w="9525">
+            <a:solidFill>
+              <a:srgbClr val="0B3D62"/>
+            </a:solidFill>
+            <a:prstDash val="solid"/>
+          </a:ln>
+        </p:spPr>
+      </p:sp>
+      <p:sp>
+        <p:nvSpPr>
+          <p:cNvPr id="250" name="Text 90">
+            <a:extLst>
+              <a:ext uri="{FF2B5EF4-FFF2-40B4-BE49-F238E27FC236}">
+                <a16:creationId xmlns:a16="http://schemas.microsoft.com/office/drawing/2014/main" id="{97632B6B-C655-46DB-91BE-FBAD72B93B1D}"/>
+              </a:ext>
+            </a:extLst>
+          </p:cNvPr>
+          <p:cNvSpPr/>
+          <p:nvPr/>
+        </p:nvSpPr>
+        <p:spPr>
+          <a:xfrm>
+            <a:off x="10689336" y="3594104"/>
+            <a:ext cx="987552" cy="378968"/>
+          </a:xfrm>
+          <a:prstGeom prst="rect">
+            <a:avLst/>
+          </a:prstGeom>
+          <a:noFill/>
+          <a:ln/>
+        </p:spPr>
+        <p:txBody>
+          <a:bodyPr wrap="square" lIns="0" tIns="0" rIns="0" bIns="0" rtlCol="0" anchor="ctr"/>
+          <a:lstStyle/>
+          <a:p>
+            <a:pPr marL="0" indent="0" algn="ctr">
+              <a:lnSpc>
+                <a:spcPct val="92000"/>
+              </a:lnSpc>
+              <a:buNone/>
+            </a:pPr>
+            <a:r>
+              <a:rPr lang="en-US" sz="900" b="1" dirty="0">
+                <a:solidFill>
+                  <a:srgbClr val="1F2937"/>
+                </a:solidFill>
+                <a:latin typeface="Calibri" pitchFamily="34" charset="0"/>
+                <a:ea typeface="Calibri" pitchFamily="34" charset="-122"/>
+                <a:cs typeface="Calibri" pitchFamily="34" charset="-120"/>
+              </a:rPr>
+              <a:t>QR Code</a:t>
+            </a:r>
+            <a:endParaRPr lang="en-US" sz="900" dirty="0"/>
+          </a:p>
+        </p:txBody>
+      </p:sp>
+      <p:sp>
+        <p:nvSpPr>
+          <p:cNvPr id="251" name="Shape 91">
+            <a:extLst>
+              <a:ext uri="{FF2B5EF4-FFF2-40B4-BE49-F238E27FC236}">
+                <a16:creationId xmlns:a16="http://schemas.microsoft.com/office/drawing/2014/main" id="{351533FF-AD69-47BB-B818-709B2C55E4E5}"/>
+              </a:ext>
+            </a:extLst>
+          </p:cNvPr>
+          <p:cNvSpPr/>
+          <p:nvPr/>
+        </p:nvSpPr>
+        <p:spPr>
+          <a:xfrm>
+            <a:off x="9573768" y="3579815"/>
+            <a:ext cx="1024128" cy="378968"/>
+          </a:xfrm>
+          <a:prstGeom prst="roundRect">
+            <a:avLst>
+              <a:gd name="adj" fmla="val 8333"/>
+            </a:avLst>
+          </a:prstGeom>
+          <a:solidFill>
+            <a:srgbClr val="FFFFFF"/>
+          </a:solidFill>
+          <a:ln w="9525">
+            <a:solidFill>
+              <a:srgbClr val="0B3D62"/>
+            </a:solidFill>
+            <a:prstDash val="solid"/>
+          </a:ln>
+        </p:spPr>
+      </p:sp>
+      <p:sp>
+        <p:nvSpPr>
+          <p:cNvPr id="252" name="Text 92">
+            <a:extLst>
+              <a:ext uri="{FF2B5EF4-FFF2-40B4-BE49-F238E27FC236}">
+                <a16:creationId xmlns:a16="http://schemas.microsoft.com/office/drawing/2014/main" id="{0DDA507D-F859-40F8-BFD2-4541A0B3FCEE}"/>
+              </a:ext>
+            </a:extLst>
+          </p:cNvPr>
+          <p:cNvSpPr/>
+          <p:nvPr/>
+        </p:nvSpPr>
+        <p:spPr>
+          <a:xfrm>
+            <a:off x="9592056" y="3579815"/>
+            <a:ext cx="987552" cy="378968"/>
+          </a:xfrm>
+          <a:prstGeom prst="rect">
+            <a:avLst/>
+          </a:prstGeom>
+          <a:noFill/>
+          <a:ln/>
+        </p:spPr>
+        <p:txBody>
+          <a:bodyPr wrap="square" lIns="0" tIns="0" rIns="0" bIns="0" rtlCol="0" anchor="ctr"/>
+          <a:lstStyle/>
+          <a:p>
+            <a:pPr marL="0" indent="0" algn="ctr">
+              <a:lnSpc>
+                <a:spcPct val="92000"/>
+              </a:lnSpc>
+              <a:buNone/>
+            </a:pPr>
+            <a:r>
+              <a:rPr lang="en-US" sz="900" b="1" dirty="0">
+                <a:solidFill>
+                  <a:srgbClr val="1F2937"/>
+                </a:solidFill>
+                <a:latin typeface="Calibri" pitchFamily="34" charset="0"/>
+                <a:ea typeface="Calibri" pitchFamily="34" charset="-122"/>
+                <a:cs typeface="Calibri" pitchFamily="34" charset="-120"/>
+              </a:rPr>
+              <a:t>Verification</a:t>
+            </a:r>
+            <a:endParaRPr lang="en-US" sz="900" dirty="0"/>
+          </a:p>
+          <a:p>
+            <a:pPr marL="0" indent="0" algn="ctr">
+              <a:lnSpc>
+                <a:spcPct val="92000"/>
+              </a:lnSpc>
+              <a:buNone/>
+            </a:pPr>
+            <a:r>
+              <a:rPr lang="en-US" sz="900" b="1" dirty="0">
+                <a:solidFill>
+                  <a:srgbClr val="1F2937"/>
+                </a:solidFill>
+                <a:latin typeface="Calibri" pitchFamily="34" charset="0"/>
+                <a:ea typeface="Calibri" pitchFamily="34" charset="-122"/>
+                <a:cs typeface="Calibri" pitchFamily="34" charset="-120"/>
+              </a:rPr>
+              <a:t>URL</a:t>
+            </a:r>
+            <a:endParaRPr lang="en-US" sz="900" dirty="0"/>
+          </a:p>
+        </p:txBody>
+      </p:sp>
+      <p:sp>
+        <p:nvSpPr>
+          <p:cNvPr id="253" name="Shape 93">
+            <a:extLst>
+              <a:ext uri="{FF2B5EF4-FFF2-40B4-BE49-F238E27FC236}">
+                <a16:creationId xmlns:a16="http://schemas.microsoft.com/office/drawing/2014/main" id="{D186A36F-20FC-4FB3-BAD5-94BED8EFDBF9}"/>
+              </a:ext>
+            </a:extLst>
+          </p:cNvPr>
+          <p:cNvSpPr/>
+          <p:nvPr/>
+        </p:nvSpPr>
+        <p:spPr>
+          <a:xfrm>
+            <a:off x="8476488" y="3579815"/>
+            <a:ext cx="1024128" cy="378968"/>
+          </a:xfrm>
+          <a:prstGeom prst="roundRect">
+            <a:avLst>
+              <a:gd name="adj" fmla="val 8333"/>
+            </a:avLst>
+          </a:prstGeom>
+          <a:solidFill>
+            <a:srgbClr val="FFFFFF"/>
+          </a:solidFill>
+          <a:ln w="9525">
+            <a:solidFill>
+              <a:srgbClr val="0B3D62"/>
+            </a:solidFill>
+            <a:prstDash val="solid"/>
+          </a:ln>
+        </p:spPr>
+      </p:sp>
+      <p:sp>
+        <p:nvSpPr>
+          <p:cNvPr id="254" name="Text 94">
+            <a:extLst>
+              <a:ext uri="{FF2B5EF4-FFF2-40B4-BE49-F238E27FC236}">
+                <a16:creationId xmlns:a16="http://schemas.microsoft.com/office/drawing/2014/main" id="{B8A4623D-7841-4BD7-BA40-EE5348E4F380}"/>
+              </a:ext>
+            </a:extLst>
+          </p:cNvPr>
+          <p:cNvSpPr/>
+          <p:nvPr/>
+        </p:nvSpPr>
+        <p:spPr>
+          <a:xfrm>
+            <a:off x="8494776" y="3579815"/>
+            <a:ext cx="987552" cy="378968"/>
+          </a:xfrm>
+          <a:prstGeom prst="rect">
+            <a:avLst/>
+          </a:prstGeom>
+          <a:noFill/>
+          <a:ln/>
+        </p:spPr>
+        <p:txBody>
+          <a:bodyPr wrap="square" lIns="0" tIns="0" rIns="0" bIns="0" rtlCol="0" anchor="ctr"/>
+          <a:lstStyle/>
+          <a:p>
+            <a:pPr marL="0" indent="0" algn="ctr">
+              <a:lnSpc>
+                <a:spcPct val="92000"/>
+              </a:lnSpc>
+              <a:buNone/>
+            </a:pPr>
+            <a:r>
+              <a:rPr lang="en-US" sz="900" b="1" dirty="0">
+                <a:solidFill>
+                  <a:srgbClr val="1F2937"/>
+                </a:solidFill>
+                <a:latin typeface="Calibri" pitchFamily="34" charset="0"/>
+                <a:ea typeface="Calibri" pitchFamily="34" charset="-122"/>
+                <a:cs typeface="Calibri" pitchFamily="34" charset="-120"/>
+              </a:rPr>
+              <a:t>Backend</a:t>
+            </a:r>
+            <a:endParaRPr lang="en-US" sz="900" dirty="0"/>
+          </a:p>
+          <a:p>
+            <a:pPr marL="0" indent="0" algn="ctr">
+              <a:lnSpc>
+                <a:spcPct val="92000"/>
+              </a:lnSpc>
+              <a:buNone/>
+            </a:pPr>
+            <a:r>
+              <a:rPr lang="en-US" sz="900" b="1" dirty="0">
+                <a:solidFill>
+                  <a:srgbClr val="1F2937"/>
+                </a:solidFill>
+                <a:latin typeface="Calibri" pitchFamily="34" charset="0"/>
+                <a:ea typeface="Calibri" pitchFamily="34" charset="-122"/>
+                <a:cs typeface="Calibri" pitchFamily="34" charset="-120"/>
+              </a:rPr>
+              <a:t>Validation</a:t>
+            </a:r>
+            <a:endParaRPr lang="en-US" sz="900" dirty="0"/>
+          </a:p>
+        </p:txBody>
+      </p:sp>
+      <p:sp>
+        <p:nvSpPr>
+          <p:cNvPr id="255" name="Shape 95">
+            <a:extLst>
+              <a:ext uri="{FF2B5EF4-FFF2-40B4-BE49-F238E27FC236}">
+                <a16:creationId xmlns:a16="http://schemas.microsoft.com/office/drawing/2014/main" id="{009EC660-17B5-43CA-908B-DBC5CA414A30}"/>
+              </a:ext>
+            </a:extLst>
+          </p:cNvPr>
+          <p:cNvSpPr/>
+          <p:nvPr/>
+        </p:nvSpPr>
+        <p:spPr>
+          <a:xfrm>
+            <a:off x="6281928" y="3579815"/>
+            <a:ext cx="2121408" cy="378968"/>
+          </a:xfrm>
+          <a:prstGeom prst="roundRect">
+            <a:avLst>
+              <a:gd name="adj" fmla="val 8333"/>
+            </a:avLst>
+          </a:prstGeom>
+          <a:solidFill>
+            <a:srgbClr val="FFFFFF"/>
+          </a:solidFill>
+          <a:ln w="9525">
+            <a:solidFill>
+              <a:srgbClr val="0B3D62"/>
+            </a:solidFill>
+            <a:prstDash val="solid"/>
+          </a:ln>
+        </p:spPr>
+      </p:sp>
+      <p:sp>
+        <p:nvSpPr>
+          <p:cNvPr id="256" name="Text 96">
+            <a:extLst>
+              <a:ext uri="{FF2B5EF4-FFF2-40B4-BE49-F238E27FC236}">
+                <a16:creationId xmlns:a16="http://schemas.microsoft.com/office/drawing/2014/main" id="{49D3A929-04A4-40AB-8686-3339EEEB7A93}"/>
+              </a:ext>
+            </a:extLst>
+          </p:cNvPr>
+          <p:cNvSpPr/>
+          <p:nvPr/>
+        </p:nvSpPr>
+        <p:spPr>
+          <a:xfrm>
+            <a:off x="6281928" y="3585329"/>
+            <a:ext cx="2121408" cy="108277"/>
+          </a:xfrm>
+          <a:prstGeom prst="rect">
+            <a:avLst/>
+          </a:prstGeom>
+          <a:noFill/>
+          <a:ln/>
+        </p:spPr>
+        <p:txBody>
+          <a:bodyPr wrap="square" lIns="0" tIns="0" rIns="0" bIns="0" rtlCol="0" anchor="ctr"/>
+          <a:lstStyle/>
+          <a:p>
+            <a:pPr marL="0" indent="0" algn="ctr">
+              <a:buNone/>
+            </a:pPr>
+            <a:r>
+              <a:rPr lang="en-US" sz="800" b="1" dirty="0">
+                <a:solidFill>
+                  <a:srgbClr val="082B47"/>
+                </a:solidFill>
+                <a:latin typeface="Calibri" pitchFamily="34" charset="0"/>
+                <a:ea typeface="Calibri" pitchFamily="34" charset="-122"/>
+                <a:cs typeface="Calibri" pitchFamily="34" charset="-120"/>
+              </a:rPr>
+              <a:t>VERIFICATION RESULT</a:t>
+            </a:r>
+            <a:endParaRPr lang="en-US" sz="800" dirty="0"/>
+          </a:p>
+        </p:txBody>
+      </p:sp>
+      <p:sp>
+        <p:nvSpPr>
+          <p:cNvPr id="257" name="Shape 97">
+            <a:extLst>
+              <a:ext uri="{FF2B5EF4-FFF2-40B4-BE49-F238E27FC236}">
+                <a16:creationId xmlns:a16="http://schemas.microsoft.com/office/drawing/2014/main" id="{BC8D6F14-B280-47AA-96B8-6E719F6FD653}"/>
+              </a:ext>
+            </a:extLst>
+          </p:cNvPr>
+          <p:cNvSpPr/>
+          <p:nvPr/>
+        </p:nvSpPr>
+        <p:spPr>
+          <a:xfrm>
+            <a:off x="6318504" y="3723457"/>
+            <a:ext cx="658368" cy="180461"/>
+          </a:xfrm>
+          <a:prstGeom prst="roundRect">
+            <a:avLst>
+              <a:gd name="adj" fmla="val 30000"/>
+            </a:avLst>
+          </a:prstGeom>
+          <a:solidFill>
+            <a:srgbClr val="1E7B34"/>
+          </a:solidFill>
+          <a:ln/>
+        </p:spPr>
+      </p:sp>
+      <p:sp>
+        <p:nvSpPr>
+          <p:cNvPr id="258" name="Text 98">
+            <a:extLst>
+              <a:ext uri="{FF2B5EF4-FFF2-40B4-BE49-F238E27FC236}">
+                <a16:creationId xmlns:a16="http://schemas.microsoft.com/office/drawing/2014/main" id="{D5BDE3CF-B320-4BA4-9D0E-7AAC3C55ABE0}"/>
+              </a:ext>
+            </a:extLst>
+          </p:cNvPr>
+          <p:cNvSpPr/>
+          <p:nvPr/>
+        </p:nvSpPr>
+        <p:spPr>
+          <a:xfrm>
+            <a:off x="6318504" y="3723457"/>
+            <a:ext cx="658368" cy="180461"/>
+          </a:xfrm>
+          <a:prstGeom prst="rect">
+            <a:avLst/>
+          </a:prstGeom>
+          <a:noFill/>
+          <a:ln/>
+        </p:spPr>
+        <p:txBody>
+          <a:bodyPr wrap="square" lIns="0" tIns="0" rIns="0" bIns="0" rtlCol="0" anchor="ctr"/>
+          <a:lstStyle/>
+          <a:p>
+            <a:pPr marL="0" indent="0" algn="ctr">
+              <a:buNone/>
+            </a:pPr>
+            <a:r>
+              <a:rPr lang="en-US" sz="800" b="1" dirty="0">
+                <a:solidFill>
+                  <a:srgbClr val="FFFFFF"/>
+                </a:solidFill>
+                <a:latin typeface="Calibri" pitchFamily="34" charset="0"/>
+                <a:ea typeface="Calibri" pitchFamily="34" charset="-122"/>
+                <a:cs typeface="Calibri" pitchFamily="34" charset="-120"/>
+              </a:rPr>
+              <a:t>VALID</a:t>
+            </a:r>
+            <a:endParaRPr lang="en-US" sz="800" dirty="0"/>
+          </a:p>
+        </p:txBody>
+      </p:sp>
+      <p:sp>
+        <p:nvSpPr>
+          <p:cNvPr id="259" name="Shape 99">
+            <a:extLst>
+              <a:ext uri="{FF2B5EF4-FFF2-40B4-BE49-F238E27FC236}">
+                <a16:creationId xmlns:a16="http://schemas.microsoft.com/office/drawing/2014/main" id="{E9F77FE9-F3F2-4897-8EE1-8F0F80719F13}"/>
+              </a:ext>
+            </a:extLst>
+          </p:cNvPr>
+          <p:cNvSpPr/>
+          <p:nvPr/>
+        </p:nvSpPr>
+        <p:spPr>
+          <a:xfrm>
+            <a:off x="7013448" y="3744915"/>
+            <a:ext cx="658368" cy="159003"/>
+          </a:xfrm>
+          <a:prstGeom prst="roundRect">
+            <a:avLst>
+              <a:gd name="adj" fmla="val 30000"/>
+            </a:avLst>
+          </a:prstGeom>
+          <a:solidFill>
+            <a:srgbClr val="B26A00"/>
+          </a:solidFill>
+          <a:ln/>
+        </p:spPr>
+      </p:sp>
+      <p:sp>
+        <p:nvSpPr>
+          <p:cNvPr id="260" name="Text 100">
+            <a:extLst>
+              <a:ext uri="{FF2B5EF4-FFF2-40B4-BE49-F238E27FC236}">
+                <a16:creationId xmlns:a16="http://schemas.microsoft.com/office/drawing/2014/main" id="{A59A59F3-80F5-4F9E-A7EE-DBCBD673FB05}"/>
+              </a:ext>
+            </a:extLst>
+          </p:cNvPr>
+          <p:cNvSpPr/>
+          <p:nvPr/>
+        </p:nvSpPr>
+        <p:spPr>
+          <a:xfrm>
+            <a:off x="7013448" y="3723457"/>
+            <a:ext cx="658368" cy="180461"/>
+          </a:xfrm>
+          <a:prstGeom prst="rect">
+            <a:avLst/>
+          </a:prstGeom>
+          <a:noFill/>
+          <a:ln/>
+        </p:spPr>
+        <p:txBody>
+          <a:bodyPr wrap="square" lIns="0" tIns="0" rIns="0" bIns="0" rtlCol="0" anchor="ctr"/>
+          <a:lstStyle/>
+          <a:p>
+            <a:pPr marL="0" indent="0" algn="ctr">
+              <a:buNone/>
+            </a:pPr>
+            <a:r>
+              <a:rPr lang="en-US" sz="800" b="1" dirty="0">
+                <a:solidFill>
+                  <a:srgbClr val="FFFFFF"/>
+                </a:solidFill>
+                <a:latin typeface="Calibri" pitchFamily="34" charset="0"/>
+                <a:ea typeface="Calibri" pitchFamily="34" charset="-122"/>
+                <a:cs typeface="Calibri" pitchFamily="34" charset="-120"/>
+              </a:rPr>
+              <a:t>EXPIRED</a:t>
+            </a:r>
+            <a:endParaRPr lang="en-US" sz="800" dirty="0"/>
+          </a:p>
+        </p:txBody>
+      </p:sp>
+      <p:sp>
+        <p:nvSpPr>
+          <p:cNvPr id="261" name="Shape 101">
+            <a:extLst>
+              <a:ext uri="{FF2B5EF4-FFF2-40B4-BE49-F238E27FC236}">
+                <a16:creationId xmlns:a16="http://schemas.microsoft.com/office/drawing/2014/main" id="{5BB6A9EE-D4CE-484C-84C4-E30F2E45A261}"/>
+              </a:ext>
+            </a:extLst>
+          </p:cNvPr>
+          <p:cNvSpPr/>
+          <p:nvPr/>
+        </p:nvSpPr>
+        <p:spPr>
+          <a:xfrm>
+            <a:off x="7708392" y="3723457"/>
+            <a:ext cx="658368" cy="180461"/>
+          </a:xfrm>
+          <a:prstGeom prst="roundRect">
+            <a:avLst>
+              <a:gd name="adj" fmla="val 30000"/>
+            </a:avLst>
+          </a:prstGeom>
+          <a:solidFill>
+            <a:srgbClr val="B3261E"/>
+          </a:solidFill>
+          <a:ln/>
+        </p:spPr>
+      </p:sp>
+      <p:sp>
+        <p:nvSpPr>
+          <p:cNvPr id="262" name="Text 102">
+            <a:extLst>
+              <a:ext uri="{FF2B5EF4-FFF2-40B4-BE49-F238E27FC236}">
+                <a16:creationId xmlns:a16="http://schemas.microsoft.com/office/drawing/2014/main" id="{FB920E56-2F8B-427D-A4D4-C9D936D0D9BC}"/>
+              </a:ext>
+            </a:extLst>
+          </p:cNvPr>
+          <p:cNvSpPr/>
+          <p:nvPr/>
+        </p:nvSpPr>
+        <p:spPr>
+          <a:xfrm>
+            <a:off x="7708392" y="3723457"/>
+            <a:ext cx="658368" cy="180461"/>
+          </a:xfrm>
+          <a:prstGeom prst="rect">
+            <a:avLst/>
+          </a:prstGeom>
+          <a:noFill/>
+          <a:ln/>
+        </p:spPr>
+        <p:txBody>
+          <a:bodyPr wrap="square" lIns="0" tIns="0" rIns="0" bIns="0" rtlCol="0" anchor="ctr"/>
+          <a:lstStyle/>
+          <a:p>
+            <a:pPr marL="0" indent="0" algn="ctr">
+              <a:buNone/>
+            </a:pPr>
+            <a:r>
+              <a:rPr lang="en-US" sz="900" b="1" dirty="0">
+                <a:solidFill>
+                  <a:srgbClr val="FFFFFF"/>
+                </a:solidFill>
+                <a:latin typeface="Calibri" pitchFamily="34" charset="0"/>
+                <a:ea typeface="Calibri" pitchFamily="34" charset="-122"/>
+                <a:cs typeface="Calibri" pitchFamily="34" charset="-120"/>
+              </a:rPr>
+              <a:t>REVOKED</a:t>
+            </a:r>
+            <a:endParaRPr lang="en-US" sz="900" dirty="0"/>
+          </a:p>
+        </p:txBody>
+      </p:sp>
+      <p:sp>
+        <p:nvSpPr>
+          <p:cNvPr id="263" name="Text 103">
+            <a:extLst>
+              <a:ext uri="{FF2B5EF4-FFF2-40B4-BE49-F238E27FC236}">
+                <a16:creationId xmlns:a16="http://schemas.microsoft.com/office/drawing/2014/main" id="{80D04479-6258-4431-ABEE-3D3F49CB9EC3}"/>
+              </a:ext>
+            </a:extLst>
+          </p:cNvPr>
+          <p:cNvSpPr/>
+          <p:nvPr/>
+        </p:nvSpPr>
+        <p:spPr>
+          <a:xfrm>
+            <a:off x="9500616" y="3579815"/>
+            <a:ext cx="73152" cy="378968"/>
+          </a:xfrm>
+          <a:prstGeom prst="rect">
+            <a:avLst/>
+          </a:prstGeom>
+          <a:noFill/>
+          <a:ln/>
+        </p:spPr>
+        <p:txBody>
+          <a:bodyPr wrap="square" lIns="0" tIns="0" rIns="0" bIns="0" rtlCol="0" anchor="ctr"/>
+          <a:lstStyle/>
+          <a:p>
+            <a:pPr marL="0" indent="0" algn="ctr">
+              <a:buNone/>
+            </a:pPr>
+            <a:r>
+              <a:rPr lang="en-US" sz="1100" b="1" dirty="0">
+                <a:solidFill>
+                  <a:srgbClr val="0E7C86"/>
+                </a:solidFill>
+                <a:latin typeface="Calibri" pitchFamily="34" charset="0"/>
+                <a:ea typeface="Calibri" pitchFamily="34" charset="-122"/>
+                <a:cs typeface="Calibri" pitchFamily="34" charset="-120"/>
+              </a:rPr>
+              <a:t>‹</a:t>
+            </a:r>
+            <a:endParaRPr lang="en-US" sz="1100" dirty="0"/>
+          </a:p>
+        </p:txBody>
+      </p:sp>
+      <p:sp>
+        <p:nvSpPr>
+          <p:cNvPr id="264" name="Text 104">
+            <a:extLst>
+              <a:ext uri="{FF2B5EF4-FFF2-40B4-BE49-F238E27FC236}">
+                <a16:creationId xmlns:a16="http://schemas.microsoft.com/office/drawing/2014/main" id="{084BE3A5-5D27-40E5-BBE9-170F1F259405}"/>
+              </a:ext>
+            </a:extLst>
+          </p:cNvPr>
+          <p:cNvSpPr/>
+          <p:nvPr/>
+        </p:nvSpPr>
+        <p:spPr>
+          <a:xfrm>
+            <a:off x="10597896" y="3579815"/>
+            <a:ext cx="73152" cy="378968"/>
+          </a:xfrm>
+          <a:prstGeom prst="rect">
+            <a:avLst/>
+          </a:prstGeom>
+          <a:noFill/>
+          <a:ln/>
+        </p:spPr>
+        <p:txBody>
+          <a:bodyPr wrap="square" lIns="0" tIns="0" rIns="0" bIns="0" rtlCol="0" anchor="ctr"/>
+          <a:lstStyle/>
+          <a:p>
+            <a:pPr marL="0" indent="0" algn="ctr">
+              <a:buNone/>
+            </a:pPr>
+            <a:r>
+              <a:rPr lang="en-US" sz="1100" b="1" dirty="0">
+                <a:solidFill>
+                  <a:srgbClr val="0E7C86"/>
+                </a:solidFill>
+                <a:latin typeface="Calibri" pitchFamily="34" charset="0"/>
+                <a:ea typeface="Calibri" pitchFamily="34" charset="-122"/>
+                <a:cs typeface="Calibri" pitchFamily="34" charset="-120"/>
+              </a:rPr>
+              <a:t>‹</a:t>
+            </a:r>
+            <a:endParaRPr lang="en-US" sz="1100" dirty="0"/>
+          </a:p>
+        </p:txBody>
+      </p:sp>
+      <p:sp>
+        <p:nvSpPr>
+          <p:cNvPr id="265" name="Text 105">
+            <a:extLst>
+              <a:ext uri="{FF2B5EF4-FFF2-40B4-BE49-F238E27FC236}">
+                <a16:creationId xmlns:a16="http://schemas.microsoft.com/office/drawing/2014/main" id="{AAC1F720-3405-4A0D-B48B-C3044566B364}"/>
+              </a:ext>
+            </a:extLst>
+          </p:cNvPr>
+          <p:cNvSpPr/>
+          <p:nvPr/>
+        </p:nvSpPr>
+        <p:spPr>
+          <a:xfrm>
+            <a:off x="8403336" y="3579815"/>
+            <a:ext cx="73152" cy="378968"/>
+          </a:xfrm>
+          <a:prstGeom prst="rect">
+            <a:avLst/>
+          </a:prstGeom>
+          <a:noFill/>
+          <a:ln/>
+        </p:spPr>
+        <p:txBody>
+          <a:bodyPr wrap="square" lIns="0" tIns="0" rIns="0" bIns="0" rtlCol="0" anchor="ctr"/>
+          <a:lstStyle/>
+          <a:p>
+            <a:pPr marL="0" indent="0" algn="ctr">
+              <a:buNone/>
+            </a:pPr>
+            <a:r>
+              <a:rPr lang="en-US" sz="1100" b="1" dirty="0">
+                <a:solidFill>
+                  <a:srgbClr val="0E7C86"/>
+                </a:solidFill>
+                <a:latin typeface="Calibri" pitchFamily="34" charset="0"/>
+                <a:ea typeface="Calibri" pitchFamily="34" charset="-122"/>
+                <a:cs typeface="Calibri" pitchFamily="34" charset="-120"/>
+              </a:rPr>
+              <a:t>‹</a:t>
+            </a:r>
+            <a:endParaRPr lang="en-US" sz="1100" dirty="0"/>
+          </a:p>
+        </p:txBody>
+      </p:sp>
+      <p:sp>
+        <p:nvSpPr>
+          <p:cNvPr id="267" name="Text 107">
+            <a:extLst>
+              <a:ext uri="{FF2B5EF4-FFF2-40B4-BE49-F238E27FC236}">
+                <a16:creationId xmlns:a16="http://schemas.microsoft.com/office/drawing/2014/main" id="{C2B6E0B3-8C2B-431B-9C5A-882003E8D740}"/>
+              </a:ext>
+            </a:extLst>
+          </p:cNvPr>
+          <p:cNvSpPr/>
+          <p:nvPr/>
+        </p:nvSpPr>
+        <p:spPr>
+          <a:xfrm>
+            <a:off x="6281928" y="5737264"/>
+            <a:ext cx="1828800" cy="126323"/>
+          </a:xfrm>
+          <a:prstGeom prst="rect">
+            <a:avLst/>
+          </a:prstGeom>
+          <a:noFill/>
+          <a:ln/>
+        </p:spPr>
+        <p:txBody>
+          <a:bodyPr wrap="square" lIns="0" tIns="0" rIns="0" bIns="0" rtlCol="0" anchor="ctr"/>
+          <a:lstStyle/>
+          <a:p>
+            <a:pPr marL="0" indent="0" algn="l">
+              <a:buNone/>
+            </a:pPr>
+            <a:r>
+              <a:rPr lang="en-US" sz="900" b="1" dirty="0">
+                <a:solidFill>
+                  <a:srgbClr val="082B47"/>
+                </a:solidFill>
+                <a:latin typeface="Calibri" pitchFamily="34" charset="0"/>
+                <a:ea typeface="Calibri" pitchFamily="34" charset="-122"/>
+                <a:cs typeface="Calibri" pitchFamily="34" charset="-120"/>
+              </a:rPr>
+              <a:t>SECURITY</a:t>
+            </a:r>
+            <a:r>
+              <a:rPr lang="en-US" sz="730" b="1" dirty="0">
+                <a:solidFill>
+                  <a:srgbClr val="082B47"/>
+                </a:solidFill>
+                <a:latin typeface="Calibri" pitchFamily="34" charset="0"/>
+                <a:ea typeface="Calibri" pitchFamily="34" charset="-122"/>
+                <a:cs typeface="Calibri" pitchFamily="34" charset="-120"/>
+              </a:rPr>
+              <a:t> </a:t>
+            </a:r>
+            <a:r>
+              <a:rPr lang="en-US" sz="900" b="1" dirty="0">
+                <a:solidFill>
+                  <a:srgbClr val="082B47"/>
+                </a:solidFill>
+                <a:latin typeface="Calibri" pitchFamily="34" charset="0"/>
+                <a:ea typeface="Calibri" pitchFamily="34" charset="-122"/>
+                <a:cs typeface="Calibri" pitchFamily="34" charset="-120"/>
+              </a:rPr>
+              <a:t>STACK</a:t>
+            </a:r>
+            <a:endParaRPr lang="en-US" sz="900" dirty="0"/>
+          </a:p>
+        </p:txBody>
+      </p:sp>
+      <p:sp>
+        <p:nvSpPr>
+          <p:cNvPr id="268" name="Shape 108">
+            <a:extLst>
+              <a:ext uri="{FF2B5EF4-FFF2-40B4-BE49-F238E27FC236}">
+                <a16:creationId xmlns:a16="http://schemas.microsoft.com/office/drawing/2014/main" id="{DC73E7F7-257B-422C-94BB-933A0404770D}"/>
+              </a:ext>
+            </a:extLst>
+          </p:cNvPr>
+          <p:cNvSpPr/>
+          <p:nvPr/>
+        </p:nvSpPr>
+        <p:spPr>
+          <a:xfrm>
+            <a:off x="6281928" y="5894648"/>
+            <a:ext cx="865632" cy="270691"/>
+          </a:xfrm>
+          <a:prstGeom prst="roundRect">
+            <a:avLst>
+              <a:gd name="adj" fmla="val 11667"/>
+            </a:avLst>
+          </a:prstGeom>
+          <a:solidFill>
+            <a:srgbClr val="EAF2F8"/>
+          </a:solidFill>
+          <a:ln w="7620">
+            <a:solidFill>
+              <a:srgbClr val="0E7C86"/>
+            </a:solidFill>
+            <a:prstDash val="solid"/>
+          </a:ln>
+        </p:spPr>
+      </p:sp>
+      <p:sp>
+        <p:nvSpPr>
+          <p:cNvPr id="269" name="Text 109">
+            <a:extLst>
+              <a:ext uri="{FF2B5EF4-FFF2-40B4-BE49-F238E27FC236}">
+                <a16:creationId xmlns:a16="http://schemas.microsoft.com/office/drawing/2014/main" id="{13B3A0B4-D3F4-4BFA-9152-B0FD6601182E}"/>
+              </a:ext>
+            </a:extLst>
+          </p:cNvPr>
+          <p:cNvSpPr/>
+          <p:nvPr/>
+        </p:nvSpPr>
+        <p:spPr>
+          <a:xfrm>
+            <a:off x="6300216" y="5894648"/>
+            <a:ext cx="829056" cy="270691"/>
+          </a:xfrm>
+          <a:prstGeom prst="rect">
+            <a:avLst/>
+          </a:prstGeom>
+          <a:noFill/>
+          <a:ln/>
+        </p:spPr>
+        <p:txBody>
+          <a:bodyPr wrap="square" lIns="0" tIns="0" rIns="0" bIns="0" rtlCol="0" anchor="ctr"/>
+          <a:lstStyle/>
+          <a:p>
+            <a:pPr marL="0" indent="0" algn="ctr">
+              <a:lnSpc>
+                <a:spcPct val="92000"/>
+              </a:lnSpc>
+              <a:buNone/>
+            </a:pPr>
+            <a:r>
+              <a:rPr lang="en-US" sz="900" b="1" dirty="0">
+                <a:solidFill>
+                  <a:srgbClr val="1F2937"/>
+                </a:solidFill>
+                <a:latin typeface="Calibri" pitchFamily="34" charset="0"/>
+                <a:ea typeface="Calibri" pitchFamily="34" charset="-122"/>
+                <a:cs typeface="Calibri" pitchFamily="34" charset="-120"/>
+              </a:rPr>
+              <a:t>HTTPS</a:t>
+            </a:r>
+            <a:endParaRPr lang="en-US" sz="900" dirty="0"/>
+          </a:p>
+        </p:txBody>
+      </p:sp>
+      <p:sp>
+        <p:nvSpPr>
+          <p:cNvPr id="270" name="Text 110">
+            <a:extLst>
+              <a:ext uri="{FF2B5EF4-FFF2-40B4-BE49-F238E27FC236}">
+                <a16:creationId xmlns:a16="http://schemas.microsoft.com/office/drawing/2014/main" id="{96101BE9-0305-40D3-BD80-A40F6441469A}"/>
+              </a:ext>
+            </a:extLst>
+          </p:cNvPr>
+          <p:cNvSpPr/>
+          <p:nvPr/>
+        </p:nvSpPr>
+        <p:spPr>
+          <a:xfrm>
+            <a:off x="7147560" y="5894648"/>
+            <a:ext cx="54864" cy="270691"/>
+          </a:xfrm>
+          <a:prstGeom prst="rect">
+            <a:avLst/>
+          </a:prstGeom>
+          <a:noFill/>
+          <a:ln/>
+        </p:spPr>
+        <p:txBody>
+          <a:bodyPr wrap="square" lIns="0" tIns="0" rIns="0" bIns="0" rtlCol="0" anchor="ctr"/>
+          <a:lstStyle/>
+          <a:p>
+            <a:pPr marL="0" indent="0" algn="ctr">
+              <a:buNone/>
+            </a:pPr>
+            <a:r>
+              <a:rPr lang="en-US" sz="800" b="1" dirty="0">
+                <a:solidFill>
+                  <a:srgbClr val="0E7C86"/>
+                </a:solidFill>
+                <a:latin typeface="Calibri" pitchFamily="34" charset="0"/>
+                <a:ea typeface="Calibri" pitchFamily="34" charset="-122"/>
+                <a:cs typeface="Calibri" pitchFamily="34" charset="-120"/>
+              </a:rPr>
+              <a:t>›</a:t>
+            </a:r>
+            <a:endParaRPr lang="en-US" sz="800" dirty="0"/>
+          </a:p>
+        </p:txBody>
+      </p:sp>
+      <p:sp>
+        <p:nvSpPr>
+          <p:cNvPr id="271" name="Shape 111">
+            <a:extLst>
+              <a:ext uri="{FF2B5EF4-FFF2-40B4-BE49-F238E27FC236}">
+                <a16:creationId xmlns:a16="http://schemas.microsoft.com/office/drawing/2014/main" id="{C6858B9B-F574-44B0-80E6-DDB66D9C3C4F}"/>
+              </a:ext>
+            </a:extLst>
+          </p:cNvPr>
+          <p:cNvSpPr/>
+          <p:nvPr/>
+        </p:nvSpPr>
+        <p:spPr>
+          <a:xfrm>
+            <a:off x="7202424" y="5894648"/>
+            <a:ext cx="865632" cy="270691"/>
+          </a:xfrm>
+          <a:prstGeom prst="roundRect">
+            <a:avLst>
+              <a:gd name="adj" fmla="val 11667"/>
+            </a:avLst>
+          </a:prstGeom>
+          <a:solidFill>
+            <a:srgbClr val="EAF2F8"/>
+          </a:solidFill>
+          <a:ln w="7620">
+            <a:solidFill>
+              <a:srgbClr val="0E7C86"/>
+            </a:solidFill>
+            <a:prstDash val="solid"/>
+          </a:ln>
+        </p:spPr>
+      </p:sp>
+      <p:sp>
+        <p:nvSpPr>
+          <p:cNvPr id="272" name="Text 112">
+            <a:extLst>
+              <a:ext uri="{FF2B5EF4-FFF2-40B4-BE49-F238E27FC236}">
+                <a16:creationId xmlns:a16="http://schemas.microsoft.com/office/drawing/2014/main" id="{08690FF1-B928-4200-B72F-7713BF039ED7}"/>
+              </a:ext>
+            </a:extLst>
+          </p:cNvPr>
+          <p:cNvSpPr/>
+          <p:nvPr/>
+        </p:nvSpPr>
+        <p:spPr>
+          <a:xfrm>
+            <a:off x="7220712" y="5894648"/>
+            <a:ext cx="829056" cy="270691"/>
+          </a:xfrm>
+          <a:prstGeom prst="rect">
+            <a:avLst/>
+          </a:prstGeom>
+          <a:noFill/>
+          <a:ln/>
+        </p:spPr>
+        <p:txBody>
+          <a:bodyPr wrap="square" lIns="0" tIns="0" rIns="0" bIns="0" rtlCol="0" anchor="ctr"/>
+          <a:lstStyle/>
+          <a:p>
+            <a:pPr marL="0" indent="0" algn="ctr">
+              <a:lnSpc>
+                <a:spcPct val="92000"/>
+              </a:lnSpc>
+              <a:buNone/>
+            </a:pPr>
+            <a:r>
+              <a:rPr lang="en-US" sz="900" b="1" dirty="0">
+                <a:solidFill>
+                  <a:srgbClr val="1F2937"/>
+                </a:solidFill>
+                <a:latin typeface="Calibri" pitchFamily="34" charset="0"/>
+                <a:ea typeface="Calibri" pitchFamily="34" charset="-122"/>
+                <a:cs typeface="Calibri" pitchFamily="34" charset="-120"/>
+              </a:rPr>
+              <a:t>JWT Auth</a:t>
+            </a:r>
+            <a:endParaRPr lang="en-US" sz="900" dirty="0"/>
+          </a:p>
+        </p:txBody>
+      </p:sp>
+      <p:sp>
+        <p:nvSpPr>
+          <p:cNvPr id="273" name="Text 113">
+            <a:extLst>
+              <a:ext uri="{FF2B5EF4-FFF2-40B4-BE49-F238E27FC236}">
+                <a16:creationId xmlns:a16="http://schemas.microsoft.com/office/drawing/2014/main" id="{D120BF12-D3E6-490A-8293-DBF3028A6A3B}"/>
+              </a:ext>
+            </a:extLst>
+          </p:cNvPr>
+          <p:cNvSpPr/>
+          <p:nvPr/>
+        </p:nvSpPr>
+        <p:spPr>
+          <a:xfrm>
+            <a:off x="8068056" y="5894648"/>
+            <a:ext cx="54864" cy="270691"/>
+          </a:xfrm>
+          <a:prstGeom prst="rect">
+            <a:avLst/>
+          </a:prstGeom>
+          <a:noFill/>
+          <a:ln/>
+        </p:spPr>
+        <p:txBody>
+          <a:bodyPr wrap="square" lIns="0" tIns="0" rIns="0" bIns="0" rtlCol="0" anchor="ctr"/>
+          <a:lstStyle/>
+          <a:p>
+            <a:pPr marL="0" indent="0" algn="ctr">
+              <a:buNone/>
+            </a:pPr>
+            <a:r>
+              <a:rPr lang="en-US" sz="800" b="1" dirty="0">
+                <a:solidFill>
+                  <a:srgbClr val="0E7C86"/>
+                </a:solidFill>
+                <a:latin typeface="Calibri" pitchFamily="34" charset="0"/>
+                <a:ea typeface="Calibri" pitchFamily="34" charset="-122"/>
+                <a:cs typeface="Calibri" pitchFamily="34" charset="-120"/>
+              </a:rPr>
+              <a:t>›</a:t>
+            </a:r>
+            <a:endParaRPr lang="en-US" sz="800" dirty="0"/>
+          </a:p>
+        </p:txBody>
+      </p:sp>
+      <p:sp>
+        <p:nvSpPr>
+          <p:cNvPr id="274" name="Shape 114">
+            <a:extLst>
+              <a:ext uri="{FF2B5EF4-FFF2-40B4-BE49-F238E27FC236}">
+                <a16:creationId xmlns:a16="http://schemas.microsoft.com/office/drawing/2014/main" id="{22F47E84-11A2-4BCD-B5BA-3CD357498729}"/>
+              </a:ext>
+            </a:extLst>
+          </p:cNvPr>
+          <p:cNvSpPr/>
+          <p:nvPr/>
+        </p:nvSpPr>
+        <p:spPr>
+          <a:xfrm>
+            <a:off x="8122920" y="5894648"/>
+            <a:ext cx="865632" cy="270691"/>
+          </a:xfrm>
+          <a:prstGeom prst="roundRect">
+            <a:avLst>
+              <a:gd name="adj" fmla="val 11667"/>
+            </a:avLst>
+          </a:prstGeom>
+          <a:solidFill>
+            <a:srgbClr val="EAF2F8"/>
+          </a:solidFill>
+          <a:ln w="7620">
+            <a:solidFill>
+              <a:srgbClr val="0E7C86"/>
+            </a:solidFill>
+            <a:prstDash val="solid"/>
+          </a:ln>
+        </p:spPr>
+      </p:sp>
+      <p:sp>
+        <p:nvSpPr>
+          <p:cNvPr id="275" name="Text 115">
+            <a:extLst>
+              <a:ext uri="{FF2B5EF4-FFF2-40B4-BE49-F238E27FC236}">
+                <a16:creationId xmlns:a16="http://schemas.microsoft.com/office/drawing/2014/main" id="{F54549A9-EAFB-4E08-80F9-AE79DD7D9814}"/>
+              </a:ext>
+            </a:extLst>
+          </p:cNvPr>
+          <p:cNvSpPr/>
+          <p:nvPr/>
+        </p:nvSpPr>
+        <p:spPr>
+          <a:xfrm>
+            <a:off x="8141208" y="5894648"/>
+            <a:ext cx="829056" cy="270691"/>
+          </a:xfrm>
+          <a:prstGeom prst="rect">
+            <a:avLst/>
+          </a:prstGeom>
+          <a:noFill/>
+          <a:ln/>
+        </p:spPr>
+        <p:txBody>
+          <a:bodyPr wrap="square" lIns="0" tIns="0" rIns="0" bIns="0" rtlCol="0" anchor="ctr"/>
+          <a:lstStyle/>
+          <a:p>
+            <a:pPr marL="0" indent="0" algn="ctr">
+              <a:lnSpc>
+                <a:spcPct val="92000"/>
+              </a:lnSpc>
+              <a:buNone/>
+            </a:pPr>
+            <a:r>
+              <a:rPr lang="en-US" sz="900" b="1" dirty="0">
+                <a:solidFill>
+                  <a:srgbClr val="1F2937"/>
+                </a:solidFill>
+                <a:latin typeface="Calibri" pitchFamily="34" charset="0"/>
+                <a:ea typeface="Calibri" pitchFamily="34" charset="-122"/>
+                <a:cs typeface="Calibri" pitchFamily="34" charset="-120"/>
+              </a:rPr>
+              <a:t>RBAC</a:t>
+            </a:r>
+            <a:endParaRPr lang="en-US" sz="900" dirty="0"/>
+          </a:p>
+        </p:txBody>
+      </p:sp>
+      <p:sp>
+        <p:nvSpPr>
+          <p:cNvPr id="276" name="Text 116">
+            <a:extLst>
+              <a:ext uri="{FF2B5EF4-FFF2-40B4-BE49-F238E27FC236}">
+                <a16:creationId xmlns:a16="http://schemas.microsoft.com/office/drawing/2014/main" id="{2ECFB589-EE39-48C5-AC6D-35226C7A4053}"/>
+              </a:ext>
+            </a:extLst>
+          </p:cNvPr>
+          <p:cNvSpPr/>
+          <p:nvPr/>
+        </p:nvSpPr>
+        <p:spPr>
+          <a:xfrm>
+            <a:off x="8988552" y="5894648"/>
+            <a:ext cx="54864" cy="270691"/>
+          </a:xfrm>
+          <a:prstGeom prst="rect">
+            <a:avLst/>
+          </a:prstGeom>
+          <a:noFill/>
+          <a:ln/>
+        </p:spPr>
+        <p:txBody>
+          <a:bodyPr wrap="square" lIns="0" tIns="0" rIns="0" bIns="0" rtlCol="0" anchor="ctr"/>
+          <a:lstStyle/>
+          <a:p>
+            <a:pPr marL="0" indent="0" algn="ctr">
+              <a:buNone/>
+            </a:pPr>
+            <a:r>
+              <a:rPr lang="en-US" sz="800" b="1" dirty="0">
+                <a:solidFill>
+                  <a:srgbClr val="0E7C86"/>
+                </a:solidFill>
+                <a:latin typeface="Calibri" pitchFamily="34" charset="0"/>
+                <a:ea typeface="Calibri" pitchFamily="34" charset="-122"/>
+                <a:cs typeface="Calibri" pitchFamily="34" charset="-120"/>
+              </a:rPr>
+              <a:t>›</a:t>
+            </a:r>
+            <a:endParaRPr lang="en-US" sz="800" dirty="0"/>
+          </a:p>
+        </p:txBody>
+      </p:sp>
+      <p:sp>
+        <p:nvSpPr>
+          <p:cNvPr id="277" name="Shape 117">
+            <a:extLst>
+              <a:ext uri="{FF2B5EF4-FFF2-40B4-BE49-F238E27FC236}">
+                <a16:creationId xmlns:a16="http://schemas.microsoft.com/office/drawing/2014/main" id="{1907A933-8AF7-4F0C-AAFB-C839665120C3}"/>
+              </a:ext>
+            </a:extLst>
+          </p:cNvPr>
+          <p:cNvSpPr/>
+          <p:nvPr/>
+        </p:nvSpPr>
+        <p:spPr>
+          <a:xfrm>
+            <a:off x="9043416" y="5894648"/>
+            <a:ext cx="865632" cy="270691"/>
+          </a:xfrm>
+          <a:prstGeom prst="roundRect">
+            <a:avLst>
+              <a:gd name="adj" fmla="val 11667"/>
+            </a:avLst>
+          </a:prstGeom>
+          <a:solidFill>
+            <a:srgbClr val="EAF2F8"/>
+          </a:solidFill>
+          <a:ln w="7620">
+            <a:solidFill>
+              <a:srgbClr val="0E7C86"/>
+            </a:solidFill>
+            <a:prstDash val="solid"/>
+          </a:ln>
+        </p:spPr>
+      </p:sp>
+      <p:sp>
+        <p:nvSpPr>
+          <p:cNvPr id="278" name="Text 118">
+            <a:extLst>
+              <a:ext uri="{FF2B5EF4-FFF2-40B4-BE49-F238E27FC236}">
+                <a16:creationId xmlns:a16="http://schemas.microsoft.com/office/drawing/2014/main" id="{B6FF3079-7EB1-425D-8CC3-25579FDA4822}"/>
+              </a:ext>
+            </a:extLst>
+          </p:cNvPr>
+          <p:cNvSpPr/>
+          <p:nvPr/>
+        </p:nvSpPr>
+        <p:spPr>
+          <a:xfrm>
+            <a:off x="9061704" y="5894648"/>
+            <a:ext cx="829056" cy="270691"/>
+          </a:xfrm>
+          <a:prstGeom prst="rect">
+            <a:avLst/>
+          </a:prstGeom>
+          <a:noFill/>
+          <a:ln/>
+        </p:spPr>
+        <p:txBody>
+          <a:bodyPr wrap="square" lIns="0" tIns="0" rIns="0" bIns="0" rtlCol="0" anchor="ctr"/>
+          <a:lstStyle/>
+          <a:p>
+            <a:pPr marL="0" indent="0" algn="ctr">
+              <a:lnSpc>
+                <a:spcPct val="92000"/>
+              </a:lnSpc>
+              <a:buNone/>
+            </a:pPr>
+            <a:r>
+              <a:rPr lang="en-US" sz="560" b="1" dirty="0">
+                <a:solidFill>
+                  <a:srgbClr val="1F2937"/>
+                </a:solidFill>
+                <a:latin typeface="Calibri" pitchFamily="34" charset="0"/>
+                <a:ea typeface="Calibri" pitchFamily="34" charset="-122"/>
+                <a:cs typeface="Calibri" pitchFamily="34" charset="-120"/>
+              </a:rPr>
+              <a:t>I</a:t>
+            </a:r>
+            <a:r>
+              <a:rPr lang="en-US" sz="900" b="1" dirty="0">
+                <a:solidFill>
+                  <a:srgbClr val="1F2937"/>
+                </a:solidFill>
+                <a:latin typeface="Calibri" pitchFamily="34" charset="0"/>
+                <a:ea typeface="Calibri" pitchFamily="34" charset="-122"/>
+                <a:cs typeface="Calibri" pitchFamily="34" charset="-120"/>
+              </a:rPr>
+              <a:t>nput/File</a:t>
+            </a:r>
+            <a:endParaRPr lang="en-US" sz="900" dirty="0"/>
+          </a:p>
+          <a:p>
+            <a:pPr marL="0" indent="0" algn="ctr">
+              <a:lnSpc>
+                <a:spcPct val="92000"/>
+              </a:lnSpc>
+              <a:buNone/>
+            </a:pPr>
+            <a:r>
+              <a:rPr lang="en-US" sz="900" b="1" dirty="0">
+                <a:solidFill>
+                  <a:srgbClr val="1F2937"/>
+                </a:solidFill>
+                <a:latin typeface="Calibri" pitchFamily="34" charset="0"/>
+                <a:ea typeface="Calibri" pitchFamily="34" charset="-122"/>
+                <a:cs typeface="Calibri" pitchFamily="34" charset="-120"/>
+              </a:rPr>
+              <a:t>Validation</a:t>
+            </a:r>
+            <a:endParaRPr lang="en-US" sz="900" dirty="0"/>
+          </a:p>
+        </p:txBody>
+      </p:sp>
+      <p:sp>
+        <p:nvSpPr>
+          <p:cNvPr id="279" name="Text 119">
+            <a:extLst>
+              <a:ext uri="{FF2B5EF4-FFF2-40B4-BE49-F238E27FC236}">
+                <a16:creationId xmlns:a16="http://schemas.microsoft.com/office/drawing/2014/main" id="{E77E6F50-E578-444B-9661-C7F187BA8B7F}"/>
+              </a:ext>
+            </a:extLst>
+          </p:cNvPr>
+          <p:cNvSpPr/>
+          <p:nvPr/>
+        </p:nvSpPr>
+        <p:spPr>
+          <a:xfrm>
+            <a:off x="9909048" y="5894648"/>
+            <a:ext cx="54864" cy="270691"/>
+          </a:xfrm>
+          <a:prstGeom prst="rect">
+            <a:avLst/>
+          </a:prstGeom>
+          <a:noFill/>
+          <a:ln/>
+        </p:spPr>
+        <p:txBody>
+          <a:bodyPr wrap="square" lIns="0" tIns="0" rIns="0" bIns="0" rtlCol="0" anchor="ctr"/>
+          <a:lstStyle/>
+          <a:p>
+            <a:pPr marL="0" indent="0" algn="ctr">
+              <a:buNone/>
+            </a:pPr>
+            <a:r>
+              <a:rPr lang="en-US" sz="800" b="1" dirty="0">
+                <a:solidFill>
+                  <a:srgbClr val="0E7C86"/>
+                </a:solidFill>
+                <a:latin typeface="Calibri" pitchFamily="34" charset="0"/>
+                <a:ea typeface="Calibri" pitchFamily="34" charset="-122"/>
+                <a:cs typeface="Calibri" pitchFamily="34" charset="-120"/>
+              </a:rPr>
+              <a:t>›</a:t>
+            </a:r>
+            <a:endParaRPr lang="en-US" sz="800" dirty="0"/>
+          </a:p>
+        </p:txBody>
+      </p:sp>
+      <p:sp>
+        <p:nvSpPr>
+          <p:cNvPr id="280" name="Shape 120">
+            <a:extLst>
+              <a:ext uri="{FF2B5EF4-FFF2-40B4-BE49-F238E27FC236}">
+                <a16:creationId xmlns:a16="http://schemas.microsoft.com/office/drawing/2014/main" id="{535C23DA-3E68-49C0-8C33-6445539F7A0C}"/>
+              </a:ext>
+            </a:extLst>
+          </p:cNvPr>
+          <p:cNvSpPr/>
+          <p:nvPr/>
+        </p:nvSpPr>
+        <p:spPr>
+          <a:xfrm>
+            <a:off x="9963912" y="5894648"/>
+            <a:ext cx="865632" cy="270691"/>
+          </a:xfrm>
+          <a:prstGeom prst="roundRect">
+            <a:avLst>
+              <a:gd name="adj" fmla="val 11667"/>
+            </a:avLst>
+          </a:prstGeom>
+          <a:solidFill>
+            <a:srgbClr val="EAF2F8"/>
+          </a:solidFill>
+          <a:ln w="7620">
+            <a:solidFill>
+              <a:srgbClr val="0E7C86"/>
+            </a:solidFill>
+            <a:prstDash val="solid"/>
+          </a:ln>
+        </p:spPr>
+      </p:sp>
+      <p:sp>
+        <p:nvSpPr>
+          <p:cNvPr id="281" name="Text 121">
+            <a:extLst>
+              <a:ext uri="{FF2B5EF4-FFF2-40B4-BE49-F238E27FC236}">
+                <a16:creationId xmlns:a16="http://schemas.microsoft.com/office/drawing/2014/main" id="{B429B94E-4C23-43EB-82F8-DBFBD56FB1A9}"/>
+              </a:ext>
+            </a:extLst>
+          </p:cNvPr>
+          <p:cNvSpPr/>
+          <p:nvPr/>
+        </p:nvSpPr>
+        <p:spPr>
+          <a:xfrm>
+            <a:off x="9982200" y="5894648"/>
+            <a:ext cx="829056" cy="270691"/>
+          </a:xfrm>
+          <a:prstGeom prst="rect">
+            <a:avLst/>
+          </a:prstGeom>
+          <a:noFill/>
+          <a:ln/>
+        </p:spPr>
+        <p:txBody>
+          <a:bodyPr wrap="square" lIns="0" tIns="0" rIns="0" bIns="0" rtlCol="0" anchor="ctr"/>
+          <a:lstStyle/>
+          <a:p>
+            <a:pPr marL="0" indent="0" algn="ctr">
+              <a:lnSpc>
+                <a:spcPct val="92000"/>
+              </a:lnSpc>
+              <a:buNone/>
+            </a:pPr>
+            <a:r>
+              <a:rPr lang="en-US" sz="900" b="1" dirty="0">
+                <a:solidFill>
+                  <a:srgbClr val="1F2937"/>
+                </a:solidFill>
+                <a:latin typeface="Calibri" pitchFamily="34" charset="0"/>
+                <a:ea typeface="Calibri" pitchFamily="34" charset="-122"/>
+                <a:cs typeface="Calibri" pitchFamily="34" charset="-120"/>
+              </a:rPr>
+              <a:t>Encrypted</a:t>
+            </a:r>
+            <a:endParaRPr lang="en-US" sz="900" dirty="0"/>
+          </a:p>
+          <a:p>
+            <a:pPr marL="0" indent="0" algn="ctr">
+              <a:lnSpc>
+                <a:spcPct val="92000"/>
+              </a:lnSpc>
+              <a:buNone/>
+            </a:pPr>
+            <a:r>
+              <a:rPr lang="en-US" sz="900" b="1" dirty="0">
+                <a:solidFill>
+                  <a:srgbClr val="1F2937"/>
+                </a:solidFill>
+                <a:latin typeface="Calibri" pitchFamily="34" charset="0"/>
+                <a:ea typeface="Calibri" pitchFamily="34" charset="-122"/>
+                <a:cs typeface="Calibri" pitchFamily="34" charset="-120"/>
+              </a:rPr>
+              <a:t>Storage</a:t>
+            </a:r>
+            <a:endParaRPr lang="en-US" sz="900" dirty="0"/>
+          </a:p>
+        </p:txBody>
+      </p:sp>
+      <p:sp>
+        <p:nvSpPr>
+          <p:cNvPr id="282" name="Text 122">
+            <a:extLst>
+              <a:ext uri="{FF2B5EF4-FFF2-40B4-BE49-F238E27FC236}">
+                <a16:creationId xmlns:a16="http://schemas.microsoft.com/office/drawing/2014/main" id="{CEDFD31A-58C2-473E-812D-6EB38AD48A35}"/>
+              </a:ext>
+            </a:extLst>
+          </p:cNvPr>
+          <p:cNvSpPr/>
+          <p:nvPr/>
+        </p:nvSpPr>
+        <p:spPr>
+          <a:xfrm>
+            <a:off x="10829544" y="5894648"/>
+            <a:ext cx="54864" cy="270691"/>
+          </a:xfrm>
+          <a:prstGeom prst="rect">
+            <a:avLst/>
+          </a:prstGeom>
+          <a:noFill/>
+          <a:ln/>
+        </p:spPr>
+        <p:txBody>
+          <a:bodyPr wrap="square" lIns="0" tIns="0" rIns="0" bIns="0" rtlCol="0" anchor="ctr"/>
+          <a:lstStyle/>
+          <a:p>
+            <a:pPr marL="0" indent="0" algn="ctr">
+              <a:buNone/>
+            </a:pPr>
+            <a:r>
+              <a:rPr lang="en-US" sz="800" b="1" dirty="0">
+                <a:solidFill>
+                  <a:srgbClr val="0E7C86"/>
+                </a:solidFill>
+                <a:latin typeface="Calibri" pitchFamily="34" charset="0"/>
+                <a:ea typeface="Calibri" pitchFamily="34" charset="-122"/>
+                <a:cs typeface="Calibri" pitchFamily="34" charset="-120"/>
+              </a:rPr>
+              <a:t>›</a:t>
+            </a:r>
+            <a:endParaRPr lang="en-US" sz="800" dirty="0"/>
+          </a:p>
+        </p:txBody>
+      </p:sp>
+      <p:sp>
+        <p:nvSpPr>
+          <p:cNvPr id="283" name="Shape 123">
+            <a:extLst>
+              <a:ext uri="{FF2B5EF4-FFF2-40B4-BE49-F238E27FC236}">
+                <a16:creationId xmlns:a16="http://schemas.microsoft.com/office/drawing/2014/main" id="{CD03ECA4-FF3B-41EE-B11A-728D2F83FE99}"/>
+              </a:ext>
+            </a:extLst>
+          </p:cNvPr>
+          <p:cNvSpPr/>
+          <p:nvPr/>
+        </p:nvSpPr>
+        <p:spPr>
+          <a:xfrm>
+            <a:off x="10884408" y="5894648"/>
+            <a:ext cx="865632" cy="270691"/>
+          </a:xfrm>
+          <a:prstGeom prst="roundRect">
+            <a:avLst>
+              <a:gd name="adj" fmla="val 11667"/>
+            </a:avLst>
+          </a:prstGeom>
+          <a:solidFill>
+            <a:srgbClr val="EAF2F8"/>
+          </a:solidFill>
+          <a:ln w="7620">
+            <a:solidFill>
+              <a:srgbClr val="0E7C86"/>
+            </a:solidFill>
+            <a:prstDash val="solid"/>
+          </a:ln>
+        </p:spPr>
+      </p:sp>
+      <p:sp>
+        <p:nvSpPr>
+          <p:cNvPr id="284" name="Text 124">
+            <a:extLst>
+              <a:ext uri="{FF2B5EF4-FFF2-40B4-BE49-F238E27FC236}">
+                <a16:creationId xmlns:a16="http://schemas.microsoft.com/office/drawing/2014/main" id="{D36EBE69-A2A5-4E4E-89CE-022093276F9E}"/>
+              </a:ext>
+            </a:extLst>
+          </p:cNvPr>
+          <p:cNvSpPr/>
+          <p:nvPr/>
+        </p:nvSpPr>
+        <p:spPr>
+          <a:xfrm>
+            <a:off x="10902696" y="5894648"/>
+            <a:ext cx="829056" cy="270691"/>
+          </a:xfrm>
+          <a:prstGeom prst="rect">
+            <a:avLst/>
+          </a:prstGeom>
+          <a:noFill/>
+          <a:ln/>
+        </p:spPr>
+        <p:txBody>
+          <a:bodyPr wrap="square" lIns="0" tIns="0" rIns="0" bIns="0" rtlCol="0" anchor="ctr"/>
+          <a:lstStyle/>
+          <a:p>
+            <a:pPr marL="0" indent="0" algn="ctr">
+              <a:lnSpc>
+                <a:spcPct val="92000"/>
+              </a:lnSpc>
+              <a:buNone/>
+            </a:pPr>
+            <a:r>
+              <a:rPr lang="en-US" sz="900" b="1" dirty="0">
+                <a:solidFill>
+                  <a:srgbClr val="1F2937"/>
+                </a:solidFill>
+                <a:latin typeface="Calibri" pitchFamily="34" charset="0"/>
+                <a:ea typeface="Calibri" pitchFamily="34" charset="-122"/>
+                <a:cs typeface="Calibri" pitchFamily="34" charset="-120"/>
+              </a:rPr>
+              <a:t>Audit Trail</a:t>
+            </a:r>
+            <a:endParaRPr lang="en-US" sz="900" dirty="0"/>
+          </a:p>
+        </p:txBody>
+      </p:sp>
+      <p:sp>
+        <p:nvSpPr>
+          <p:cNvPr id="285" name="Oval 284" descr="Your startup LOGO">
+            <a:extLst>
+              <a:ext uri="{FF2B5EF4-FFF2-40B4-BE49-F238E27FC236}">
+                <a16:creationId xmlns:a16="http://schemas.microsoft.com/office/drawing/2014/main" id="{F8F7F6FE-6687-4531-A162-8E57A927E0BD}"/>
+              </a:ext>
+              <a:ext uri="{C183D7F6-B498-43B3-948B-1728B52AA6E4}">
+                <adec:decorative xmlns:adec="http://schemas.microsoft.com/office/drawing/2017/decorative" val="0"/>
+              </a:ext>
+            </a:extLst>
+          </p:cNvPr>
+          <p:cNvSpPr/>
+          <p:nvPr/>
+        </p:nvSpPr>
+        <p:spPr>
+          <a:xfrm>
+            <a:off x="329773" y="5287"/>
+            <a:ext cx="1251857" cy="847892"/>
+          </a:xfrm>
+          <a:prstGeom prst="ellipse">
+            <a:avLst/>
+          </a:prstGeom>
+        </p:spPr>
+        <p:style>
+          <a:lnRef idx="2">
+            <a:schemeClr val="accent4"/>
+          </a:lnRef>
+          <a:fillRef idx="1">
+            <a:schemeClr val="lt1"/>
+          </a:fillRef>
+          <a:effectRef idx="0">
+            <a:schemeClr val="accent4"/>
+          </a:effectRef>
+          <a:fontRef idx="minor">
+            <a:schemeClr val="dk1"/>
+          </a:fontRef>
+        </p:style>
+        <p:txBody>
+          <a:bodyPr rtlCol="0" anchor="ctr"/>
+          <a:lstStyle/>
+          <a:p>
+            <a:pPr algn="ctr"/>
+            <a:r>
+              <a:rPr lang="en-US" b="1" i="1" dirty="0" err="1">
+                <a:latin typeface="Arial Narrow" panose="020B0606020202030204" pitchFamily="34" charset="0"/>
+              </a:rPr>
+              <a:t>VisionX</a:t>
+            </a:r>
+            <a:endParaRPr lang="en-IN" b="1" i="1" dirty="0">
+              <a:latin typeface="Arial Narrow" panose="020B0606020202030204" pitchFamily="34" charset="0"/>
+            </a:endParaRPr>
+          </a:p>
+        </p:txBody>
+      </p:sp>
     </p:spTree>
   </p:cSld>
   <p:clrMapOvr>
@@ -7148,7 +11743,7 @@
                 <a16:creationId xmlns:a16="http://schemas.microsoft.com/office/drawing/2014/main" id="{5DBCE864-823D-4A13-9607-5DA1F0ED5FB8}"/>
               </a:ext>
               <a:ext uri="{C183D7F6-B498-43B3-948B-1728B52AA6E4}">
-                <adec:decorative xmlns:adec="http://schemas.microsoft.com/office/drawing/2017/decorative" xmlns="" val="0"/>
+                <adec:decorative xmlns:adec="http://schemas.microsoft.com/office/drawing/2017/decorative" val="0"/>
               </a:ext>
             </a:extLst>
           </p:cNvPr>
@@ -7615,7 +12210,7 @@
                 <a16:creationId xmlns:a16="http://schemas.microsoft.com/office/drawing/2014/main" id="{5DBCE864-823D-4A13-9607-5DA1F0ED5FB8}"/>
               </a:ext>
               <a:ext uri="{C183D7F6-B498-43B3-948B-1728B52AA6E4}">
-                <adec:decorative xmlns:adec="http://schemas.microsoft.com/office/drawing/2017/decorative" xmlns="" val="0"/>
+                <adec:decorative xmlns:adec="http://schemas.microsoft.com/office/drawing/2017/decorative" val="0"/>
               </a:ext>
             </a:extLst>
           </p:cNvPr>
@@ -8060,7 +12655,7 @@
                 <a16:creationId xmlns:a16="http://schemas.microsoft.com/office/drawing/2014/main" id="{5DBCE864-823D-4A13-9607-5DA1F0ED5FB8}"/>
               </a:ext>
               <a:ext uri="{C183D7F6-B498-43B3-948B-1728B52AA6E4}">
-                <adec:decorative xmlns:adec="http://schemas.microsoft.com/office/drawing/2017/decorative" xmlns="" val="0"/>
+                <adec:decorative xmlns:adec="http://schemas.microsoft.com/office/drawing/2017/decorative" val="0"/>
               </a:ext>
             </a:extLst>
           </p:cNvPr>
